--- a/results/NHOM_4_CRYSTAL_BALL_BAO_CAO_HOAN_CHINH.pptx
+++ b/results/NHOM_4_CRYSTAL_BALL_BAO_CAO_HOAN_CHINH.pptx
@@ -4,6 +4,9 @@
   <p:sldMasterIdLst>
     <p:sldMasterId id="2147483648" r:id="rId1"/>
   </p:sldMasterIdLst>
+  <p:notesMasterIdLst>
+    <p:notesMasterId r:id="rId29"/>
+  </p:notesMasterIdLst>
   <p:sldIdLst>
     <p:sldId id="256" r:id="rId2"/>
     <p:sldId id="257" r:id="rId3"/>
@@ -33,11 +36,8 @@
     <p:sldId id="281" r:id="rId27"/>
     <p:sldId id="282" r:id="rId28"/>
   </p:sldIdLst>
-  <p:notesMasterIdLst>
-    <p:notesMasterId r:id="rId29"/>
-  </p:notesMasterIdLst>
-  <p:sldSz cx="12191695" cy="6858000"/>
-  <p:notesSz cx="6858000" cy="12191695"/>
+  <p:sldSz cx="12192000" cy="6858000"/>
+  <p:notesSz cx="6858000" cy="12192000"/>
   <p:defaultTextStyle>
     <a:lvl1pPr marL="0" algn="l" defTabSz="914400" rtl="0" eaLnBrk="1" latinLnBrk="0" hangingPunct="1">
       <a:defRPr sz="1800" kern="1200">
@@ -130,6 +130,11 @@
       </a:defRPr>
     </a:lvl9pPr>
   </p:defaultTextStyle>
+  <p:extLst>
+    <p:ext uri="{EFAFB233-063F-42B5-8137-9DF3F51BA10A}">
+      <p15:sldGuideLst xmlns:p15="http://schemas.microsoft.com/office/powerpoint/2012/main"/>
+    </p:ext>
+  </p:extLst>
 </p:presentation>
 </file>
 
@@ -155,234 +160,10 @@
           <a:chExt cx="0" cy="0"/>
         </a:xfrm>
       </p:grpSpPr>
-      <p:sp>
-        <p:nvSpPr>
-          <p:cNvPr id="2" name="Header Placeholder 1"/>
-          <p:cNvSpPr>
-            <a:spLocks noGrp="1"/>
-          </p:cNvSpPr>
-          <p:nvPr>
-            <p:ph type="hdr" sz="quarter"/>
-          </p:nvPr>
-        </p:nvSpPr>
-        <p:spPr>
-          <a:xfrm>
-            <a:off x="0" y="0"/>
-            <a:ext cx="2971800" cy="458788"/>
-          </a:xfrm>
-          <a:prstGeom prst="rect">
-            <a:avLst/>
-          </a:prstGeom>
-        </p:spPr>
-        <p:txBody>
-          <a:bodyPr vert="horz" lIns="91440" tIns="45720" rIns="91440" bIns="45720" rtlCol="0"/>
-          <a:lstStyle>
-            <a:lvl1pPr algn="l">
-              <a:defRPr sz="1200"/>
-            </a:lvl1pPr>
-          </a:lstStyle>
-          <a:p>
-            <a:endParaRPr lang="en-US"/>
-          </a:p>
-        </p:txBody>
-      </p:sp>
-      <p:sp>
-        <p:nvSpPr>
-          <p:cNvPr id="3" name="Date Placeholder 2"/>
-          <p:cNvSpPr>
-            <a:spLocks noGrp="1"/>
-          </p:cNvSpPr>
-          <p:nvPr>
-            <p:ph type="dt" idx="1"/>
-          </p:nvPr>
-        </p:nvSpPr>
-        <p:spPr>
-          <a:xfrm>
-            <a:off x="3884613" y="0"/>
-            <a:ext cx="2971800" cy="458788"/>
-          </a:xfrm>
-          <a:prstGeom prst="rect">
-            <a:avLst/>
-          </a:prstGeom>
-        </p:spPr>
-        <p:txBody>
-          <a:bodyPr vert="horz" lIns="91440" tIns="45720" rIns="91440" bIns="45720" rtlCol="0"/>
-          <a:lstStyle>
-            <a:lvl1pPr algn="r">
-              <a:defRPr sz="1200"/>
-            </a:lvl1pPr>
-          </a:lstStyle>
-          <a:p>
-            <a:fld id="{5282F153-3F37-0F45-9E97-73ACFA13230C}" type="datetimeFigureOut">
-              <a:rPr lang="en-US"/>
-              <a:t>7/23/19</a:t>
-            </a:fld>
-            <a:endParaRPr lang="en-US"/>
-          </a:p>
-        </p:txBody>
-      </p:sp>
-      <p:sp>
-        <p:nvSpPr>
-          <p:cNvPr id="4" name="Slide Image Placeholder 3"/>
-          <p:cNvSpPr>
-            <a:spLocks noGrp="1" noRot="1" noChangeAspect="1"/>
-          </p:cNvSpPr>
-          <p:nvPr>
-            <p:ph type="sldImg" idx="2"/>
-          </p:nvPr>
-        </p:nvSpPr>
-        <p:spPr>
-          <a:xfrm>
-            <a:off x="685800" y="1143000"/>
-            <a:ext cx="5486400" cy="3086100"/>
-          </a:xfrm>
-          <a:prstGeom prst="rect">
-            <a:avLst/>
-          </a:prstGeom>
-          <a:noFill/>
-          <a:ln w="12700">
-            <a:solidFill>
-              <a:prstClr val="black"/>
-            </a:solidFill>
-          </a:ln>
-        </p:spPr>
-        <p:txBody>
-          <a:bodyPr vert="horz" lIns="91440" tIns="45720" rIns="91440" bIns="45720" rtlCol="0" anchor="ctr"/>
-          <a:lstStyle/>
-          <a:p>
-            <a:endParaRPr lang="en-US"/>
-          </a:p>
-        </p:txBody>
-      </p:sp>
-      <p:sp>
-        <p:nvSpPr>
-          <p:cNvPr id="5" name="Notes Placeholder 4"/>
-          <p:cNvSpPr>
-            <a:spLocks noGrp="1"/>
-          </p:cNvSpPr>
-          <p:nvPr>
-            <p:ph type="body" sz="quarter" idx="3"/>
-          </p:nvPr>
-        </p:nvSpPr>
-        <p:spPr>
-          <a:xfrm>
-            <a:off x="685800" y="4400550"/>
-            <a:ext cx="5486400" cy="3600450"/>
-          </a:xfrm>
-          <a:prstGeom prst="rect">
-            <a:avLst/>
-          </a:prstGeom>
-        </p:spPr>
-        <p:txBody>
-          <a:bodyPr vert="horz" lIns="91440" tIns="45720" rIns="91440" bIns="45720" rtlCol="0"/>
-          <a:lstStyle/>
-          <a:p>
-            <a:pPr lvl="0"/>
-            <a:r>
-              <a:rPr lang="en-US"/>
-              <a:t>Click to edit Master text styles</a:t>
-            </a:r>
-          </a:p>
-          <a:p>
-            <a:pPr lvl="1"/>
-            <a:r>
-              <a:rPr lang="en-US"/>
-              <a:t>Second level</a:t>
-            </a:r>
-          </a:p>
-          <a:p>
-            <a:pPr lvl="2"/>
-            <a:r>
-              <a:rPr lang="en-US"/>
-              <a:t>Third level</a:t>
-            </a:r>
-          </a:p>
-          <a:p>
-            <a:pPr lvl="3"/>
-            <a:r>
-              <a:rPr lang="en-US"/>
-              <a:t>Fourth level</a:t>
-            </a:r>
-          </a:p>
-          <a:p>
-            <a:pPr lvl="4"/>
-            <a:r>
-              <a:rPr lang="en-US"/>
-              <a:t>Fifth level</a:t>
-            </a:r>
-          </a:p>
-        </p:txBody>
-      </p:sp>
-      <p:sp>
-        <p:nvSpPr>
-          <p:cNvPr id="6" name="Footer Placeholder 5"/>
-          <p:cNvSpPr>
-            <a:spLocks noGrp="1"/>
-          </p:cNvSpPr>
-          <p:nvPr>
-            <p:ph type="ftr" sz="quarter" idx="4"/>
-          </p:nvPr>
-        </p:nvSpPr>
-        <p:spPr>
-          <a:xfrm>
-            <a:off x="0" y="8685213"/>
-            <a:ext cx="2971800" cy="458787"/>
-          </a:xfrm>
-          <a:prstGeom prst="rect">
-            <a:avLst/>
-          </a:prstGeom>
-        </p:spPr>
-        <p:txBody>
-          <a:bodyPr vert="horz" lIns="91440" tIns="45720" rIns="91440" bIns="45720" rtlCol="0" anchor="b"/>
-          <a:lstStyle>
-            <a:lvl1pPr algn="l">
-              <a:defRPr sz="1200"/>
-            </a:lvl1pPr>
-          </a:lstStyle>
-          <a:p>
-            <a:endParaRPr lang="en-US"/>
-          </a:p>
-        </p:txBody>
-      </p:sp>
-      <p:sp>
-        <p:nvSpPr>
-          <p:cNvPr id="7" name="Slide Number Placeholder 6"/>
-          <p:cNvSpPr>
-            <a:spLocks noGrp="1"/>
-          </p:cNvSpPr>
-          <p:nvPr>
-            <p:ph type="sldNum" sz="quarter" idx="5"/>
-          </p:nvPr>
-        </p:nvSpPr>
-        <p:spPr>
-          <a:xfrm>
-            <a:off x="3884613" y="8685213"/>
-            <a:ext cx="2971800" cy="458787"/>
-          </a:xfrm>
-          <a:prstGeom prst="rect">
-            <a:avLst/>
-          </a:prstGeom>
-        </p:spPr>
-        <p:txBody>
-          <a:bodyPr vert="horz" lIns="91440" tIns="45720" rIns="91440" bIns="45720" rtlCol="0" anchor="b"/>
-          <a:lstStyle>
-            <a:lvl1pPr algn="r">
-              <a:defRPr sz="1200"/>
-            </a:lvl1pPr>
-          </a:lstStyle>
-          <a:p>
-            <a:fld id="{CE5E9CC1-C706-0F49-92D6-E571CC5EEA8F}" type="slidenum">
-              <a:rPr lang="en-US"/>
-              <a:t>‹#›</a:t>
-            </a:fld>
-            <a:endParaRPr lang="en-US"/>
-          </a:p>
-        </p:txBody>
-      </p:sp>
     </p:spTree>
     <p:extLst>
       <p:ext uri="{BB962C8B-B14F-4D97-AF65-F5344CB8AC3E}">
-        <p14:creationId xmlns:p14="http://schemas.microsoft.com/office/powerpoint/2010/main" val="1024086991"/>
+        <p14:creationId xmlns:p14="http://schemas.microsoft.com/office/powerpoint/2010/main" val="567559634"/>
       </p:ext>
     </p:extLst>
   </p:cSld>
@@ -526,10 +307,6 @@
           <a:bodyPr/>
           <a:lstStyle/>
           <a:p>
-            <a:r>
-              <a:rPr lang="en-US" dirty="0"/>
-              <a:t/>
-            </a:r>
             <a:endParaRPr lang="en-US" dirty="0"/>
           </a:p>
         </p:txBody>
@@ -614,10 +391,6 @@
           <a:bodyPr/>
           <a:lstStyle/>
           <a:p>
-            <a:r>
-              <a:rPr lang="en-US" dirty="0"/>
-              <a:t/>
-            </a:r>
             <a:endParaRPr lang="en-US" dirty="0"/>
           </a:p>
         </p:txBody>
@@ -702,10 +475,6 @@
           <a:bodyPr/>
           <a:lstStyle/>
           <a:p>
-            <a:r>
-              <a:rPr lang="en-US" dirty="0"/>
-              <a:t/>
-            </a:r>
             <a:endParaRPr lang="en-US" dirty="0"/>
           </a:p>
         </p:txBody>
@@ -790,10 +559,6 @@
           <a:bodyPr/>
           <a:lstStyle/>
           <a:p>
-            <a:r>
-              <a:rPr lang="en-US" dirty="0"/>
-              <a:t/>
-            </a:r>
             <a:endParaRPr lang="en-US" dirty="0"/>
           </a:p>
         </p:txBody>
@@ -878,10 +643,6 @@
           <a:bodyPr/>
           <a:lstStyle/>
           <a:p>
-            <a:r>
-              <a:rPr lang="en-US" dirty="0"/>
-              <a:t/>
-            </a:r>
             <a:endParaRPr lang="en-US" dirty="0"/>
           </a:p>
         </p:txBody>
@@ -966,10 +727,6 @@
           <a:bodyPr/>
           <a:lstStyle/>
           <a:p>
-            <a:r>
-              <a:rPr lang="en-US" dirty="0"/>
-              <a:t/>
-            </a:r>
             <a:endParaRPr lang="en-US" dirty="0"/>
           </a:p>
         </p:txBody>
@@ -1054,10 +811,6 @@
           <a:bodyPr/>
           <a:lstStyle/>
           <a:p>
-            <a:r>
-              <a:rPr lang="en-US" dirty="0"/>
-              <a:t/>
-            </a:r>
             <a:endParaRPr lang="en-US" dirty="0"/>
           </a:p>
         </p:txBody>
@@ -1142,10 +895,6 @@
           <a:bodyPr/>
           <a:lstStyle/>
           <a:p>
-            <a:r>
-              <a:rPr lang="en-US" dirty="0"/>
-              <a:t/>
-            </a:r>
             <a:endParaRPr lang="en-US" dirty="0"/>
           </a:p>
         </p:txBody>
@@ -1230,10 +979,6 @@
           <a:bodyPr/>
           <a:lstStyle/>
           <a:p>
-            <a:r>
-              <a:rPr lang="en-US" dirty="0"/>
-              <a:t/>
-            </a:r>
             <a:endParaRPr lang="en-US" dirty="0"/>
           </a:p>
         </p:txBody>
@@ -1318,10 +1063,6 @@
           <a:bodyPr/>
           <a:lstStyle/>
           <a:p>
-            <a:r>
-              <a:rPr lang="en-US" dirty="0"/>
-              <a:t/>
-            </a:r>
             <a:endParaRPr lang="en-US" dirty="0"/>
           </a:p>
         </p:txBody>
@@ -1406,10 +1147,6 @@
           <a:bodyPr/>
           <a:lstStyle/>
           <a:p>
-            <a:r>
-              <a:rPr lang="en-US" dirty="0"/>
-              <a:t/>
-            </a:r>
             <a:endParaRPr lang="en-US" dirty="0"/>
           </a:p>
         </p:txBody>
@@ -1494,10 +1231,6 @@
           <a:bodyPr/>
           <a:lstStyle/>
           <a:p>
-            <a:r>
-              <a:rPr lang="en-US" dirty="0"/>
-              <a:t/>
-            </a:r>
             <a:endParaRPr lang="en-US" dirty="0"/>
           </a:p>
         </p:txBody>
@@ -1582,10 +1315,6 @@
           <a:bodyPr/>
           <a:lstStyle/>
           <a:p>
-            <a:r>
-              <a:rPr lang="en-US" dirty="0"/>
-              <a:t/>
-            </a:r>
             <a:endParaRPr lang="en-US" dirty="0"/>
           </a:p>
         </p:txBody>
@@ -1670,10 +1399,6 @@
           <a:bodyPr/>
           <a:lstStyle/>
           <a:p>
-            <a:r>
-              <a:rPr lang="en-US" dirty="0"/>
-              <a:t/>
-            </a:r>
             <a:endParaRPr lang="en-US" dirty="0"/>
           </a:p>
         </p:txBody>
@@ -1758,10 +1483,6 @@
           <a:bodyPr/>
           <a:lstStyle/>
           <a:p>
-            <a:r>
-              <a:rPr lang="en-US" dirty="0"/>
-              <a:t/>
-            </a:r>
             <a:endParaRPr lang="en-US" dirty="0"/>
           </a:p>
         </p:txBody>
@@ -1846,10 +1567,6 @@
           <a:bodyPr/>
           <a:lstStyle/>
           <a:p>
-            <a:r>
-              <a:rPr lang="en-US" dirty="0"/>
-              <a:t/>
-            </a:r>
             <a:endParaRPr lang="en-US" dirty="0"/>
           </a:p>
         </p:txBody>
@@ -1934,10 +1651,6 @@
           <a:bodyPr/>
           <a:lstStyle/>
           <a:p>
-            <a:r>
-              <a:rPr lang="en-US" dirty="0"/>
-              <a:t/>
-            </a:r>
             <a:endParaRPr lang="en-US" dirty="0"/>
           </a:p>
         </p:txBody>
@@ -2022,10 +1735,6 @@
           <a:bodyPr/>
           <a:lstStyle/>
           <a:p>
-            <a:r>
-              <a:rPr lang="en-US" dirty="0"/>
-              <a:t/>
-            </a:r>
             <a:endParaRPr lang="en-US" dirty="0"/>
           </a:p>
         </p:txBody>
@@ -2110,10 +1819,6 @@
           <a:bodyPr/>
           <a:lstStyle/>
           <a:p>
-            <a:r>
-              <a:rPr lang="en-US" dirty="0"/>
-              <a:t/>
-            </a:r>
             <a:endParaRPr lang="en-US" dirty="0"/>
           </a:p>
         </p:txBody>
@@ -2198,10 +1903,6 @@
           <a:bodyPr/>
           <a:lstStyle/>
           <a:p>
-            <a:r>
-              <a:rPr lang="en-US" dirty="0"/>
-              <a:t/>
-            </a:r>
             <a:endParaRPr lang="en-US" dirty="0"/>
           </a:p>
         </p:txBody>
@@ -2286,10 +1987,6 @@
           <a:bodyPr/>
           <a:lstStyle/>
           <a:p>
-            <a:r>
-              <a:rPr lang="en-US" dirty="0"/>
-              <a:t/>
-            </a:r>
             <a:endParaRPr lang="en-US" dirty="0"/>
           </a:p>
         </p:txBody>
@@ -2374,10 +2071,6 @@
           <a:bodyPr/>
           <a:lstStyle/>
           <a:p>
-            <a:r>
-              <a:rPr lang="en-US" dirty="0"/>
-              <a:t/>
-            </a:r>
             <a:endParaRPr lang="en-US" dirty="0"/>
           </a:p>
         </p:txBody>
@@ -2462,10 +2155,6 @@
           <a:bodyPr/>
           <a:lstStyle/>
           <a:p>
-            <a:r>
-              <a:rPr lang="en-US" dirty="0"/>
-              <a:t/>
-            </a:r>
             <a:endParaRPr lang="en-US" dirty="0"/>
           </a:p>
         </p:txBody>
@@ -2550,10 +2239,6 @@
           <a:bodyPr/>
           <a:lstStyle/>
           <a:p>
-            <a:r>
-              <a:rPr lang="en-US" dirty="0"/>
-              <a:t/>
-            </a:r>
             <a:endParaRPr lang="en-US" dirty="0"/>
           </a:p>
         </p:txBody>
@@ -2638,10 +2323,6 @@
           <a:bodyPr/>
           <a:lstStyle/>
           <a:p>
-            <a:r>
-              <a:rPr lang="en-US" dirty="0"/>
-              <a:t/>
-            </a:r>
             <a:endParaRPr lang="en-US" dirty="0"/>
           </a:p>
         </p:txBody>
@@ -2726,10 +2407,6 @@
           <a:bodyPr/>
           <a:lstStyle/>
           <a:p>
-            <a:r>
-              <a:rPr lang="en-US" dirty="0"/>
-              <a:t/>
-            </a:r>
             <a:endParaRPr lang="en-US" dirty="0"/>
           </a:p>
         </p:txBody>
@@ -2814,10 +2491,6 @@
           <a:bodyPr/>
           <a:lstStyle/>
           <a:p>
-            <a:r>
-              <a:rPr lang="en-US" dirty="0"/>
-              <a:t/>
-            </a:r>
             <a:endParaRPr lang="en-US" dirty="0"/>
           </a:p>
         </p:txBody>
@@ -2896,6 +2569,7 @@
         <a:solidFill>
           <a:srgbClr val="FFFFFF"/>
         </a:solidFill>
+        <a:effectLst/>
       </p:bgPr>
     </p:bg>
     <p:spTree>
@@ -2956,7 +2630,7 @@
           <a:bodyPr wrap="square" lIns="0" tIns="0" rIns="0" bIns="0" rtlCol="0" anchor="ctr"/>
           <a:lstStyle/>
           <a:p>
-            <a:pPr indent="0" marL="0">
+            <a:pPr marL="0" indent="0">
               <a:buNone/>
             </a:pPr>
             <a:r>
@@ -2994,7 +2668,7 @@
           </a:prstGeom>
           <a:extLst>
             <a:ext uri="{C572A759-6A51-4108-AA02-DFA0A04FC94B}">
-              <ma14:wrappingTextBoxFlag xmlns:ma14="http://schemas.microsoft.com/office/mac/drawingml/2011/main" val="0"/>
+              <ma14:wrappingTextBoxFlag xmlns:ma14="http://schemas.microsoft.com/office/mac/drawingml/2011/main" xmlns="" val="0"/>
             </a:ext>
           </a:extLst>
         </p:spPr>
@@ -3015,8 +2689,8 @@
           <a:p>
             <a:pPr algn="l"/>
             <a:fld id="{F7021451-1387-4CA6-816F-3879F97B5CBC}" type="slidenum">
-              <a:rPr b="0" lang="en-US"/>
-              <a:t>1002</a:t>
+              <a:rPr lang="en-US" b="0"/>
+              <a:t>‹#›</a:t>
             </a:fld>
             <a:endParaRPr lang="en-US"/>
           </a:p>
@@ -3033,6 +2707,11 @@
 <file path=ppt/slideMasters/slideMaster1.xml><?xml version="1.0" encoding="utf-8"?>
 <p:sldMaster xmlns:a="http://schemas.openxmlformats.org/drawingml/2006/main" xmlns:r="http://schemas.openxmlformats.org/officeDocument/2006/relationships" xmlns:p="http://schemas.openxmlformats.org/presentationml/2006/main">
   <p:cSld>
+    <p:bg>
+      <p:bgRef idx="1001">
+        <a:schemeClr val="bg1"/>
+      </p:bgRef>
+    </p:bg>
     <p:spTree>
       <p:nvGrpSpPr>
         <p:cNvPr id="1" name=""/>
@@ -3067,7 +2746,7 @@
           </a:prstGeom>
           <a:extLst>
             <a:ext uri="{C572A759-6A51-4108-AA02-DFA0A04FC94B}">
-              <ma14:wrappingTextBoxFlag xmlns:ma14="http://schemas.microsoft.com/office/mac/drawingml/2011/main" val="0"/>
+              <ma14:wrappingTextBoxFlag xmlns:ma14="http://schemas.microsoft.com/office/mac/drawingml/2011/main" xmlns="" val="0"/>
             </a:ext>
           </a:extLst>
         </p:spPr>
@@ -3088,8 +2767,8 @@
           <a:p>
             <a:pPr algn="l"/>
             <a:fld id="{F7021451-1387-4CA6-816F-3879F97B5CBC}" type="slidenum">
-              <a:rPr b="0" lang="en-US"/>
-              <a:t>null</a:t>
+              <a:rPr lang="en-US" b="0"/>
+              <a:t>‹#›</a:t>
             </a:fld>
             <a:endParaRPr lang="en-US"/>
           </a:p>
@@ -3364,6 +3043,7 @@
         <a:solidFill>
           <a:srgbClr val="FFFFFF"/>
         </a:solidFill>
+        <a:effectLst/>
       </p:bgPr>
     </p:bg>
     <p:spTree>
@@ -3382,15 +3062,15 @@
       </p:grpSpPr>
       <p:pic>
         <p:nvPicPr>
-          <p:cNvPr id="2" name="Image 0" descr="D:\CRM\crystal-ball-insights\src\assets\dashboard-preview.jpg">    </p:cNvPr>
+          <p:cNvPr id="2" name="Image 0" descr="D:\CRM\crystal-ball-insights\src\assets\dashboard-preview.jpg"/>
           <p:cNvPicPr>
             <a:picLocks noChangeAspect="1"/>
           </p:cNvPicPr>
           <p:nvPr/>
         </p:nvPicPr>
         <p:blipFill>
-          <a:blip r:embed="rId1"/>
-          <a:srcRect l="0" r="0" t="0" b="0"/>
+          <a:blip r:embed="rId3"/>
+          <a:srcRect/>
           <a:stretch/>
         </p:blipFill>
         <p:spPr>
@@ -3426,7 +3106,7 @@
           </a:bodyPr>
           <a:lstStyle/>
           <a:p>
-            <a:pPr indent="0" marL="0">
+            <a:pPr marL="0" indent="0">
               <a:buNone/>
             </a:pPr>
             <a:r>
@@ -3467,7 +3147,7 @@
           </a:bodyPr>
           <a:lstStyle/>
           <a:p>
-            <a:pPr indent="0" marL="0">
+            <a:pPr marL="0" indent="0">
               <a:buNone/>
             </a:pPr>
             <a:r>
@@ -3504,11 +3184,11 @@
         </p:spPr>
         <p:txBody>
           <a:bodyPr wrap="square" lIns="381" tIns="381" rIns="381" bIns="381" rtlCol="0" anchor="t">
-            <a:normAutofit/>
+            <a:normAutofit fontScale="92500" lnSpcReduction="20000"/>
           </a:bodyPr>
           <a:lstStyle/>
           <a:p>
-            <a:pPr indent="0" marL="0">
+            <a:pPr marL="0" indent="0">
               <a:buNone/>
             </a:pPr>
             <a:r>
@@ -3545,11 +3225,11 @@
         </p:spPr>
         <p:txBody>
           <a:bodyPr wrap="square" lIns="381" tIns="381" rIns="381" bIns="381" rtlCol="0" anchor="t">
-            <a:normAutofit/>
+            <a:normAutofit fontScale="92500"/>
           </a:bodyPr>
           <a:lstStyle/>
           <a:p>
-            <a:pPr indent="0" marL="0">
+            <a:pPr marL="0" indent="0">
               <a:buNone/>
             </a:pPr>
             <a:r>
@@ -3561,7 +3241,63 @@
                 <a:ea typeface="Arial" pitchFamily="34" charset="-122"/>
                 <a:cs typeface="Arial" pitchFamily="34" charset="-120"/>
               </a:rPr>
-              <a:t>Báo cáo phương pháp nghiên cứu, triển khai hệ thống, AI tích hợp, tự động hóa và kết quả thực nghiệm</a:t>
+              <a:t>Báo cáo phương pháp nghiên cứu, triển khai hệ thống, AI tích hợp, tự động hóa và kết quả </a:t>
+            </a:r>
+            <a:r>
+              <a:rPr lang="en-US" sz="1600" dirty="0" err="1">
+                <a:solidFill>
+                  <a:srgbClr val="667085"/>
+                </a:solidFill>
+                <a:latin typeface="Arial" pitchFamily="34" charset="0"/>
+                <a:ea typeface="Arial" pitchFamily="34" charset="-122"/>
+                <a:cs typeface="Arial" pitchFamily="34" charset="-120"/>
+              </a:rPr>
+              <a:t>thực</a:t>
+            </a:r>
+            <a:r>
+              <a:rPr lang="en-US" sz="1600" dirty="0">
+                <a:solidFill>
+                  <a:srgbClr val="667085"/>
+                </a:solidFill>
+                <a:latin typeface="Arial" pitchFamily="34" charset="0"/>
+                <a:ea typeface="Arial" pitchFamily="34" charset="-122"/>
+                <a:cs typeface="Arial" pitchFamily="34" charset="-120"/>
+              </a:rPr>
+              <a:t> </a:t>
+            </a:r>
+            <a:r>
+              <a:rPr lang="en-US" sz="1600" dirty="0" err="1" smtClean="0">
+                <a:solidFill>
+                  <a:srgbClr val="667085"/>
+                </a:solidFill>
+                <a:latin typeface="Arial" pitchFamily="34" charset="0"/>
+                <a:ea typeface="Arial" pitchFamily="34" charset="-122"/>
+                <a:cs typeface="Arial" pitchFamily="34" charset="-120"/>
+              </a:rPr>
+              <a:t>nghiệm</a:t>
+            </a:r>
+            <a:endParaRPr lang="en-US" sz="1600" dirty="0" smtClean="0">
+              <a:solidFill>
+                <a:srgbClr val="667085"/>
+              </a:solidFill>
+              <a:latin typeface="Arial" pitchFamily="34" charset="0"/>
+              <a:ea typeface="Arial" pitchFamily="34" charset="-122"/>
+              <a:cs typeface="Arial" pitchFamily="34" charset="-120"/>
+            </a:endParaRPr>
+          </a:p>
+          <a:p>
+            <a:pPr marL="0" indent="0">
+              <a:buNone/>
+            </a:pPr>
+            <a:r>
+              <a:rPr lang="en-US" sz="1600" smtClean="0">
+                <a:solidFill>
+                  <a:srgbClr val="667085"/>
+                </a:solidFill>
+                <a:latin typeface="Arial" pitchFamily="34" charset="0"/>
+                <a:cs typeface="Arial" pitchFamily="34" charset="-120"/>
+              </a:rPr>
+              <a:t>NHÓM 4</a:t>
             </a:r>
             <a:endParaRPr lang="en-US" sz="1600" dirty="0"/>
           </a:p>
@@ -3634,11 +3370,11 @@
         </p:spPr>
         <p:txBody>
           <a:bodyPr wrap="square" lIns="381" tIns="381" rIns="381" bIns="381" rtlCol="0" anchor="t">
-            <a:normAutofit/>
+            <a:normAutofit lnSpcReduction="10000"/>
           </a:bodyPr>
           <a:lstStyle/>
           <a:p>
-            <a:pPr algn="ctr" indent="0" marL="0">
+            <a:pPr marL="0" indent="0" algn="ctr">
               <a:buNone/>
             </a:pPr>
             <a:r>
@@ -3679,7 +3415,7 @@
           </a:bodyPr>
           <a:lstStyle/>
           <a:p>
-            <a:pPr algn="ctr" indent="0" marL="0">
+            <a:pPr marL="0" indent="0" algn="ctr">
               <a:buNone/>
             </a:pPr>
             <a:r>
@@ -3720,7 +3456,7 @@
           </a:bodyPr>
           <a:lstStyle/>
           <a:p>
-            <a:pPr algn="ctr" indent="0" marL="0">
+            <a:pPr marL="0" indent="0" algn="ctr">
               <a:buNone/>
             </a:pPr>
             <a:r>
@@ -3782,11 +3518,11 @@
         </p:spPr>
         <p:txBody>
           <a:bodyPr wrap="square" lIns="381" tIns="381" rIns="381" bIns="381" rtlCol="0" anchor="t">
-            <a:normAutofit/>
+            <a:normAutofit lnSpcReduction="10000"/>
           </a:bodyPr>
           <a:lstStyle/>
           <a:p>
-            <a:pPr algn="ctr" indent="0" marL="0">
+            <a:pPr marL="0" indent="0" algn="ctr">
               <a:buNone/>
             </a:pPr>
             <a:r>
@@ -3827,7 +3563,7 @@
           </a:bodyPr>
           <a:lstStyle/>
           <a:p>
-            <a:pPr algn="ctr" indent="0" marL="0">
+            <a:pPr marL="0" indent="0" algn="ctr">
               <a:buNone/>
             </a:pPr>
             <a:r>
@@ -3868,7 +3604,7 @@
           </a:bodyPr>
           <a:lstStyle/>
           <a:p>
-            <a:pPr algn="ctr" indent="0" marL="0">
+            <a:pPr marL="0" indent="0" algn="ctr">
               <a:buNone/>
             </a:pPr>
             <a:r>
@@ -3930,11 +3666,11 @@
         </p:spPr>
         <p:txBody>
           <a:bodyPr wrap="square" lIns="381" tIns="381" rIns="381" bIns="381" rtlCol="0" anchor="t">
-            <a:normAutofit/>
+            <a:normAutofit lnSpcReduction="10000"/>
           </a:bodyPr>
           <a:lstStyle/>
           <a:p>
-            <a:pPr algn="ctr" indent="0" marL="0">
+            <a:pPr marL="0" indent="0" algn="ctr">
               <a:buNone/>
             </a:pPr>
             <a:r>
@@ -3975,7 +3711,7 @@
           </a:bodyPr>
           <a:lstStyle/>
           <a:p>
-            <a:pPr algn="ctr" indent="0" marL="0">
+            <a:pPr marL="0" indent="0" algn="ctr">
               <a:buNone/>
             </a:pPr>
             <a:r>
@@ -4016,7 +3752,7 @@
           </a:bodyPr>
           <a:lstStyle/>
           <a:p>
-            <a:pPr algn="ctr" indent="0" marL="0">
+            <a:pPr marL="0" indent="0" algn="ctr">
               <a:buNone/>
             </a:pPr>
             <a:r>
@@ -4057,7 +3793,7 @@
           </a:bodyPr>
           <a:lstStyle/>
           <a:p>
-            <a:pPr indent="0" marL="0">
+            <a:pPr marL="0" indent="0">
               <a:buNone/>
             </a:pPr>
             <a:r>
@@ -4091,6 +3827,7 @@
         <a:solidFill>
           <a:srgbClr val="FFFFFF"/>
         </a:solidFill>
+        <a:effectLst/>
       </p:bgPr>
     </p:bg>
     <p:spTree>
@@ -4128,7 +3865,7 @@
           <a:bodyPr wrap="square" lIns="0" tIns="0" rIns="0" bIns="0" rtlCol="0" anchor="ctr"/>
           <a:lstStyle/>
           <a:p>
-            <a:pPr indent="0" marL="0">
+            <a:pPr marL="0" indent="0">
               <a:buNone/>
             </a:pPr>
             <a:r>
@@ -4169,7 +3906,7 @@
           </a:bodyPr>
           <a:lstStyle/>
           <a:p>
-            <a:pPr indent="0" marL="0">
+            <a:pPr marL="0" indent="0">
               <a:buNone/>
             </a:pPr>
             <a:r>
@@ -4254,11 +3991,11 @@
         </p:spPr>
         <p:txBody>
           <a:bodyPr wrap="square" lIns="381" tIns="381" rIns="381" bIns="381" rtlCol="0" anchor="t">
-            <a:normAutofit/>
+            <a:normAutofit lnSpcReduction="10000"/>
           </a:bodyPr>
           <a:lstStyle/>
           <a:p>
-            <a:pPr algn="ctr" indent="0" marL="0">
+            <a:pPr marL="0" indent="0" algn="ctr">
               <a:buNone/>
             </a:pPr>
             <a:r>
@@ -4299,7 +4036,7 @@
           </a:bodyPr>
           <a:lstStyle/>
           <a:p>
-            <a:pPr algn="ctr" indent="0" marL="0">
+            <a:pPr marL="0" indent="0" algn="ctr">
               <a:buNone/>
             </a:pPr>
             <a:r>
@@ -4340,7 +4077,7 @@
           </a:bodyPr>
           <a:lstStyle/>
           <a:p>
-            <a:pPr algn="ctr" indent="0" marL="0">
+            <a:pPr marL="0" indent="0" algn="ctr">
               <a:buNone/>
             </a:pPr>
             <a:r>
@@ -4402,11 +4139,11 @@
         </p:spPr>
         <p:txBody>
           <a:bodyPr wrap="square" lIns="381" tIns="381" rIns="381" bIns="381" rtlCol="0" anchor="t">
-            <a:normAutofit/>
+            <a:normAutofit lnSpcReduction="10000"/>
           </a:bodyPr>
           <a:lstStyle/>
           <a:p>
-            <a:pPr algn="ctr" indent="0" marL="0">
+            <a:pPr marL="0" indent="0" algn="ctr">
               <a:buNone/>
             </a:pPr>
             <a:r>
@@ -4447,7 +4184,7 @@
           </a:bodyPr>
           <a:lstStyle/>
           <a:p>
-            <a:pPr algn="ctr" indent="0" marL="0">
+            <a:pPr marL="0" indent="0" algn="ctr">
               <a:buNone/>
             </a:pPr>
             <a:r>
@@ -4488,7 +4225,7 @@
           </a:bodyPr>
           <a:lstStyle/>
           <a:p>
-            <a:pPr algn="ctr" indent="0" marL="0">
+            <a:pPr marL="0" indent="0" algn="ctr">
               <a:buNone/>
             </a:pPr>
             <a:r>
@@ -4550,11 +4287,11 @@
         </p:spPr>
         <p:txBody>
           <a:bodyPr wrap="square" lIns="381" tIns="381" rIns="381" bIns="381" rtlCol="0" anchor="t">
-            <a:normAutofit/>
+            <a:normAutofit lnSpcReduction="10000"/>
           </a:bodyPr>
           <a:lstStyle/>
           <a:p>
-            <a:pPr algn="ctr" indent="0" marL="0">
+            <a:pPr marL="0" indent="0" algn="ctr">
               <a:buNone/>
             </a:pPr>
             <a:r>
@@ -4595,7 +4332,7 @@
           </a:bodyPr>
           <a:lstStyle/>
           <a:p>
-            <a:pPr algn="ctr" indent="0" marL="0">
+            <a:pPr marL="0" indent="0" algn="ctr">
               <a:buNone/>
             </a:pPr>
             <a:r>
@@ -4636,7 +4373,7 @@
           </a:bodyPr>
           <a:lstStyle/>
           <a:p>
-            <a:pPr algn="ctr" indent="0" marL="0">
+            <a:pPr marL="0" indent="0" algn="ctr">
               <a:buNone/>
             </a:pPr>
             <a:r>
@@ -4698,11 +4435,11 @@
         </p:spPr>
         <p:txBody>
           <a:bodyPr wrap="square" lIns="381" tIns="381" rIns="381" bIns="381" rtlCol="0" anchor="t">
-            <a:normAutofit/>
+            <a:normAutofit lnSpcReduction="10000"/>
           </a:bodyPr>
           <a:lstStyle/>
           <a:p>
-            <a:pPr algn="ctr" indent="0" marL="0">
+            <a:pPr marL="0" indent="0" algn="ctr">
               <a:buNone/>
             </a:pPr>
             <a:r>
@@ -4743,7 +4480,7 @@
           </a:bodyPr>
           <a:lstStyle/>
           <a:p>
-            <a:pPr algn="ctr" indent="0" marL="0">
+            <a:pPr marL="0" indent="0" algn="ctr">
               <a:buNone/>
             </a:pPr>
             <a:r>
@@ -4784,7 +4521,7 @@
           </a:bodyPr>
           <a:lstStyle/>
           <a:p>
-            <a:pPr algn="ctr" indent="0" marL="0">
+            <a:pPr marL="0" indent="0" algn="ctr">
               <a:buNone/>
             </a:pPr>
             <a:r>
@@ -4846,11 +4583,11 @@
         </p:spPr>
         <p:txBody>
           <a:bodyPr wrap="square" lIns="381" tIns="381" rIns="381" bIns="381" rtlCol="0" anchor="t">
-            <a:normAutofit/>
+            <a:normAutofit lnSpcReduction="10000"/>
           </a:bodyPr>
           <a:lstStyle/>
           <a:p>
-            <a:pPr algn="ctr" indent="0" marL="0">
+            <a:pPr marL="0" indent="0" algn="ctr">
               <a:buNone/>
             </a:pPr>
             <a:r>
@@ -4891,7 +4628,7 @@
           </a:bodyPr>
           <a:lstStyle/>
           <a:p>
-            <a:pPr algn="ctr" indent="0" marL="0">
+            <a:pPr marL="0" indent="0" algn="ctr">
               <a:buNone/>
             </a:pPr>
             <a:r>
@@ -4932,7 +4669,7 @@
           </a:bodyPr>
           <a:lstStyle/>
           <a:p>
-            <a:pPr algn="ctr" indent="0" marL="0">
+            <a:pPr marL="0" indent="0" algn="ctr">
               <a:buNone/>
             </a:pPr>
             <a:r>
@@ -4998,7 +4735,7 @@
           </a:bodyPr>
           <a:lstStyle/>
           <a:p>
-            <a:pPr indent="0" marL="0">
+            <a:pPr marL="0" indent="0">
               <a:buNone/>
             </a:pPr>
             <a:r>
@@ -5039,7 +4776,7 @@
           </a:bodyPr>
           <a:lstStyle/>
           <a:p>
-            <a:pPr indent="0" marL="0">
+            <a:pPr marL="0" indent="0">
               <a:buNone/>
             </a:pPr>
             <a:r>
@@ -5105,7 +4842,7 @@
           </a:bodyPr>
           <a:lstStyle/>
           <a:p>
-            <a:pPr indent="0" marL="0">
+            <a:pPr marL="0" indent="0">
               <a:buNone/>
             </a:pPr>
             <a:r>
@@ -5146,7 +4883,7 @@
           </a:bodyPr>
           <a:lstStyle/>
           <a:p>
-            <a:pPr indent="0" marL="0">
+            <a:pPr marL="0" indent="0">
               <a:buNone/>
             </a:pPr>
             <a:r>
@@ -5212,7 +4949,7 @@
           </a:bodyPr>
           <a:lstStyle/>
           <a:p>
-            <a:pPr indent="0" marL="0">
+            <a:pPr marL="0" indent="0">
               <a:buNone/>
             </a:pPr>
             <a:r>
@@ -5253,7 +4990,7 @@
           </a:bodyPr>
           <a:lstStyle/>
           <a:p>
-            <a:pPr indent="0" marL="0">
+            <a:pPr marL="0" indent="0">
               <a:buNone/>
             </a:pPr>
             <a:r>
@@ -5290,11 +5027,11 @@
         </p:spPr>
         <p:txBody>
           <a:bodyPr wrap="square" lIns="381" tIns="381" rIns="381" bIns="381" rtlCol="0" anchor="t">
-            <a:normAutofit/>
+            <a:normAutofit fontScale="92500"/>
           </a:bodyPr>
           <a:lstStyle/>
           <a:p>
-            <a:pPr algn="ctr" indent="0" marL="0">
+            <a:pPr marL="0" indent="0" algn="ctr">
               <a:buNone/>
             </a:pPr>
             <a:r>
@@ -5335,7 +5072,7 @@
           </a:bodyPr>
           <a:lstStyle/>
           <a:p>
-            <a:pPr indent="0" marL="0">
+            <a:pPr marL="0" indent="0">
               <a:buNone/>
             </a:pPr>
             <a:r>
@@ -5355,7 +5092,7 @@
       </p:sp>
       <p:sp>
         <p:nvSpPr>
-          <p:cNvPr id="25" name="Slide Number Placeholder 0"/>
+          <p:cNvPr id="36" name="Slide Number Placeholder 0"/>
           <p:cNvSpPr>
             <a:spLocks noGrp="1"/>
           </p:cNvSpPr>
@@ -5373,7 +5110,7 @@
           </a:prstGeom>
           <a:extLst>
             <a:ext uri="{C572A759-6A51-4108-AA02-DFA0A04FC94B}">
-              <ma14:wrappingTextBoxFlag xmlns:ma14="http://schemas.microsoft.com/office/mac/drawingml/2011/main" val="0"/>
+              <ma14:wrappingTextBoxFlag xmlns:ma14="http://schemas.microsoft.com/office/mac/drawingml/2011/main" xmlns="" val="0"/>
             </a:ext>
           </a:extLst>
         </p:spPr>
@@ -5394,7 +5131,7 @@
           <a:p>
             <a:pPr algn="l"/>
             <a:fld id="{F7021451-1387-4CA6-816F-3879F97B5CBC}" type="slidenum">
-              <a:rPr b="0" lang="en-US"/>
+              <a:rPr lang="en-US" b="0"/>
               <a:t>10</a:t>
             </a:fld>
             <a:endParaRPr lang="en-US"/>
@@ -5417,6 +5154,7 @@
         <a:solidFill>
           <a:srgbClr val="FFFFFF"/>
         </a:solidFill>
+        <a:effectLst/>
       </p:bgPr>
     </p:bg>
     <p:spTree>
@@ -5454,7 +5192,7 @@
           <a:bodyPr wrap="square" lIns="0" tIns="0" rIns="0" bIns="0" rtlCol="0" anchor="ctr"/>
           <a:lstStyle/>
           <a:p>
-            <a:pPr indent="0" marL="0">
+            <a:pPr marL="0" indent="0">
               <a:buNone/>
             </a:pPr>
             <a:r>
@@ -5495,7 +5233,7 @@
           </a:bodyPr>
           <a:lstStyle/>
           <a:p>
-            <a:pPr indent="0" marL="0">
+            <a:pPr marL="0" indent="0">
               <a:buNone/>
             </a:pPr>
             <a:r>
@@ -5559,9 +5297,27 @@
             <a:tbl>
               <a:tblPr/>
               <a:tblGrid>
-                <a:gridCol w="1920240"/>
-                <a:gridCol w="4389120"/>
-                <a:gridCol w="4572000"/>
+                <a:gridCol w="1920240">
+                  <a:extLst>
+                    <a:ext uri="{9D8B030D-6E8A-4147-A177-3AD203B41FA5}">
+                      <a16:colId xmlns:a16="http://schemas.microsoft.com/office/drawing/2014/main" val="20000"/>
+                    </a:ext>
+                  </a:extLst>
+                </a:gridCol>
+                <a:gridCol w="4389120">
+                  <a:extLst>
+                    <a:ext uri="{9D8B030D-6E8A-4147-A177-3AD203B41FA5}">
+                      <a16:colId xmlns:a16="http://schemas.microsoft.com/office/drawing/2014/main" val="20001"/>
+                    </a:ext>
+                  </a:extLst>
+                </a:gridCol>
+                <a:gridCol w="4572000">
+                  <a:extLst>
+                    <a:ext uri="{9D8B030D-6E8A-4147-A177-3AD203B41FA5}">
+                      <a16:colId xmlns:a16="http://schemas.microsoft.com/office/drawing/2014/main" val="20002"/>
+                    </a:ext>
+                  </a:extLst>
+                </a:gridCol>
               </a:tblGrid>
               <a:tr h="649224">
                 <a:tc>
@@ -5569,7 +5325,7 @@
                     <a:bodyPr/>
                     <a:lstStyle/>
                     <a:p>
-                      <a:pPr indent="0" marL="0">
+                      <a:pPr marL="0" indent="0">
                         <a:buNone/>
                       </a:pPr>
                       <a:r>
@@ -5590,7 +5346,7 @@
                       </a:endParaRPr>
                     </a:p>
                   </a:txBody>
-                  <a:tcPr marL="45720" marR="45720" marT="45720" marB="45720" anchor="mid">
+                  <a:tcPr marL="45720" marR="45720">
                     <a:lnL w="8255" cap="flat" cmpd="sng" algn="ctr">
                       <a:solidFill>
                         <a:srgbClr val="D0D5DD"/>
@@ -5634,7 +5390,7 @@
                     <a:bodyPr/>
                     <a:lstStyle/>
                     <a:p>
-                      <a:pPr indent="0" marL="0">
+                      <a:pPr marL="0" indent="0">
                         <a:buNone/>
                       </a:pPr>
                       <a:r>
@@ -5655,7 +5411,7 @@
                       </a:endParaRPr>
                     </a:p>
                   </a:txBody>
-                  <a:tcPr marL="45720" marR="45720" marT="45720" marB="45720" anchor="mid">
+                  <a:tcPr marL="45720" marR="45720">
                     <a:lnL w="8255" cap="flat" cmpd="sng" algn="ctr">
                       <a:solidFill>
                         <a:srgbClr val="D0D5DD"/>
@@ -5699,7 +5455,7 @@
                     <a:bodyPr/>
                     <a:lstStyle/>
                     <a:p>
-                      <a:pPr indent="0" marL="0">
+                      <a:pPr marL="0" indent="0">
                         <a:buNone/>
                       </a:pPr>
                       <a:r>
@@ -5720,7 +5476,7 @@
                       </a:endParaRPr>
                     </a:p>
                   </a:txBody>
-                  <a:tcPr marL="45720" marR="45720" marT="45720" marB="45720" anchor="mid">
+                  <a:tcPr marL="45720" marR="45720">
                     <a:lnL w="8255" cap="flat" cmpd="sng" algn="ctr">
                       <a:solidFill>
                         <a:srgbClr val="D0D5DD"/>
@@ -5759,6 +5515,11 @@
                     </a:lnB>
                   </a:tcPr>
                 </a:tc>
+                <a:extLst>
+                  <a:ext uri="{0D108BD9-81ED-4DB2-BD59-A6C34878D82A}">
+                    <a16:rowId xmlns:a16="http://schemas.microsoft.com/office/drawing/2014/main" val="10000"/>
+                  </a:ext>
+                </a:extLst>
               </a:tr>
               <a:tr h="649224">
                 <a:tc>
@@ -5766,7 +5527,7 @@
                     <a:bodyPr/>
                     <a:lstStyle/>
                     <a:p>
-                      <a:pPr indent="0" marL="0">
+                      <a:pPr marL="0" indent="0">
                         <a:buNone/>
                       </a:pPr>
                       <a:r>
@@ -5787,7 +5548,7 @@
                       </a:endParaRPr>
                     </a:p>
                   </a:txBody>
-                  <a:tcPr marL="45720" marR="45720" marT="45720" marB="45720" anchor="mid">
+                  <a:tcPr marL="45720" marR="45720">
                     <a:lnL w="8255" cap="flat" cmpd="sng" algn="ctr">
                       <a:solidFill>
                         <a:srgbClr val="D0D5DD"/>
@@ -5831,7 +5592,7 @@
                     <a:bodyPr/>
                     <a:lstStyle/>
                     <a:p>
-                      <a:pPr indent="0" marL="0">
+                      <a:pPr marL="0" indent="0">
                         <a:buNone/>
                       </a:pPr>
                       <a:r>
@@ -5852,7 +5613,7 @@
                       </a:endParaRPr>
                     </a:p>
                   </a:txBody>
-                  <a:tcPr marL="45720" marR="45720" marT="45720" marB="45720" anchor="mid">
+                  <a:tcPr marL="45720" marR="45720">
                     <a:lnL w="8255" cap="flat" cmpd="sng" algn="ctr">
                       <a:solidFill>
                         <a:srgbClr val="D0D5DD"/>
@@ -5896,7 +5657,7 @@
                     <a:bodyPr/>
                     <a:lstStyle/>
                     <a:p>
-                      <a:pPr indent="0" marL="0">
+                      <a:pPr marL="0" indent="0">
                         <a:buNone/>
                       </a:pPr>
                       <a:r>
@@ -5917,7 +5678,7 @@
                       </a:endParaRPr>
                     </a:p>
                   </a:txBody>
-                  <a:tcPr marL="45720" marR="45720" marT="45720" marB="45720" anchor="mid">
+                  <a:tcPr marL="45720" marR="45720">
                     <a:lnL w="8255" cap="flat" cmpd="sng" algn="ctr">
                       <a:solidFill>
                         <a:srgbClr val="D0D5DD"/>
@@ -5956,6 +5717,11 @@
                     </a:lnB>
                   </a:tcPr>
                 </a:tc>
+                <a:extLst>
+                  <a:ext uri="{0D108BD9-81ED-4DB2-BD59-A6C34878D82A}">
+                    <a16:rowId xmlns:a16="http://schemas.microsoft.com/office/drawing/2014/main" val="10001"/>
+                  </a:ext>
+                </a:extLst>
               </a:tr>
               <a:tr h="649224">
                 <a:tc>
@@ -5963,7 +5729,7 @@
                     <a:bodyPr/>
                     <a:lstStyle/>
                     <a:p>
-                      <a:pPr indent="0" marL="0">
+                      <a:pPr marL="0" indent="0">
                         <a:buNone/>
                       </a:pPr>
                       <a:r>
@@ -5984,7 +5750,7 @@
                       </a:endParaRPr>
                     </a:p>
                   </a:txBody>
-                  <a:tcPr marL="45720" marR="45720" marT="45720" marB="45720" anchor="mid">
+                  <a:tcPr marL="45720" marR="45720">
                     <a:lnL w="8255" cap="flat" cmpd="sng" algn="ctr">
                       <a:solidFill>
                         <a:srgbClr val="D0D5DD"/>
@@ -6028,7 +5794,7 @@
                     <a:bodyPr/>
                     <a:lstStyle/>
                     <a:p>
-                      <a:pPr indent="0" marL="0">
+                      <a:pPr marL="0" indent="0">
                         <a:buNone/>
                       </a:pPr>
                       <a:r>
@@ -6049,7 +5815,7 @@
                       </a:endParaRPr>
                     </a:p>
                   </a:txBody>
-                  <a:tcPr marL="45720" marR="45720" marT="45720" marB="45720" anchor="mid">
+                  <a:tcPr marL="45720" marR="45720">
                     <a:lnL w="8255" cap="flat" cmpd="sng" algn="ctr">
                       <a:solidFill>
                         <a:srgbClr val="D0D5DD"/>
@@ -6093,7 +5859,7 @@
                     <a:bodyPr/>
                     <a:lstStyle/>
                     <a:p>
-                      <a:pPr indent="0" marL="0">
+                      <a:pPr marL="0" indent="0">
                         <a:buNone/>
                       </a:pPr>
                       <a:r>
@@ -6114,7 +5880,7 @@
                       </a:endParaRPr>
                     </a:p>
                   </a:txBody>
-                  <a:tcPr marL="45720" marR="45720" marT="45720" marB="45720" anchor="mid">
+                  <a:tcPr marL="45720" marR="45720">
                     <a:lnL w="8255" cap="flat" cmpd="sng" algn="ctr">
                       <a:solidFill>
                         <a:srgbClr val="D0D5DD"/>
@@ -6153,6 +5919,11 @@
                     </a:lnB>
                   </a:tcPr>
                 </a:tc>
+                <a:extLst>
+                  <a:ext uri="{0D108BD9-81ED-4DB2-BD59-A6C34878D82A}">
+                    <a16:rowId xmlns:a16="http://schemas.microsoft.com/office/drawing/2014/main" val="10002"/>
+                  </a:ext>
+                </a:extLst>
               </a:tr>
               <a:tr h="649224">
                 <a:tc>
@@ -6160,7 +5931,7 @@
                     <a:bodyPr/>
                     <a:lstStyle/>
                     <a:p>
-                      <a:pPr indent="0" marL="0">
+                      <a:pPr marL="0" indent="0">
                         <a:buNone/>
                       </a:pPr>
                       <a:r>
@@ -6181,7 +5952,7 @@
                       </a:endParaRPr>
                     </a:p>
                   </a:txBody>
-                  <a:tcPr marL="45720" marR="45720" marT="45720" marB="45720" anchor="mid">
+                  <a:tcPr marL="45720" marR="45720">
                     <a:lnL w="8255" cap="flat" cmpd="sng" algn="ctr">
                       <a:solidFill>
                         <a:srgbClr val="D0D5DD"/>
@@ -6225,7 +5996,7 @@
                     <a:bodyPr/>
                     <a:lstStyle/>
                     <a:p>
-                      <a:pPr indent="0" marL="0">
+                      <a:pPr marL="0" indent="0">
                         <a:buNone/>
                       </a:pPr>
                       <a:r>
@@ -6246,7 +6017,7 @@
                       </a:endParaRPr>
                     </a:p>
                   </a:txBody>
-                  <a:tcPr marL="45720" marR="45720" marT="45720" marB="45720" anchor="mid">
+                  <a:tcPr marL="45720" marR="45720">
                     <a:lnL w="8255" cap="flat" cmpd="sng" algn="ctr">
                       <a:solidFill>
                         <a:srgbClr val="D0D5DD"/>
@@ -6290,7 +6061,7 @@
                     <a:bodyPr/>
                     <a:lstStyle/>
                     <a:p>
-                      <a:pPr indent="0" marL="0">
+                      <a:pPr marL="0" indent="0">
                         <a:buNone/>
                       </a:pPr>
                       <a:r>
@@ -6311,7 +6082,7 @@
                       </a:endParaRPr>
                     </a:p>
                   </a:txBody>
-                  <a:tcPr marL="45720" marR="45720" marT="45720" marB="45720" anchor="mid">
+                  <a:tcPr marL="45720" marR="45720">
                     <a:lnL w="8255" cap="flat" cmpd="sng" algn="ctr">
                       <a:solidFill>
                         <a:srgbClr val="D0D5DD"/>
@@ -6350,6 +6121,11 @@
                     </a:lnB>
                   </a:tcPr>
                 </a:tc>
+                <a:extLst>
+                  <a:ext uri="{0D108BD9-81ED-4DB2-BD59-A6C34878D82A}">
+                    <a16:rowId xmlns:a16="http://schemas.microsoft.com/office/drawing/2014/main" val="10003"/>
+                  </a:ext>
+                </a:extLst>
               </a:tr>
               <a:tr h="649224">
                 <a:tc>
@@ -6357,7 +6133,7 @@
                     <a:bodyPr/>
                     <a:lstStyle/>
                     <a:p>
-                      <a:pPr indent="0" marL="0">
+                      <a:pPr marL="0" indent="0">
                         <a:buNone/>
                       </a:pPr>
                       <a:r>
@@ -6378,7 +6154,7 @@
                       </a:endParaRPr>
                     </a:p>
                   </a:txBody>
-                  <a:tcPr marL="45720" marR="45720" marT="45720" marB="45720" anchor="mid">
+                  <a:tcPr marL="45720" marR="45720">
                     <a:lnL w="8255" cap="flat" cmpd="sng" algn="ctr">
                       <a:solidFill>
                         <a:srgbClr val="D0D5DD"/>
@@ -6422,7 +6198,7 @@
                     <a:bodyPr/>
                     <a:lstStyle/>
                     <a:p>
-                      <a:pPr indent="0" marL="0">
+                      <a:pPr marL="0" indent="0">
                         <a:buNone/>
                       </a:pPr>
                       <a:r>
@@ -6443,7 +6219,7 @@
                       </a:endParaRPr>
                     </a:p>
                   </a:txBody>
-                  <a:tcPr marL="45720" marR="45720" marT="45720" marB="45720" anchor="mid">
+                  <a:tcPr marL="45720" marR="45720">
                     <a:lnL w="8255" cap="flat" cmpd="sng" algn="ctr">
                       <a:solidFill>
                         <a:srgbClr val="D0D5DD"/>
@@ -6487,7 +6263,7 @@
                     <a:bodyPr/>
                     <a:lstStyle/>
                     <a:p>
-                      <a:pPr indent="0" marL="0">
+                      <a:pPr marL="0" indent="0">
                         <a:buNone/>
                       </a:pPr>
                       <a:r>
@@ -6508,7 +6284,7 @@
                       </a:endParaRPr>
                     </a:p>
                   </a:txBody>
-                  <a:tcPr marL="45720" marR="45720" marT="45720" marB="45720" anchor="mid">
+                  <a:tcPr marL="45720" marR="45720">
                     <a:lnL w="8255" cap="flat" cmpd="sng" algn="ctr">
                       <a:solidFill>
                         <a:srgbClr val="D0D5DD"/>
@@ -6547,6 +6323,11 @@
                     </a:lnB>
                   </a:tcPr>
                 </a:tc>
+                <a:extLst>
+                  <a:ext uri="{0D108BD9-81ED-4DB2-BD59-A6C34878D82A}">
+                    <a16:rowId xmlns:a16="http://schemas.microsoft.com/office/drawing/2014/main" val="10004"/>
+                  </a:ext>
+                </a:extLst>
               </a:tr>
             </a:tbl>
           </a:graphicData>
@@ -6600,7 +6381,7 @@
           </a:bodyPr>
           <a:lstStyle/>
           <a:p>
-            <a:pPr indent="0" marL="0">
+            <a:pPr marL="0" indent="0">
               <a:buNone/>
             </a:pPr>
             <a:r>
@@ -6637,11 +6418,11 @@
         </p:spPr>
         <p:txBody>
           <a:bodyPr wrap="square" lIns="381" tIns="381" rIns="381" bIns="381" rtlCol="0" anchor="t">
-            <a:normAutofit/>
+            <a:normAutofit fontScale="77500" lnSpcReduction="20000"/>
           </a:bodyPr>
           <a:lstStyle/>
           <a:p>
-            <a:pPr indent="0" marL="0">
+            <a:pPr marL="0" indent="0">
               <a:buNone/>
             </a:pPr>
             <a:r>
@@ -6679,7 +6460,7 @@
           </a:prstGeom>
           <a:extLst>
             <a:ext uri="{C572A759-6A51-4108-AA02-DFA0A04FC94B}">
-              <ma14:wrappingTextBoxFlag xmlns:ma14="http://schemas.microsoft.com/office/mac/drawingml/2011/main" val="0"/>
+              <ma14:wrappingTextBoxFlag xmlns:ma14="http://schemas.microsoft.com/office/mac/drawingml/2011/main" xmlns="" val="0"/>
             </a:ext>
           </a:extLst>
         </p:spPr>
@@ -6700,7 +6481,7 @@
           <a:p>
             <a:pPr algn="l"/>
             <a:fld id="{F7021451-1387-4CA6-816F-3879F97B5CBC}" type="slidenum">
-              <a:rPr b="0" lang="en-US"/>
+              <a:rPr lang="en-US" b="0"/>
               <a:t>11</a:t>
             </a:fld>
             <a:endParaRPr lang="en-US"/>
@@ -6723,6 +6504,7 @@
         <a:solidFill>
           <a:srgbClr val="FFFFFF"/>
         </a:solidFill>
+        <a:effectLst/>
       </p:bgPr>
     </p:bg>
     <p:spTree>
@@ -6760,7 +6542,7 @@
           <a:bodyPr wrap="square" lIns="0" tIns="0" rIns="0" bIns="0" rtlCol="0" anchor="ctr"/>
           <a:lstStyle/>
           <a:p>
-            <a:pPr indent="0" marL="0">
+            <a:pPr marL="0" indent="0">
               <a:buNone/>
             </a:pPr>
             <a:r>
@@ -6801,7 +6583,7 @@
           </a:bodyPr>
           <a:lstStyle/>
           <a:p>
-            <a:pPr indent="0" marL="0">
+            <a:pPr marL="0" indent="0">
               <a:buNone/>
             </a:pPr>
             <a:r>
@@ -6890,7 +6672,7 @@
           </a:bodyPr>
           <a:lstStyle/>
           <a:p>
-            <a:pPr indent="0" marL="0">
+            <a:pPr marL="0" indent="0">
               <a:buNone/>
             </a:pPr>
             <a:r>
@@ -6931,7 +6713,7 @@
           </a:bodyPr>
           <a:lstStyle/>
           <a:p>
-            <a:pPr indent="0" marL="0">
+            <a:pPr marL="0" indent="0">
               <a:buNone/>
             </a:pPr>
             <a:r>
@@ -6997,7 +6779,7 @@
           </a:bodyPr>
           <a:lstStyle/>
           <a:p>
-            <a:pPr indent="0" marL="0">
+            <a:pPr marL="0" indent="0">
               <a:buNone/>
             </a:pPr>
             <a:r>
@@ -7038,7 +6820,7 @@
           </a:bodyPr>
           <a:lstStyle/>
           <a:p>
-            <a:pPr indent="0" marL="0">
+            <a:pPr marL="0" indent="0">
               <a:buNone/>
             </a:pPr>
             <a:r>
@@ -7104,7 +6886,7 @@
           </a:bodyPr>
           <a:lstStyle/>
           <a:p>
-            <a:pPr indent="0" marL="0">
+            <a:pPr marL="0" indent="0">
               <a:buNone/>
             </a:pPr>
             <a:r>
@@ -7145,7 +6927,7 @@
           </a:bodyPr>
           <a:lstStyle/>
           <a:p>
-            <a:pPr indent="0" marL="0">
+            <a:pPr marL="0" indent="0">
               <a:buNone/>
             </a:pPr>
             <a:r>
@@ -7207,11 +6989,11 @@
         </p:spPr>
         <p:txBody>
           <a:bodyPr wrap="square" lIns="381" tIns="381" rIns="381" bIns="381" rtlCol="0" anchor="t">
-            <a:normAutofit/>
+            <a:normAutofit fontScale="92500"/>
           </a:bodyPr>
           <a:lstStyle/>
           <a:p>
-            <a:pPr algn="ctr" indent="0" marL="0">
+            <a:pPr marL="0" indent="0" algn="ctr">
               <a:buNone/>
             </a:pPr>
             <a:r>
@@ -7252,7 +7034,7 @@
           </a:bodyPr>
           <a:lstStyle/>
           <a:p>
-            <a:pPr indent="0" marL="0">
+            <a:pPr marL="0" indent="0">
               <a:buNone/>
             </a:pPr>
             <a:r>
@@ -7290,7 +7072,7 @@
           </a:prstGeom>
           <a:extLst>
             <a:ext uri="{C572A759-6A51-4108-AA02-DFA0A04FC94B}">
-              <ma14:wrappingTextBoxFlag xmlns:ma14="http://schemas.microsoft.com/office/mac/drawingml/2011/main" val="0"/>
+              <ma14:wrappingTextBoxFlag xmlns:ma14="http://schemas.microsoft.com/office/mac/drawingml/2011/main" xmlns="" val="0"/>
             </a:ext>
           </a:extLst>
         </p:spPr>
@@ -7311,7 +7093,7 @@
           <a:p>
             <a:pPr algn="l"/>
             <a:fld id="{F7021451-1387-4CA6-816F-3879F97B5CBC}" type="slidenum">
-              <a:rPr b="0" lang="en-US"/>
+              <a:rPr lang="en-US" b="0"/>
               <a:t>12</a:t>
             </a:fld>
             <a:endParaRPr lang="en-US"/>
@@ -7334,6 +7116,7 @@
         <a:solidFill>
           <a:srgbClr val="FFFFFF"/>
         </a:solidFill>
+        <a:effectLst/>
       </p:bgPr>
     </p:bg>
     <p:spTree>
@@ -7371,7 +7154,7 @@
           <a:bodyPr wrap="square" lIns="0" tIns="0" rIns="0" bIns="0" rtlCol="0" anchor="ctr"/>
           <a:lstStyle/>
           <a:p>
-            <a:pPr indent="0" marL="0">
+            <a:pPr marL="0" indent="0">
               <a:buNone/>
             </a:pPr>
             <a:r>
@@ -7412,7 +7195,7 @@
           </a:bodyPr>
           <a:lstStyle/>
           <a:p>
-            <a:pPr indent="0" marL="0">
+            <a:pPr marL="0" indent="0">
               <a:buNone/>
             </a:pPr>
             <a:r>
@@ -7501,7 +7284,7 @@
           </a:bodyPr>
           <a:lstStyle/>
           <a:p>
-            <a:pPr indent="0" marL="0">
+            <a:pPr marL="0" indent="0">
               <a:buNone/>
             </a:pPr>
             <a:r>
@@ -7542,7 +7325,7 @@
           </a:bodyPr>
           <a:lstStyle/>
           <a:p>
-            <a:pPr indent="0" marL="0">
+            <a:pPr marL="0" indent="0">
               <a:buNone/>
             </a:pPr>
             <a:r>
@@ -7608,7 +7391,7 @@
           </a:bodyPr>
           <a:lstStyle/>
           <a:p>
-            <a:pPr indent="0" marL="0">
+            <a:pPr marL="0" indent="0">
               <a:buNone/>
             </a:pPr>
             <a:r>
@@ -7649,7 +7432,7 @@
           </a:bodyPr>
           <a:lstStyle/>
           <a:p>
-            <a:pPr indent="0" marL="0">
+            <a:pPr marL="0" indent="0">
               <a:buNone/>
             </a:pPr>
             <a:r>
@@ -7715,7 +7498,7 @@
           </a:bodyPr>
           <a:lstStyle/>
           <a:p>
-            <a:pPr indent="0" marL="0">
+            <a:pPr marL="0" indent="0">
               <a:buNone/>
             </a:pPr>
             <a:r>
@@ -7756,7 +7539,7 @@
           </a:bodyPr>
           <a:lstStyle/>
           <a:p>
-            <a:pPr indent="0" marL="0">
+            <a:pPr marL="0" indent="0">
               <a:buNone/>
             </a:pPr>
             <a:r>
@@ -7793,11 +7576,11 @@
         </p:spPr>
         <p:txBody>
           <a:bodyPr wrap="square" lIns="381" tIns="381" rIns="381" bIns="381" rtlCol="0" anchor="t">
-            <a:normAutofit/>
+            <a:normAutofit fontScale="85000" lnSpcReduction="20000"/>
           </a:bodyPr>
           <a:lstStyle/>
           <a:p>
-            <a:pPr algn="ctr" indent="0" marL="0">
+            <a:pPr marL="0" indent="0" algn="ctr">
               <a:buNone/>
             </a:pPr>
             <a:r>
@@ -7838,7 +7621,7 @@
           </a:bodyPr>
           <a:lstStyle/>
           <a:p>
-            <a:pPr indent="0" marL="0">
+            <a:pPr marL="0" indent="0">
               <a:buNone/>
             </a:pPr>
             <a:r>
@@ -7876,7 +7659,7 @@
           </a:prstGeom>
           <a:extLst>
             <a:ext uri="{C572A759-6A51-4108-AA02-DFA0A04FC94B}">
-              <ma14:wrappingTextBoxFlag xmlns:ma14="http://schemas.microsoft.com/office/mac/drawingml/2011/main" val="0"/>
+              <ma14:wrappingTextBoxFlag xmlns:ma14="http://schemas.microsoft.com/office/mac/drawingml/2011/main" xmlns="" val="0"/>
             </a:ext>
           </a:extLst>
         </p:spPr>
@@ -7897,7 +7680,7 @@
           <a:p>
             <a:pPr algn="l"/>
             <a:fld id="{F7021451-1387-4CA6-816F-3879F97B5CBC}" type="slidenum">
-              <a:rPr b="0" lang="en-US"/>
+              <a:rPr lang="en-US" b="0"/>
               <a:t>13</a:t>
             </a:fld>
             <a:endParaRPr lang="en-US"/>
@@ -7920,6 +7703,7 @@
         <a:solidFill>
           <a:srgbClr val="FFFFFF"/>
         </a:solidFill>
+        <a:effectLst/>
       </p:bgPr>
     </p:bg>
     <p:spTree>
@@ -7957,7 +7741,7 @@
           <a:bodyPr wrap="square" lIns="0" tIns="0" rIns="0" bIns="0" rtlCol="0" anchor="ctr"/>
           <a:lstStyle/>
           <a:p>
-            <a:pPr indent="0" marL="0">
+            <a:pPr marL="0" indent="0">
               <a:buNone/>
             </a:pPr>
             <a:r>
@@ -7998,7 +7782,7 @@
           </a:bodyPr>
           <a:lstStyle/>
           <a:p>
-            <a:pPr indent="0" marL="0">
+            <a:pPr marL="0" indent="0">
               <a:buNone/>
             </a:pPr>
             <a:r>
@@ -8062,9 +7846,27 @@
             <a:tbl>
               <a:tblPr/>
               <a:tblGrid>
-                <a:gridCol w="2377440"/>
-                <a:gridCol w="2971800"/>
-                <a:gridCol w="5532120"/>
+                <a:gridCol w="2377440">
+                  <a:extLst>
+                    <a:ext uri="{9D8B030D-6E8A-4147-A177-3AD203B41FA5}">
+                      <a16:colId xmlns:a16="http://schemas.microsoft.com/office/drawing/2014/main" val="20000"/>
+                    </a:ext>
+                  </a:extLst>
+                </a:gridCol>
+                <a:gridCol w="2971800">
+                  <a:extLst>
+                    <a:ext uri="{9D8B030D-6E8A-4147-A177-3AD203B41FA5}">
+                      <a16:colId xmlns:a16="http://schemas.microsoft.com/office/drawing/2014/main" val="20001"/>
+                    </a:ext>
+                  </a:extLst>
+                </a:gridCol>
+                <a:gridCol w="5532120">
+                  <a:extLst>
+                    <a:ext uri="{9D8B030D-6E8A-4147-A177-3AD203B41FA5}">
+                      <a16:colId xmlns:a16="http://schemas.microsoft.com/office/drawing/2014/main" val="20002"/>
+                    </a:ext>
+                  </a:extLst>
+                </a:gridCol>
               </a:tblGrid>
               <a:tr h="620486">
                 <a:tc>
@@ -8072,7 +7874,7 @@
                     <a:bodyPr/>
                     <a:lstStyle/>
                     <a:p>
-                      <a:pPr indent="0" marL="0">
+                      <a:pPr marL="0" indent="0">
                         <a:buNone/>
                       </a:pPr>
                       <a:r>
@@ -8093,7 +7895,7 @@
                       </a:endParaRPr>
                     </a:p>
                   </a:txBody>
-                  <a:tcPr marL="45720" marR="45720" marT="45720" marB="45720" anchor="mid">
+                  <a:tcPr marL="45720" marR="45720">
                     <a:lnL w="8255" cap="flat" cmpd="sng" algn="ctr">
                       <a:solidFill>
                         <a:srgbClr val="D0D5DD"/>
@@ -8137,7 +7939,7 @@
                     <a:bodyPr/>
                     <a:lstStyle/>
                     <a:p>
-                      <a:pPr indent="0" marL="0">
+                      <a:pPr marL="0" indent="0">
                         <a:buNone/>
                       </a:pPr>
                       <a:r>
@@ -8158,7 +7960,7 @@
                       </a:endParaRPr>
                     </a:p>
                   </a:txBody>
-                  <a:tcPr marL="45720" marR="45720" marT="45720" marB="45720" anchor="mid">
+                  <a:tcPr marL="45720" marR="45720">
                     <a:lnL w="8255" cap="flat" cmpd="sng" algn="ctr">
                       <a:solidFill>
                         <a:srgbClr val="D0D5DD"/>
@@ -8202,7 +8004,7 @@
                     <a:bodyPr/>
                     <a:lstStyle/>
                     <a:p>
-                      <a:pPr indent="0" marL="0">
+                      <a:pPr marL="0" indent="0">
                         <a:buNone/>
                       </a:pPr>
                       <a:r>
@@ -8223,7 +8025,7 @@
                       </a:endParaRPr>
                     </a:p>
                   </a:txBody>
-                  <a:tcPr marL="45720" marR="45720" marT="45720" marB="45720" anchor="mid">
+                  <a:tcPr marL="45720" marR="45720">
                     <a:lnL w="8255" cap="flat" cmpd="sng" algn="ctr">
                       <a:solidFill>
                         <a:srgbClr val="D0D5DD"/>
@@ -8262,6 +8064,11 @@
                     </a:lnB>
                   </a:tcPr>
                 </a:tc>
+                <a:extLst>
+                  <a:ext uri="{0D108BD9-81ED-4DB2-BD59-A6C34878D82A}">
+                    <a16:rowId xmlns:a16="http://schemas.microsoft.com/office/drawing/2014/main" val="10000"/>
+                  </a:ext>
+                </a:extLst>
               </a:tr>
               <a:tr h="620486">
                 <a:tc>
@@ -8269,7 +8076,7 @@
                     <a:bodyPr/>
                     <a:lstStyle/>
                     <a:p>
-                      <a:pPr indent="0" marL="0">
+                      <a:pPr marL="0" indent="0">
                         <a:buNone/>
                       </a:pPr>
                       <a:r>
@@ -8290,7 +8097,7 @@
                       </a:endParaRPr>
                     </a:p>
                   </a:txBody>
-                  <a:tcPr marL="45720" marR="45720" marT="45720" marB="45720" anchor="mid">
+                  <a:tcPr marL="45720" marR="45720">
                     <a:lnL w="8255" cap="flat" cmpd="sng" algn="ctr">
                       <a:solidFill>
                         <a:srgbClr val="D0D5DD"/>
@@ -8334,7 +8141,7 @@
                     <a:bodyPr/>
                     <a:lstStyle/>
                     <a:p>
-                      <a:pPr indent="0" marL="0">
+                      <a:pPr marL="0" indent="0">
                         <a:buNone/>
                       </a:pPr>
                       <a:r>
@@ -8355,7 +8162,7 @@
                       </a:endParaRPr>
                     </a:p>
                   </a:txBody>
-                  <a:tcPr marL="45720" marR="45720" marT="45720" marB="45720" anchor="mid">
+                  <a:tcPr marL="45720" marR="45720">
                     <a:lnL w="8255" cap="flat" cmpd="sng" algn="ctr">
                       <a:solidFill>
                         <a:srgbClr val="D0D5DD"/>
@@ -8399,7 +8206,7 @@
                     <a:bodyPr/>
                     <a:lstStyle/>
                     <a:p>
-                      <a:pPr indent="0" marL="0">
+                      <a:pPr marL="0" indent="0">
                         <a:buNone/>
                       </a:pPr>
                       <a:r>
@@ -8420,7 +8227,7 @@
                       </a:endParaRPr>
                     </a:p>
                   </a:txBody>
-                  <a:tcPr marL="45720" marR="45720" marT="45720" marB="45720" anchor="mid">
+                  <a:tcPr marL="45720" marR="45720">
                     <a:lnL w="8255" cap="flat" cmpd="sng" algn="ctr">
                       <a:solidFill>
                         <a:srgbClr val="D0D5DD"/>
@@ -8459,6 +8266,11 @@
                     </a:lnB>
                   </a:tcPr>
                 </a:tc>
+                <a:extLst>
+                  <a:ext uri="{0D108BD9-81ED-4DB2-BD59-A6C34878D82A}">
+                    <a16:rowId xmlns:a16="http://schemas.microsoft.com/office/drawing/2014/main" val="10001"/>
+                  </a:ext>
+                </a:extLst>
               </a:tr>
               <a:tr h="620486">
                 <a:tc>
@@ -8466,7 +8278,7 @@
                     <a:bodyPr/>
                     <a:lstStyle/>
                     <a:p>
-                      <a:pPr indent="0" marL="0">
+                      <a:pPr marL="0" indent="0">
                         <a:buNone/>
                       </a:pPr>
                       <a:r>
@@ -8487,7 +8299,7 @@
                       </a:endParaRPr>
                     </a:p>
                   </a:txBody>
-                  <a:tcPr marL="45720" marR="45720" marT="45720" marB="45720" anchor="mid">
+                  <a:tcPr marL="45720" marR="45720">
                     <a:lnL w="8255" cap="flat" cmpd="sng" algn="ctr">
                       <a:solidFill>
                         <a:srgbClr val="D0D5DD"/>
@@ -8531,7 +8343,7 @@
                     <a:bodyPr/>
                     <a:lstStyle/>
                     <a:p>
-                      <a:pPr indent="0" marL="0">
+                      <a:pPr marL="0" indent="0">
                         <a:buNone/>
                       </a:pPr>
                       <a:r>
@@ -8552,7 +8364,7 @@
                       </a:endParaRPr>
                     </a:p>
                   </a:txBody>
-                  <a:tcPr marL="45720" marR="45720" marT="45720" marB="45720" anchor="mid">
+                  <a:tcPr marL="45720" marR="45720">
                     <a:lnL w="8255" cap="flat" cmpd="sng" algn="ctr">
                       <a:solidFill>
                         <a:srgbClr val="D0D5DD"/>
@@ -8596,7 +8408,7 @@
                     <a:bodyPr/>
                     <a:lstStyle/>
                     <a:p>
-                      <a:pPr indent="0" marL="0">
+                      <a:pPr marL="0" indent="0">
                         <a:buNone/>
                       </a:pPr>
                       <a:r>
@@ -8617,7 +8429,7 @@
                       </a:endParaRPr>
                     </a:p>
                   </a:txBody>
-                  <a:tcPr marL="45720" marR="45720" marT="45720" marB="45720" anchor="mid">
+                  <a:tcPr marL="45720" marR="45720">
                     <a:lnL w="8255" cap="flat" cmpd="sng" algn="ctr">
                       <a:solidFill>
                         <a:srgbClr val="D0D5DD"/>
@@ -8656,6 +8468,11 @@
                     </a:lnB>
                   </a:tcPr>
                 </a:tc>
+                <a:extLst>
+                  <a:ext uri="{0D108BD9-81ED-4DB2-BD59-A6C34878D82A}">
+                    <a16:rowId xmlns:a16="http://schemas.microsoft.com/office/drawing/2014/main" val="10002"/>
+                  </a:ext>
+                </a:extLst>
               </a:tr>
               <a:tr h="620486">
                 <a:tc>
@@ -8663,7 +8480,7 @@
                     <a:bodyPr/>
                     <a:lstStyle/>
                     <a:p>
-                      <a:pPr indent="0" marL="0">
+                      <a:pPr marL="0" indent="0">
                         <a:buNone/>
                       </a:pPr>
                       <a:r>
@@ -8684,7 +8501,7 @@
                       </a:endParaRPr>
                     </a:p>
                   </a:txBody>
-                  <a:tcPr marL="45720" marR="45720" marT="45720" marB="45720" anchor="mid">
+                  <a:tcPr marL="45720" marR="45720">
                     <a:lnL w="8255" cap="flat" cmpd="sng" algn="ctr">
                       <a:solidFill>
                         <a:srgbClr val="D0D5DD"/>
@@ -8728,7 +8545,7 @@
                     <a:bodyPr/>
                     <a:lstStyle/>
                     <a:p>
-                      <a:pPr indent="0" marL="0">
+                      <a:pPr marL="0" indent="0">
                         <a:buNone/>
                       </a:pPr>
                       <a:r>
@@ -8749,7 +8566,7 @@
                       </a:endParaRPr>
                     </a:p>
                   </a:txBody>
-                  <a:tcPr marL="45720" marR="45720" marT="45720" marB="45720" anchor="mid">
+                  <a:tcPr marL="45720" marR="45720">
                     <a:lnL w="8255" cap="flat" cmpd="sng" algn="ctr">
                       <a:solidFill>
                         <a:srgbClr val="D0D5DD"/>
@@ -8793,7 +8610,7 @@
                     <a:bodyPr/>
                     <a:lstStyle/>
                     <a:p>
-                      <a:pPr indent="0" marL="0">
+                      <a:pPr marL="0" indent="0">
                         <a:buNone/>
                       </a:pPr>
                       <a:r>
@@ -8814,7 +8631,7 @@
                       </a:endParaRPr>
                     </a:p>
                   </a:txBody>
-                  <a:tcPr marL="45720" marR="45720" marT="45720" marB="45720" anchor="mid">
+                  <a:tcPr marL="45720" marR="45720">
                     <a:lnL w="8255" cap="flat" cmpd="sng" algn="ctr">
                       <a:solidFill>
                         <a:srgbClr val="D0D5DD"/>
@@ -8853,6 +8670,11 @@
                     </a:lnB>
                   </a:tcPr>
                 </a:tc>
+                <a:extLst>
+                  <a:ext uri="{0D108BD9-81ED-4DB2-BD59-A6C34878D82A}">
+                    <a16:rowId xmlns:a16="http://schemas.microsoft.com/office/drawing/2014/main" val="10003"/>
+                  </a:ext>
+                </a:extLst>
               </a:tr>
               <a:tr h="620486">
                 <a:tc>
@@ -8860,7 +8682,7 @@
                     <a:bodyPr/>
                     <a:lstStyle/>
                     <a:p>
-                      <a:pPr indent="0" marL="0">
+                      <a:pPr marL="0" indent="0">
                         <a:buNone/>
                       </a:pPr>
                       <a:r>
@@ -8881,7 +8703,7 @@
                       </a:endParaRPr>
                     </a:p>
                   </a:txBody>
-                  <a:tcPr marL="45720" marR="45720" marT="45720" marB="45720" anchor="mid">
+                  <a:tcPr marL="45720" marR="45720">
                     <a:lnL w="8255" cap="flat" cmpd="sng" algn="ctr">
                       <a:solidFill>
                         <a:srgbClr val="D0D5DD"/>
@@ -8925,7 +8747,7 @@
                     <a:bodyPr/>
                     <a:lstStyle/>
                     <a:p>
-                      <a:pPr indent="0" marL="0">
+                      <a:pPr marL="0" indent="0">
                         <a:buNone/>
                       </a:pPr>
                       <a:r>
@@ -8946,7 +8768,7 @@
                       </a:endParaRPr>
                     </a:p>
                   </a:txBody>
-                  <a:tcPr marL="45720" marR="45720" marT="45720" marB="45720" anchor="mid">
+                  <a:tcPr marL="45720" marR="45720">
                     <a:lnL w="8255" cap="flat" cmpd="sng" algn="ctr">
                       <a:solidFill>
                         <a:srgbClr val="D0D5DD"/>
@@ -8990,7 +8812,7 @@
                     <a:bodyPr/>
                     <a:lstStyle/>
                     <a:p>
-                      <a:pPr indent="0" marL="0">
+                      <a:pPr marL="0" indent="0">
                         <a:buNone/>
                       </a:pPr>
                       <a:r>
@@ -9011,7 +8833,7 @@
                       </a:endParaRPr>
                     </a:p>
                   </a:txBody>
-                  <a:tcPr marL="45720" marR="45720" marT="45720" marB="45720" anchor="mid">
+                  <a:tcPr marL="45720" marR="45720">
                     <a:lnL w="8255" cap="flat" cmpd="sng" algn="ctr">
                       <a:solidFill>
                         <a:srgbClr val="D0D5DD"/>
@@ -9050,6 +8872,11 @@
                     </a:lnB>
                   </a:tcPr>
                 </a:tc>
+                <a:extLst>
+                  <a:ext uri="{0D108BD9-81ED-4DB2-BD59-A6C34878D82A}">
+                    <a16:rowId xmlns:a16="http://schemas.microsoft.com/office/drawing/2014/main" val="10004"/>
+                  </a:ext>
+                </a:extLst>
               </a:tr>
               <a:tr h="620486">
                 <a:tc>
@@ -9057,7 +8884,7 @@
                     <a:bodyPr/>
                     <a:lstStyle/>
                     <a:p>
-                      <a:pPr indent="0" marL="0">
+                      <a:pPr marL="0" indent="0">
                         <a:buNone/>
                       </a:pPr>
                       <a:r>
@@ -9078,7 +8905,7 @@
                       </a:endParaRPr>
                     </a:p>
                   </a:txBody>
-                  <a:tcPr marL="45720" marR="45720" marT="45720" marB="45720" anchor="mid">
+                  <a:tcPr marL="45720" marR="45720">
                     <a:lnL w="8255" cap="flat" cmpd="sng" algn="ctr">
                       <a:solidFill>
                         <a:srgbClr val="D0D5DD"/>
@@ -9122,7 +8949,7 @@
                     <a:bodyPr/>
                     <a:lstStyle/>
                     <a:p>
-                      <a:pPr indent="0" marL="0">
+                      <a:pPr marL="0" indent="0">
                         <a:buNone/>
                       </a:pPr>
                       <a:r>
@@ -9143,7 +8970,7 @@
                       </a:endParaRPr>
                     </a:p>
                   </a:txBody>
-                  <a:tcPr marL="45720" marR="45720" marT="45720" marB="45720" anchor="mid">
+                  <a:tcPr marL="45720" marR="45720">
                     <a:lnL w="8255" cap="flat" cmpd="sng" algn="ctr">
                       <a:solidFill>
                         <a:srgbClr val="D0D5DD"/>
@@ -9187,7 +9014,7 @@
                     <a:bodyPr/>
                     <a:lstStyle/>
                     <a:p>
-                      <a:pPr indent="0" marL="0">
+                      <a:pPr marL="0" indent="0">
                         <a:buNone/>
                       </a:pPr>
                       <a:r>
@@ -9208,7 +9035,7 @@
                       </a:endParaRPr>
                     </a:p>
                   </a:txBody>
-                  <a:tcPr marL="45720" marR="45720" marT="45720" marB="45720" anchor="mid">
+                  <a:tcPr marL="45720" marR="45720">
                     <a:lnL w="8255" cap="flat" cmpd="sng" algn="ctr">
                       <a:solidFill>
                         <a:srgbClr val="D0D5DD"/>
@@ -9247,6 +9074,11 @@
                     </a:lnB>
                   </a:tcPr>
                 </a:tc>
+                <a:extLst>
+                  <a:ext uri="{0D108BD9-81ED-4DB2-BD59-A6C34878D82A}">
+                    <a16:rowId xmlns:a16="http://schemas.microsoft.com/office/drawing/2014/main" val="10005"/>
+                  </a:ext>
+                </a:extLst>
               </a:tr>
               <a:tr h="620486">
                 <a:tc>
@@ -9254,7 +9086,7 @@
                     <a:bodyPr/>
                     <a:lstStyle/>
                     <a:p>
-                      <a:pPr indent="0" marL="0">
+                      <a:pPr marL="0" indent="0">
                         <a:buNone/>
                       </a:pPr>
                       <a:r>
@@ -9275,7 +9107,7 @@
                       </a:endParaRPr>
                     </a:p>
                   </a:txBody>
-                  <a:tcPr marL="45720" marR="45720" marT="45720" marB="45720" anchor="mid">
+                  <a:tcPr marL="45720" marR="45720">
                     <a:lnL w="8255" cap="flat" cmpd="sng" algn="ctr">
                       <a:solidFill>
                         <a:srgbClr val="D0D5DD"/>
@@ -9319,7 +9151,7 @@
                     <a:bodyPr/>
                     <a:lstStyle/>
                     <a:p>
-                      <a:pPr indent="0" marL="0">
+                      <a:pPr marL="0" indent="0">
                         <a:buNone/>
                       </a:pPr>
                       <a:r>
@@ -9340,7 +9172,7 @@
                       </a:endParaRPr>
                     </a:p>
                   </a:txBody>
-                  <a:tcPr marL="45720" marR="45720" marT="45720" marB="45720" anchor="mid">
+                  <a:tcPr marL="45720" marR="45720">
                     <a:lnL w="8255" cap="flat" cmpd="sng" algn="ctr">
                       <a:solidFill>
                         <a:srgbClr val="D0D5DD"/>
@@ -9384,7 +9216,7 @@
                     <a:bodyPr/>
                     <a:lstStyle/>
                     <a:p>
-                      <a:pPr indent="0" marL="0">
+                      <a:pPr marL="0" indent="0">
                         <a:buNone/>
                       </a:pPr>
                       <a:r>
@@ -9405,7 +9237,7 @@
                       </a:endParaRPr>
                     </a:p>
                   </a:txBody>
-                  <a:tcPr marL="45720" marR="45720" marT="45720" marB="45720" anchor="mid">
+                  <a:tcPr marL="45720" marR="45720">
                     <a:lnL w="8255" cap="flat" cmpd="sng" algn="ctr">
                       <a:solidFill>
                         <a:srgbClr val="D0D5DD"/>
@@ -9444,6 +9276,11 @@
                     </a:lnB>
                   </a:tcPr>
                 </a:tc>
+                <a:extLst>
+                  <a:ext uri="{0D108BD9-81ED-4DB2-BD59-A6C34878D82A}">
+                    <a16:rowId xmlns:a16="http://schemas.microsoft.com/office/drawing/2014/main" val="10006"/>
+                  </a:ext>
+                </a:extLst>
               </a:tr>
             </a:tbl>
           </a:graphicData>
@@ -9472,7 +9309,7 @@
           </a:bodyPr>
           <a:lstStyle/>
           <a:p>
-            <a:pPr indent="0" marL="0">
+            <a:pPr marL="0" indent="0">
               <a:buNone/>
             </a:pPr>
             <a:r>
@@ -9510,7 +9347,7 @@
           </a:prstGeom>
           <a:extLst>
             <a:ext uri="{C572A759-6A51-4108-AA02-DFA0A04FC94B}">
-              <ma14:wrappingTextBoxFlag xmlns:ma14="http://schemas.microsoft.com/office/mac/drawingml/2011/main" val="0"/>
+              <ma14:wrappingTextBoxFlag xmlns:ma14="http://schemas.microsoft.com/office/mac/drawingml/2011/main" xmlns="" val="0"/>
             </a:ext>
           </a:extLst>
         </p:spPr>
@@ -9531,7 +9368,7 @@
           <a:p>
             <a:pPr algn="l"/>
             <a:fld id="{F7021451-1387-4CA6-816F-3879F97B5CBC}" type="slidenum">
-              <a:rPr b="0" lang="en-US"/>
+              <a:rPr lang="en-US" b="0"/>
               <a:t>14</a:t>
             </a:fld>
             <a:endParaRPr lang="en-US"/>
@@ -9554,6 +9391,7 @@
         <a:solidFill>
           <a:srgbClr val="FFFFFF"/>
         </a:solidFill>
+        <a:effectLst/>
       </p:bgPr>
     </p:bg>
     <p:spTree>
@@ -9591,7 +9429,7 @@
           <a:bodyPr wrap="square" lIns="0" tIns="0" rIns="0" bIns="0" rtlCol="0" anchor="ctr"/>
           <a:lstStyle/>
           <a:p>
-            <a:pPr indent="0" marL="0">
+            <a:pPr marL="0" indent="0">
               <a:buNone/>
             </a:pPr>
             <a:r>
@@ -9632,7 +9470,7 @@
           </a:bodyPr>
           <a:lstStyle/>
           <a:p>
-            <a:pPr indent="0" marL="0">
+            <a:pPr marL="0" indent="0">
               <a:buNone/>
             </a:pPr>
             <a:r>
@@ -9692,11 +9530,11 @@
         </p:spPr>
         <p:txBody>
           <a:bodyPr wrap="square" lIns="381" tIns="381" rIns="381" bIns="381" rtlCol="0" anchor="t">
-            <a:normAutofit/>
+            <a:normAutofit fontScale="70000" lnSpcReduction="20000"/>
           </a:bodyPr>
           <a:lstStyle/>
           <a:p>
-            <a:pPr indent="0" marL="0">
+            <a:pPr marL="0" indent="0">
               <a:buNone/>
             </a:pPr>
             <a:r>
@@ -9758,11 +9596,11 @@
         </p:spPr>
         <p:txBody>
           <a:bodyPr wrap="square" lIns="381" tIns="381" rIns="381" bIns="381" rtlCol="0" anchor="t">
-            <a:normAutofit/>
+            <a:normAutofit lnSpcReduction="10000"/>
           </a:bodyPr>
           <a:lstStyle/>
           <a:p>
-            <a:pPr algn="ctr" indent="0" marL="0">
+            <a:pPr marL="0" indent="0" algn="ctr">
               <a:buNone/>
             </a:pPr>
             <a:r>
@@ -9803,7 +9641,7 @@
           </a:bodyPr>
           <a:lstStyle/>
           <a:p>
-            <a:pPr algn="ctr" indent="0" marL="0">
+            <a:pPr marL="0" indent="0" algn="ctr">
               <a:buNone/>
             </a:pPr>
             <a:r>
@@ -9890,11 +9728,11 @@
         </p:spPr>
         <p:txBody>
           <a:bodyPr wrap="square" lIns="381" tIns="381" rIns="381" bIns="381" rtlCol="0" anchor="t">
-            <a:normAutofit/>
+            <a:normAutofit lnSpcReduction="10000"/>
           </a:bodyPr>
           <a:lstStyle/>
           <a:p>
-            <a:pPr algn="ctr" indent="0" marL="0">
+            <a:pPr marL="0" indent="0" algn="ctr">
               <a:buNone/>
             </a:pPr>
             <a:r>
@@ -9935,7 +9773,7 @@
           </a:bodyPr>
           <a:lstStyle/>
           <a:p>
-            <a:pPr algn="ctr" indent="0" marL="0">
+            <a:pPr marL="0" indent="0" algn="ctr">
               <a:buNone/>
             </a:pPr>
             <a:r>
@@ -10022,11 +9860,11 @@
         </p:spPr>
         <p:txBody>
           <a:bodyPr wrap="square" lIns="381" tIns="381" rIns="381" bIns="381" rtlCol="0" anchor="t">
-            <a:normAutofit/>
+            <a:normAutofit lnSpcReduction="10000"/>
           </a:bodyPr>
           <a:lstStyle/>
           <a:p>
-            <a:pPr algn="ctr" indent="0" marL="0">
+            <a:pPr marL="0" indent="0" algn="ctr">
               <a:buNone/>
             </a:pPr>
             <a:r>
@@ -10067,7 +9905,7 @@
           </a:bodyPr>
           <a:lstStyle/>
           <a:p>
-            <a:pPr algn="ctr" indent="0" marL="0">
+            <a:pPr marL="0" indent="0" algn="ctr">
               <a:buNone/>
             </a:pPr>
             <a:r>
@@ -10154,11 +9992,11 @@
         </p:spPr>
         <p:txBody>
           <a:bodyPr wrap="square" lIns="381" tIns="381" rIns="381" bIns="381" rtlCol="0" anchor="t">
-            <a:normAutofit/>
+            <a:normAutofit lnSpcReduction="10000"/>
           </a:bodyPr>
           <a:lstStyle/>
           <a:p>
-            <a:pPr algn="ctr" indent="0" marL="0">
+            <a:pPr marL="0" indent="0" algn="ctr">
               <a:buNone/>
             </a:pPr>
             <a:r>
@@ -10199,7 +10037,7 @@
           </a:bodyPr>
           <a:lstStyle/>
           <a:p>
-            <a:pPr algn="ctr" indent="0" marL="0">
+            <a:pPr marL="0" indent="0" algn="ctr">
               <a:buNone/>
             </a:pPr>
             <a:r>
@@ -10286,11 +10124,11 @@
         </p:spPr>
         <p:txBody>
           <a:bodyPr wrap="square" lIns="381" tIns="381" rIns="381" bIns="381" rtlCol="0" anchor="t">
-            <a:normAutofit/>
+            <a:normAutofit lnSpcReduction="10000"/>
           </a:bodyPr>
           <a:lstStyle/>
           <a:p>
-            <a:pPr algn="ctr" indent="0" marL="0">
+            <a:pPr marL="0" indent="0" algn="ctr">
               <a:buNone/>
             </a:pPr>
             <a:r>
@@ -10331,7 +10169,7 @@
           </a:bodyPr>
           <a:lstStyle/>
           <a:p>
-            <a:pPr algn="ctr" indent="0" marL="0">
+            <a:pPr marL="0" indent="0" algn="ctr">
               <a:buNone/>
             </a:pPr>
             <a:r>
@@ -10351,7 +10189,7 @@
       </p:sp>
       <p:graphicFrame>
         <p:nvGraphicFramePr>
-          <p:cNvPr id="16" name="Table 0"/>
+          <p:cNvPr id="30" name="Table 0"/>
           <p:cNvGraphicFramePr>
             <a:graphicFrameLocks noGrp="1"/>
           </p:cNvGraphicFramePr>
@@ -10372,8 +10210,20 @@
             <a:tbl>
               <a:tblPr/>
               <a:tblGrid>
-                <a:gridCol w="1234440"/>
-                <a:gridCol w="3657600"/>
+                <a:gridCol w="1234440">
+                  <a:extLst>
+                    <a:ext uri="{9D8B030D-6E8A-4147-A177-3AD203B41FA5}">
+                      <a16:colId xmlns:a16="http://schemas.microsoft.com/office/drawing/2014/main" val="20000"/>
+                    </a:ext>
+                  </a:extLst>
+                </a:gridCol>
+                <a:gridCol w="3657600">
+                  <a:extLst>
+                    <a:ext uri="{9D8B030D-6E8A-4147-A177-3AD203B41FA5}">
+                      <a16:colId xmlns:a16="http://schemas.microsoft.com/office/drawing/2014/main" val="20001"/>
+                    </a:ext>
+                  </a:extLst>
+                </a:gridCol>
               </a:tblGrid>
               <a:tr h="266700">
                 <a:tc>
@@ -10381,7 +10231,7 @@
                     <a:bodyPr/>
                     <a:lstStyle/>
                     <a:p>
-                      <a:pPr indent="0" marL="0">
+                      <a:pPr marL="0" indent="0">
                         <a:buNone/>
                       </a:pPr>
                       <a:r>
@@ -10402,7 +10252,7 @@
                       </a:endParaRPr>
                     </a:p>
                   </a:txBody>
-                  <a:tcPr marL="45720" marR="45720" marT="45720" marB="45720" anchor="mid">
+                  <a:tcPr marL="45720" marR="45720">
                     <a:lnL w="8255" cap="flat" cmpd="sng" algn="ctr">
                       <a:solidFill>
                         <a:srgbClr val="D0D5DD"/>
@@ -10446,7 +10296,7 @@
                     <a:bodyPr/>
                     <a:lstStyle/>
                     <a:p>
-                      <a:pPr indent="0" marL="0">
+                      <a:pPr marL="0" indent="0">
                         <a:buNone/>
                       </a:pPr>
                       <a:r>
@@ -10467,7 +10317,7 @@
                       </a:endParaRPr>
                     </a:p>
                   </a:txBody>
-                  <a:tcPr marL="45720" marR="45720" marT="45720" marB="45720" anchor="mid">
+                  <a:tcPr marL="45720" marR="45720">
                     <a:lnL w="8255" cap="flat" cmpd="sng" algn="ctr">
                       <a:solidFill>
                         <a:srgbClr val="D0D5DD"/>
@@ -10506,6 +10356,11 @@
                     </a:lnB>
                   </a:tcPr>
                 </a:tc>
+                <a:extLst>
+                  <a:ext uri="{0D108BD9-81ED-4DB2-BD59-A6C34878D82A}">
+                    <a16:rowId xmlns:a16="http://schemas.microsoft.com/office/drawing/2014/main" val="10000"/>
+                  </a:ext>
+                </a:extLst>
               </a:tr>
               <a:tr h="266700">
                 <a:tc>
@@ -10513,7 +10368,7 @@
                     <a:bodyPr/>
                     <a:lstStyle/>
                     <a:p>
-                      <a:pPr indent="0" marL="0">
+                      <a:pPr marL="0" indent="0">
                         <a:buNone/>
                       </a:pPr>
                       <a:r>
@@ -10534,7 +10389,7 @@
                       </a:endParaRPr>
                     </a:p>
                   </a:txBody>
-                  <a:tcPr marL="45720" marR="45720" marT="45720" marB="45720" anchor="mid">
+                  <a:tcPr marL="45720" marR="45720">
                     <a:lnL w="8255" cap="flat" cmpd="sng" algn="ctr">
                       <a:solidFill>
                         <a:srgbClr val="D0D5DD"/>
@@ -10578,7 +10433,7 @@
                     <a:bodyPr/>
                     <a:lstStyle/>
                     <a:p>
-                      <a:pPr indent="0" marL="0">
+                      <a:pPr marL="0" indent="0">
                         <a:buNone/>
                       </a:pPr>
                       <a:r>
@@ -10599,7 +10454,7 @@
                       </a:endParaRPr>
                     </a:p>
                   </a:txBody>
-                  <a:tcPr marL="45720" marR="45720" marT="45720" marB="45720" anchor="mid">
+                  <a:tcPr marL="45720" marR="45720">
                     <a:lnL w="8255" cap="flat" cmpd="sng" algn="ctr">
                       <a:solidFill>
                         <a:srgbClr val="D0D5DD"/>
@@ -10638,6 +10493,11 @@
                     </a:lnB>
                   </a:tcPr>
                 </a:tc>
+                <a:extLst>
+                  <a:ext uri="{0D108BD9-81ED-4DB2-BD59-A6C34878D82A}">
+                    <a16:rowId xmlns:a16="http://schemas.microsoft.com/office/drawing/2014/main" val="10001"/>
+                  </a:ext>
+                </a:extLst>
               </a:tr>
               <a:tr h="266700">
                 <a:tc>
@@ -10645,7 +10505,7 @@
                     <a:bodyPr/>
                     <a:lstStyle/>
                     <a:p>
-                      <a:pPr indent="0" marL="0">
+                      <a:pPr marL="0" indent="0">
                         <a:buNone/>
                       </a:pPr>
                       <a:r>
@@ -10666,7 +10526,7 @@
                       </a:endParaRPr>
                     </a:p>
                   </a:txBody>
-                  <a:tcPr marL="45720" marR="45720" marT="45720" marB="45720" anchor="mid">
+                  <a:tcPr marL="45720" marR="45720">
                     <a:lnL w="8255" cap="flat" cmpd="sng" algn="ctr">
                       <a:solidFill>
                         <a:srgbClr val="D0D5DD"/>
@@ -10710,7 +10570,7 @@
                     <a:bodyPr/>
                     <a:lstStyle/>
                     <a:p>
-                      <a:pPr indent="0" marL="0">
+                      <a:pPr marL="0" indent="0">
                         <a:buNone/>
                       </a:pPr>
                       <a:r>
@@ -10731,7 +10591,7 @@
                       </a:endParaRPr>
                     </a:p>
                   </a:txBody>
-                  <a:tcPr marL="45720" marR="45720" marT="45720" marB="45720" anchor="mid">
+                  <a:tcPr marL="45720" marR="45720">
                     <a:lnL w="8255" cap="flat" cmpd="sng" algn="ctr">
                       <a:solidFill>
                         <a:srgbClr val="D0D5DD"/>
@@ -10770,6 +10630,11 @@
                     </a:lnB>
                   </a:tcPr>
                 </a:tc>
+                <a:extLst>
+                  <a:ext uri="{0D108BD9-81ED-4DB2-BD59-A6C34878D82A}">
+                    <a16:rowId xmlns:a16="http://schemas.microsoft.com/office/drawing/2014/main" val="10002"/>
+                  </a:ext>
+                </a:extLst>
               </a:tr>
               <a:tr h="266700">
                 <a:tc>
@@ -10777,7 +10642,7 @@
                     <a:bodyPr/>
                     <a:lstStyle/>
                     <a:p>
-                      <a:pPr indent="0" marL="0">
+                      <a:pPr marL="0" indent="0">
                         <a:buNone/>
                       </a:pPr>
                       <a:r>
@@ -10798,7 +10663,7 @@
                       </a:endParaRPr>
                     </a:p>
                   </a:txBody>
-                  <a:tcPr marL="45720" marR="45720" marT="45720" marB="45720" anchor="mid">
+                  <a:tcPr marL="45720" marR="45720">
                     <a:lnL w="8255" cap="flat" cmpd="sng" algn="ctr">
                       <a:solidFill>
                         <a:srgbClr val="D0D5DD"/>
@@ -10842,7 +10707,7 @@
                     <a:bodyPr/>
                     <a:lstStyle/>
                     <a:p>
-                      <a:pPr indent="0" marL="0">
+                      <a:pPr marL="0" indent="0">
                         <a:buNone/>
                       </a:pPr>
                       <a:r>
@@ -10863,7 +10728,7 @@
                       </a:endParaRPr>
                     </a:p>
                   </a:txBody>
-                  <a:tcPr marL="45720" marR="45720" marT="45720" marB="45720" anchor="mid">
+                  <a:tcPr marL="45720" marR="45720">
                     <a:lnL w="8255" cap="flat" cmpd="sng" algn="ctr">
                       <a:solidFill>
                         <a:srgbClr val="D0D5DD"/>
@@ -10902,6 +10767,11 @@
                     </a:lnB>
                   </a:tcPr>
                 </a:tc>
+                <a:extLst>
+                  <a:ext uri="{0D108BD9-81ED-4DB2-BD59-A6C34878D82A}">
+                    <a16:rowId xmlns:a16="http://schemas.microsoft.com/office/drawing/2014/main" val="10003"/>
+                  </a:ext>
+                </a:extLst>
               </a:tr>
               <a:tr h="266700">
                 <a:tc>
@@ -10909,7 +10779,7 @@
                     <a:bodyPr/>
                     <a:lstStyle/>
                     <a:p>
-                      <a:pPr indent="0" marL="0">
+                      <a:pPr marL="0" indent="0">
                         <a:buNone/>
                       </a:pPr>
                       <a:r>
@@ -10930,7 +10800,7 @@
                       </a:endParaRPr>
                     </a:p>
                   </a:txBody>
-                  <a:tcPr marL="45720" marR="45720" marT="45720" marB="45720" anchor="mid">
+                  <a:tcPr marL="45720" marR="45720">
                     <a:lnL w="8255" cap="flat" cmpd="sng" algn="ctr">
                       <a:solidFill>
                         <a:srgbClr val="D0D5DD"/>
@@ -10974,7 +10844,7 @@
                     <a:bodyPr/>
                     <a:lstStyle/>
                     <a:p>
-                      <a:pPr indent="0" marL="0">
+                      <a:pPr marL="0" indent="0">
                         <a:buNone/>
                       </a:pPr>
                       <a:r>
@@ -10995,7 +10865,7 @@
                       </a:endParaRPr>
                     </a:p>
                   </a:txBody>
-                  <a:tcPr marL="45720" marR="45720" marT="45720" marB="45720" anchor="mid">
+                  <a:tcPr marL="45720" marR="45720">
                     <a:lnL w="8255" cap="flat" cmpd="sng" algn="ctr">
                       <a:solidFill>
                         <a:srgbClr val="D0D5DD"/>
@@ -11034,6 +10904,11 @@
                     </a:lnB>
                   </a:tcPr>
                 </a:tc>
+                <a:extLst>
+                  <a:ext uri="{0D108BD9-81ED-4DB2-BD59-A6C34878D82A}">
+                    <a16:rowId xmlns:a16="http://schemas.microsoft.com/office/drawing/2014/main" val="10004"/>
+                  </a:ext>
+                </a:extLst>
               </a:tr>
               <a:tr h="266700">
                 <a:tc>
@@ -11041,7 +10916,7 @@
                     <a:bodyPr/>
                     <a:lstStyle/>
                     <a:p>
-                      <a:pPr indent="0" marL="0">
+                      <a:pPr marL="0" indent="0">
                         <a:buNone/>
                       </a:pPr>
                       <a:r>
@@ -11062,7 +10937,7 @@
                       </a:endParaRPr>
                     </a:p>
                   </a:txBody>
-                  <a:tcPr marL="45720" marR="45720" marT="45720" marB="45720" anchor="mid">
+                  <a:tcPr marL="45720" marR="45720">
                     <a:lnL w="8255" cap="flat" cmpd="sng" algn="ctr">
                       <a:solidFill>
                         <a:srgbClr val="D0D5DD"/>
@@ -11106,7 +10981,7 @@
                     <a:bodyPr/>
                     <a:lstStyle/>
                     <a:p>
-                      <a:pPr indent="0" marL="0">
+                      <a:pPr marL="0" indent="0">
                         <a:buNone/>
                       </a:pPr>
                       <a:r>
@@ -11127,7 +11002,7 @@
                       </a:endParaRPr>
                     </a:p>
                   </a:txBody>
-                  <a:tcPr marL="45720" marR="45720" marT="45720" marB="45720" anchor="mid">
+                  <a:tcPr marL="45720" marR="45720">
                     <a:lnL w="8255" cap="flat" cmpd="sng" algn="ctr">
                       <a:solidFill>
                         <a:srgbClr val="D0D5DD"/>
@@ -11166,6 +11041,11 @@
                     </a:lnB>
                   </a:tcPr>
                 </a:tc>
+                <a:extLst>
+                  <a:ext uri="{0D108BD9-81ED-4DB2-BD59-A6C34878D82A}">
+                    <a16:rowId xmlns:a16="http://schemas.microsoft.com/office/drawing/2014/main" val="10005"/>
+                  </a:ext>
+                </a:extLst>
               </a:tr>
             </a:tbl>
           </a:graphicData>
@@ -11219,7 +11099,7 @@
           </a:bodyPr>
           <a:lstStyle/>
           <a:p>
-            <a:pPr indent="0" marL="0">
+            <a:pPr marL="0" indent="0">
               <a:buNone/>
             </a:pPr>
             <a:r>
@@ -11260,7 +11140,7 @@
           </a:bodyPr>
           <a:lstStyle/>
           <a:p>
-            <a:pPr indent="0" marL="0">
+            <a:pPr marL="0" indent="0">
               <a:buNone/>
             </a:pPr>
             <a:r>
@@ -11301,7 +11181,7 @@
           </a:bodyPr>
           <a:lstStyle/>
           <a:p>
-            <a:pPr indent="0" marL="0">
+            <a:pPr marL="0" indent="0">
               <a:buNone/>
             </a:pPr>
             <a:r>
@@ -11339,7 +11219,7 @@
           </a:prstGeom>
           <a:extLst>
             <a:ext uri="{C572A759-6A51-4108-AA02-DFA0A04FC94B}">
-              <ma14:wrappingTextBoxFlag xmlns:ma14="http://schemas.microsoft.com/office/mac/drawingml/2011/main" val="0"/>
+              <ma14:wrappingTextBoxFlag xmlns:ma14="http://schemas.microsoft.com/office/mac/drawingml/2011/main" xmlns="" val="0"/>
             </a:ext>
           </a:extLst>
         </p:spPr>
@@ -11360,7 +11240,7 @@
           <a:p>
             <a:pPr algn="l"/>
             <a:fld id="{F7021451-1387-4CA6-816F-3879F97B5CBC}" type="slidenum">
-              <a:rPr b="0" lang="en-US"/>
+              <a:rPr lang="en-US" b="0"/>
               <a:t>15</a:t>
             </a:fld>
             <a:endParaRPr lang="en-US"/>
@@ -11383,6 +11263,7 @@
         <a:solidFill>
           <a:srgbClr val="FFFFFF"/>
         </a:solidFill>
+        <a:effectLst/>
       </p:bgPr>
     </p:bg>
     <p:spTree>
@@ -11420,7 +11301,7 @@
           <a:bodyPr wrap="square" lIns="0" tIns="0" rIns="0" bIns="0" rtlCol="0" anchor="ctr"/>
           <a:lstStyle/>
           <a:p>
-            <a:pPr indent="0" marL="0">
+            <a:pPr marL="0" indent="0">
               <a:buNone/>
             </a:pPr>
             <a:r>
@@ -11461,7 +11342,7 @@
           </a:bodyPr>
           <a:lstStyle/>
           <a:p>
-            <a:pPr indent="0" marL="0">
+            <a:pPr marL="0" indent="0">
               <a:buNone/>
             </a:pPr>
             <a:r>
@@ -11504,15 +11385,15 @@
       </p:sp>
       <p:pic>
         <p:nvPicPr>
-          <p:cNvPr id="5" name="Image 0" descr="D:\CRM\crystal-ball-insights\src\assets\dashboard-architecture.jpg">    </p:cNvPr>
+          <p:cNvPr id="5" name="Image 0" descr="D:\CRM\crystal-ball-insights\src\assets\dashboard-architecture.jpg"/>
           <p:cNvPicPr>
             <a:picLocks noChangeAspect="1"/>
           </p:cNvPicPr>
           <p:nvPr/>
         </p:nvPicPr>
         <p:blipFill>
-          <a:blip r:embed="rId1"/>
-          <a:srcRect l="0" r="0" t="0" b="0"/>
+          <a:blip r:embed="rId3"/>
+          <a:srcRect/>
           <a:stretch/>
         </p:blipFill>
         <p:spPr>
@@ -11548,7 +11429,7 @@
           </a:bodyPr>
           <a:lstStyle/>
           <a:p>
-            <a:pPr indent="0" marL="0">
+            <a:pPr marL="0" indent="0">
               <a:buNone/>
             </a:pPr>
             <a:r>
@@ -11586,7 +11467,7 @@
           </a:prstGeom>
           <a:extLst>
             <a:ext uri="{C572A759-6A51-4108-AA02-DFA0A04FC94B}">
-              <ma14:wrappingTextBoxFlag xmlns:ma14="http://schemas.microsoft.com/office/mac/drawingml/2011/main" val="0"/>
+              <ma14:wrappingTextBoxFlag xmlns:ma14="http://schemas.microsoft.com/office/mac/drawingml/2011/main" xmlns="" val="0"/>
             </a:ext>
           </a:extLst>
         </p:spPr>
@@ -11607,7 +11488,7 @@
           <a:p>
             <a:pPr algn="l"/>
             <a:fld id="{F7021451-1387-4CA6-816F-3879F97B5CBC}" type="slidenum">
-              <a:rPr b="0" lang="en-US"/>
+              <a:rPr lang="en-US" b="0"/>
               <a:t>16</a:t>
             </a:fld>
             <a:endParaRPr lang="en-US"/>
@@ -11630,6 +11511,7 @@
         <a:solidFill>
           <a:srgbClr val="FFFFFF"/>
         </a:solidFill>
+        <a:effectLst/>
       </p:bgPr>
     </p:bg>
     <p:spTree>
@@ -11667,7 +11549,7 @@
           <a:bodyPr wrap="square" lIns="0" tIns="0" rIns="0" bIns="0" rtlCol="0" anchor="ctr"/>
           <a:lstStyle/>
           <a:p>
-            <a:pPr indent="0" marL="0">
+            <a:pPr marL="0" indent="0">
               <a:buNone/>
             </a:pPr>
             <a:r>
@@ -11708,7 +11590,7 @@
           </a:bodyPr>
           <a:lstStyle/>
           <a:p>
-            <a:pPr indent="0" marL="0">
+            <a:pPr marL="0" indent="0">
               <a:buNone/>
             </a:pPr>
             <a:r>
@@ -11751,15 +11633,15 @@
       </p:sp>
       <p:pic>
         <p:nvPicPr>
-          <p:cNvPr id="5" name="Image 0" descr="D:\CRM\crystal-ball-insights\src\assets\dashboard-dataflow.jpg">    </p:cNvPr>
+          <p:cNvPr id="5" name="Image 0" descr="D:\CRM\crystal-ball-insights\src\assets\dashboard-dataflow.jpg"/>
           <p:cNvPicPr>
             <a:picLocks noChangeAspect="1"/>
           </p:cNvPicPr>
           <p:nvPr/>
         </p:nvPicPr>
         <p:blipFill>
-          <a:blip r:embed="rId1"/>
-          <a:srcRect l="0" r="0" t="0" b="0"/>
+          <a:blip r:embed="rId3"/>
+          <a:srcRect/>
           <a:stretch/>
         </p:blipFill>
         <p:spPr>
@@ -11795,7 +11677,7 @@
           </a:bodyPr>
           <a:lstStyle/>
           <a:p>
-            <a:pPr indent="0" marL="0">
+            <a:pPr marL="0" indent="0">
               <a:buNone/>
             </a:pPr>
             <a:r>
@@ -11833,7 +11715,7 @@
           </a:prstGeom>
           <a:extLst>
             <a:ext uri="{C572A759-6A51-4108-AA02-DFA0A04FC94B}">
-              <ma14:wrappingTextBoxFlag xmlns:ma14="http://schemas.microsoft.com/office/mac/drawingml/2011/main" val="0"/>
+              <ma14:wrappingTextBoxFlag xmlns:ma14="http://schemas.microsoft.com/office/mac/drawingml/2011/main" xmlns="" val="0"/>
             </a:ext>
           </a:extLst>
         </p:spPr>
@@ -11854,7 +11736,7 @@
           <a:p>
             <a:pPr algn="l"/>
             <a:fld id="{F7021451-1387-4CA6-816F-3879F97B5CBC}" type="slidenum">
-              <a:rPr b="0" lang="en-US"/>
+              <a:rPr lang="en-US" b="0"/>
               <a:t>17</a:t>
             </a:fld>
             <a:endParaRPr lang="en-US"/>
@@ -11877,6 +11759,7 @@
         <a:solidFill>
           <a:srgbClr val="FFFFFF"/>
         </a:solidFill>
+        <a:effectLst/>
       </p:bgPr>
     </p:bg>
     <p:spTree>
@@ -11914,7 +11797,7 @@
           <a:bodyPr wrap="square" lIns="0" tIns="0" rIns="0" bIns="0" rtlCol="0" anchor="ctr"/>
           <a:lstStyle/>
           <a:p>
-            <a:pPr indent="0" marL="0">
+            <a:pPr marL="0" indent="0">
               <a:buNone/>
             </a:pPr>
             <a:r>
@@ -11955,7 +11838,7 @@
           </a:bodyPr>
           <a:lstStyle/>
           <a:p>
-            <a:pPr indent="0" marL="0">
+            <a:pPr marL="0" indent="0">
               <a:buNone/>
             </a:pPr>
             <a:r>
@@ -11998,15 +11881,15 @@
       </p:sp>
       <p:pic>
         <p:nvPicPr>
-          <p:cNvPr id="5" name="Image 0" descr="D:\CRM\crystal-ball-insights\src\assets\dashboard-preview.jpg">    </p:cNvPr>
+          <p:cNvPr id="5" name="Image 0" descr="D:\CRM\crystal-ball-insights\src\assets\dashboard-preview.jpg"/>
           <p:cNvPicPr>
             <a:picLocks noChangeAspect="1"/>
           </p:cNvPicPr>
           <p:nvPr/>
         </p:nvPicPr>
         <p:blipFill>
-          <a:blip r:embed="rId1"/>
-          <a:srcRect l="0" r="0" t="0" b="0"/>
+          <a:blip r:embed="rId3"/>
+          <a:srcRect/>
           <a:stretch/>
         </p:blipFill>
         <p:spPr>
@@ -12042,7 +11925,7 @@
           </a:bodyPr>
           <a:lstStyle/>
           <a:p>
-            <a:pPr indent="0" marL="0">
+            <a:pPr marL="0" indent="0">
               <a:buNone/>
             </a:pPr>
             <a:r>
@@ -12080,7 +11963,7 @@
           </a:prstGeom>
           <a:extLst>
             <a:ext uri="{C572A759-6A51-4108-AA02-DFA0A04FC94B}">
-              <ma14:wrappingTextBoxFlag xmlns:ma14="http://schemas.microsoft.com/office/mac/drawingml/2011/main" val="0"/>
+              <ma14:wrappingTextBoxFlag xmlns:ma14="http://schemas.microsoft.com/office/mac/drawingml/2011/main" xmlns="" val="0"/>
             </a:ext>
           </a:extLst>
         </p:spPr>
@@ -12101,7 +11984,7 @@
           <a:p>
             <a:pPr algn="l"/>
             <a:fld id="{F7021451-1387-4CA6-816F-3879F97B5CBC}" type="slidenum">
-              <a:rPr b="0" lang="en-US"/>
+              <a:rPr lang="en-US" b="0"/>
               <a:t>18</a:t>
             </a:fld>
             <a:endParaRPr lang="en-US"/>
@@ -12124,6 +12007,7 @@
         <a:solidFill>
           <a:srgbClr val="FFFFFF"/>
         </a:solidFill>
+        <a:effectLst/>
       </p:bgPr>
     </p:bg>
     <p:spTree>
@@ -12161,7 +12045,7 @@
           <a:bodyPr wrap="square" lIns="0" tIns="0" rIns="0" bIns="0" rtlCol="0" anchor="ctr"/>
           <a:lstStyle/>
           <a:p>
-            <a:pPr indent="0" marL="0">
+            <a:pPr marL="0" indent="0">
               <a:buNone/>
             </a:pPr>
             <a:r>
@@ -12202,7 +12086,7 @@
           </a:bodyPr>
           <a:lstStyle/>
           <a:p>
-            <a:pPr indent="0" marL="0">
+            <a:pPr marL="0" indent="0">
               <a:buNone/>
             </a:pPr>
             <a:r>
@@ -12266,9 +12150,27 @@
             <a:tbl>
               <a:tblPr/>
               <a:tblGrid>
-                <a:gridCol w="1828800"/>
-                <a:gridCol w="3749040"/>
-                <a:gridCol w="5303520"/>
+                <a:gridCol w="1828800">
+                  <a:extLst>
+                    <a:ext uri="{9D8B030D-6E8A-4147-A177-3AD203B41FA5}">
+                      <a16:colId xmlns:a16="http://schemas.microsoft.com/office/drawing/2014/main" val="20000"/>
+                    </a:ext>
+                  </a:extLst>
+                </a:gridCol>
+                <a:gridCol w="3749040">
+                  <a:extLst>
+                    <a:ext uri="{9D8B030D-6E8A-4147-A177-3AD203B41FA5}">
+                      <a16:colId xmlns:a16="http://schemas.microsoft.com/office/drawing/2014/main" val="20001"/>
+                    </a:ext>
+                  </a:extLst>
+                </a:gridCol>
+                <a:gridCol w="5303520">
+                  <a:extLst>
+                    <a:ext uri="{9D8B030D-6E8A-4147-A177-3AD203B41FA5}">
+                      <a16:colId xmlns:a16="http://schemas.microsoft.com/office/drawing/2014/main" val="20002"/>
+                    </a:ext>
+                  </a:extLst>
+                </a:gridCol>
               </a:tblGrid>
               <a:tr h="502920">
                 <a:tc>
@@ -12276,7 +12178,7 @@
                     <a:bodyPr/>
                     <a:lstStyle/>
                     <a:p>
-                      <a:pPr indent="0" marL="0">
+                      <a:pPr marL="0" indent="0">
                         <a:buNone/>
                       </a:pPr>
                       <a:r>
@@ -12297,7 +12199,7 @@
                       </a:endParaRPr>
                     </a:p>
                   </a:txBody>
-                  <a:tcPr marL="45720" marR="45720" marT="45720" marB="45720" anchor="mid">
+                  <a:tcPr marL="45720" marR="45720">
                     <a:lnL w="8255" cap="flat" cmpd="sng" algn="ctr">
                       <a:solidFill>
                         <a:srgbClr val="D0D5DD"/>
@@ -12341,7 +12243,7 @@
                     <a:bodyPr/>
                     <a:lstStyle/>
                     <a:p>
-                      <a:pPr indent="0" marL="0">
+                      <a:pPr marL="0" indent="0">
                         <a:buNone/>
                       </a:pPr>
                       <a:r>
@@ -12362,7 +12264,7 @@
                       </a:endParaRPr>
                     </a:p>
                   </a:txBody>
-                  <a:tcPr marL="45720" marR="45720" marT="45720" marB="45720" anchor="mid">
+                  <a:tcPr marL="45720" marR="45720">
                     <a:lnL w="8255" cap="flat" cmpd="sng" algn="ctr">
                       <a:solidFill>
                         <a:srgbClr val="D0D5DD"/>
@@ -12406,7 +12308,7 @@
                     <a:bodyPr/>
                     <a:lstStyle/>
                     <a:p>
-                      <a:pPr indent="0" marL="0">
+                      <a:pPr marL="0" indent="0">
                         <a:buNone/>
                       </a:pPr>
                       <a:r>
@@ -12427,7 +12329,7 @@
                       </a:endParaRPr>
                     </a:p>
                   </a:txBody>
-                  <a:tcPr marL="45720" marR="45720" marT="45720" marB="45720" anchor="mid">
+                  <a:tcPr marL="45720" marR="45720">
                     <a:lnL w="8255" cap="flat" cmpd="sng" algn="ctr">
                       <a:solidFill>
                         <a:srgbClr val="D0D5DD"/>
@@ -12466,6 +12368,11 @@
                     </a:lnB>
                   </a:tcPr>
                 </a:tc>
+                <a:extLst>
+                  <a:ext uri="{0D108BD9-81ED-4DB2-BD59-A6C34878D82A}">
+                    <a16:rowId xmlns:a16="http://schemas.microsoft.com/office/drawing/2014/main" val="10000"/>
+                  </a:ext>
+                </a:extLst>
               </a:tr>
               <a:tr h="502920">
                 <a:tc>
@@ -12473,7 +12380,7 @@
                     <a:bodyPr/>
                     <a:lstStyle/>
                     <a:p>
-                      <a:pPr indent="0" marL="0">
+                      <a:pPr marL="0" indent="0">
                         <a:buNone/>
                       </a:pPr>
                       <a:r>
@@ -12494,7 +12401,7 @@
                       </a:endParaRPr>
                     </a:p>
                   </a:txBody>
-                  <a:tcPr marL="45720" marR="45720" marT="45720" marB="45720" anchor="mid">
+                  <a:tcPr marL="45720" marR="45720">
                     <a:lnL w="8255" cap="flat" cmpd="sng" algn="ctr">
                       <a:solidFill>
                         <a:srgbClr val="D0D5DD"/>
@@ -12538,7 +12445,7 @@
                     <a:bodyPr/>
                     <a:lstStyle/>
                     <a:p>
-                      <a:pPr indent="0" marL="0">
+                      <a:pPr marL="0" indent="0">
                         <a:buNone/>
                       </a:pPr>
                       <a:r>
@@ -12559,7 +12466,7 @@
                       </a:endParaRPr>
                     </a:p>
                   </a:txBody>
-                  <a:tcPr marL="45720" marR="45720" marT="45720" marB="45720" anchor="mid">
+                  <a:tcPr marL="45720" marR="45720">
                     <a:lnL w="8255" cap="flat" cmpd="sng" algn="ctr">
                       <a:solidFill>
                         <a:srgbClr val="D0D5DD"/>
@@ -12603,7 +12510,7 @@
                     <a:bodyPr/>
                     <a:lstStyle/>
                     <a:p>
-                      <a:pPr indent="0" marL="0">
+                      <a:pPr marL="0" indent="0">
                         <a:buNone/>
                       </a:pPr>
                       <a:r>
@@ -12624,7 +12531,7 @@
                       </a:endParaRPr>
                     </a:p>
                   </a:txBody>
-                  <a:tcPr marL="45720" marR="45720" marT="45720" marB="45720" anchor="mid">
+                  <a:tcPr marL="45720" marR="45720">
                     <a:lnL w="8255" cap="flat" cmpd="sng" algn="ctr">
                       <a:solidFill>
                         <a:srgbClr val="D0D5DD"/>
@@ -12663,6 +12570,11 @@
                     </a:lnB>
                   </a:tcPr>
                 </a:tc>
+                <a:extLst>
+                  <a:ext uri="{0D108BD9-81ED-4DB2-BD59-A6C34878D82A}">
+                    <a16:rowId xmlns:a16="http://schemas.microsoft.com/office/drawing/2014/main" val="10001"/>
+                  </a:ext>
+                </a:extLst>
               </a:tr>
               <a:tr h="502920">
                 <a:tc>
@@ -12670,7 +12582,7 @@
                     <a:bodyPr/>
                     <a:lstStyle/>
                     <a:p>
-                      <a:pPr indent="0" marL="0">
+                      <a:pPr marL="0" indent="0">
                         <a:buNone/>
                       </a:pPr>
                       <a:r>
@@ -12691,7 +12603,7 @@
                       </a:endParaRPr>
                     </a:p>
                   </a:txBody>
-                  <a:tcPr marL="45720" marR="45720" marT="45720" marB="45720" anchor="mid">
+                  <a:tcPr marL="45720" marR="45720">
                     <a:lnL w="8255" cap="flat" cmpd="sng" algn="ctr">
                       <a:solidFill>
                         <a:srgbClr val="D0D5DD"/>
@@ -12735,7 +12647,7 @@
                     <a:bodyPr/>
                     <a:lstStyle/>
                     <a:p>
-                      <a:pPr indent="0" marL="0">
+                      <a:pPr marL="0" indent="0">
                         <a:buNone/>
                       </a:pPr>
                       <a:r>
@@ -12756,7 +12668,7 @@
                       </a:endParaRPr>
                     </a:p>
                   </a:txBody>
-                  <a:tcPr marL="45720" marR="45720" marT="45720" marB="45720" anchor="mid">
+                  <a:tcPr marL="45720" marR="45720">
                     <a:lnL w="8255" cap="flat" cmpd="sng" algn="ctr">
                       <a:solidFill>
                         <a:srgbClr val="D0D5DD"/>
@@ -12800,7 +12712,7 @@
                     <a:bodyPr/>
                     <a:lstStyle/>
                     <a:p>
-                      <a:pPr indent="0" marL="0">
+                      <a:pPr marL="0" indent="0">
                         <a:buNone/>
                       </a:pPr>
                       <a:r>
@@ -12821,7 +12733,7 @@
                       </a:endParaRPr>
                     </a:p>
                   </a:txBody>
-                  <a:tcPr marL="45720" marR="45720" marT="45720" marB="45720" anchor="mid">
+                  <a:tcPr marL="45720" marR="45720">
                     <a:lnL w="8255" cap="flat" cmpd="sng" algn="ctr">
                       <a:solidFill>
                         <a:srgbClr val="D0D5DD"/>
@@ -12860,6 +12772,11 @@
                     </a:lnB>
                   </a:tcPr>
                 </a:tc>
+                <a:extLst>
+                  <a:ext uri="{0D108BD9-81ED-4DB2-BD59-A6C34878D82A}">
+                    <a16:rowId xmlns:a16="http://schemas.microsoft.com/office/drawing/2014/main" val="10002"/>
+                  </a:ext>
+                </a:extLst>
               </a:tr>
               <a:tr h="502920">
                 <a:tc>
@@ -12867,7 +12784,7 @@
                     <a:bodyPr/>
                     <a:lstStyle/>
                     <a:p>
-                      <a:pPr indent="0" marL="0">
+                      <a:pPr marL="0" indent="0">
                         <a:buNone/>
                       </a:pPr>
                       <a:r>
@@ -12888,7 +12805,7 @@
                       </a:endParaRPr>
                     </a:p>
                   </a:txBody>
-                  <a:tcPr marL="45720" marR="45720" marT="45720" marB="45720" anchor="mid">
+                  <a:tcPr marL="45720" marR="45720">
                     <a:lnL w="8255" cap="flat" cmpd="sng" algn="ctr">
                       <a:solidFill>
                         <a:srgbClr val="D0D5DD"/>
@@ -12932,7 +12849,7 @@
                     <a:bodyPr/>
                     <a:lstStyle/>
                     <a:p>
-                      <a:pPr indent="0" marL="0">
+                      <a:pPr marL="0" indent="0">
                         <a:buNone/>
                       </a:pPr>
                       <a:r>
@@ -12953,7 +12870,7 @@
                       </a:endParaRPr>
                     </a:p>
                   </a:txBody>
-                  <a:tcPr marL="45720" marR="45720" marT="45720" marB="45720" anchor="mid">
+                  <a:tcPr marL="45720" marR="45720">
                     <a:lnL w="8255" cap="flat" cmpd="sng" algn="ctr">
                       <a:solidFill>
                         <a:srgbClr val="D0D5DD"/>
@@ -12997,7 +12914,7 @@
                     <a:bodyPr/>
                     <a:lstStyle/>
                     <a:p>
-                      <a:pPr indent="0" marL="0">
+                      <a:pPr marL="0" indent="0">
                         <a:buNone/>
                       </a:pPr>
                       <a:r>
@@ -13018,7 +12935,7 @@
                       </a:endParaRPr>
                     </a:p>
                   </a:txBody>
-                  <a:tcPr marL="45720" marR="45720" marT="45720" marB="45720" anchor="mid">
+                  <a:tcPr marL="45720" marR="45720">
                     <a:lnL w="8255" cap="flat" cmpd="sng" algn="ctr">
                       <a:solidFill>
                         <a:srgbClr val="D0D5DD"/>
@@ -13057,6 +12974,11 @@
                     </a:lnB>
                   </a:tcPr>
                 </a:tc>
+                <a:extLst>
+                  <a:ext uri="{0D108BD9-81ED-4DB2-BD59-A6C34878D82A}">
+                    <a16:rowId xmlns:a16="http://schemas.microsoft.com/office/drawing/2014/main" val="10003"/>
+                  </a:ext>
+                </a:extLst>
               </a:tr>
               <a:tr h="502920">
                 <a:tc>
@@ -13064,7 +12986,7 @@
                     <a:bodyPr/>
                     <a:lstStyle/>
                     <a:p>
-                      <a:pPr indent="0" marL="0">
+                      <a:pPr marL="0" indent="0">
                         <a:buNone/>
                       </a:pPr>
                       <a:r>
@@ -13085,7 +13007,7 @@
                       </a:endParaRPr>
                     </a:p>
                   </a:txBody>
-                  <a:tcPr marL="45720" marR="45720" marT="45720" marB="45720" anchor="mid">
+                  <a:tcPr marL="45720" marR="45720">
                     <a:lnL w="8255" cap="flat" cmpd="sng" algn="ctr">
                       <a:solidFill>
                         <a:srgbClr val="D0D5DD"/>
@@ -13129,7 +13051,7 @@
                     <a:bodyPr/>
                     <a:lstStyle/>
                     <a:p>
-                      <a:pPr indent="0" marL="0">
+                      <a:pPr marL="0" indent="0">
                         <a:buNone/>
                       </a:pPr>
                       <a:r>
@@ -13150,7 +13072,7 @@
                       </a:endParaRPr>
                     </a:p>
                   </a:txBody>
-                  <a:tcPr marL="45720" marR="45720" marT="45720" marB="45720" anchor="mid">
+                  <a:tcPr marL="45720" marR="45720">
                     <a:lnL w="8255" cap="flat" cmpd="sng" algn="ctr">
                       <a:solidFill>
                         <a:srgbClr val="D0D5DD"/>
@@ -13194,7 +13116,7 @@
                     <a:bodyPr/>
                     <a:lstStyle/>
                     <a:p>
-                      <a:pPr indent="0" marL="0">
+                      <a:pPr marL="0" indent="0">
                         <a:buNone/>
                       </a:pPr>
                       <a:r>
@@ -13215,7 +13137,7 @@
                       </a:endParaRPr>
                     </a:p>
                   </a:txBody>
-                  <a:tcPr marL="45720" marR="45720" marT="45720" marB="45720" anchor="mid">
+                  <a:tcPr marL="45720" marR="45720">
                     <a:lnL w="8255" cap="flat" cmpd="sng" algn="ctr">
                       <a:solidFill>
                         <a:srgbClr val="D0D5DD"/>
@@ -13254,6 +13176,11 @@
                     </a:lnB>
                   </a:tcPr>
                 </a:tc>
+                <a:extLst>
+                  <a:ext uri="{0D108BD9-81ED-4DB2-BD59-A6C34878D82A}">
+                    <a16:rowId xmlns:a16="http://schemas.microsoft.com/office/drawing/2014/main" val="10004"/>
+                  </a:ext>
+                </a:extLst>
               </a:tr>
               <a:tr h="502920">
                 <a:tc>
@@ -13261,7 +13188,7 @@
                     <a:bodyPr/>
                     <a:lstStyle/>
                     <a:p>
-                      <a:pPr indent="0" marL="0">
+                      <a:pPr marL="0" indent="0">
                         <a:buNone/>
                       </a:pPr>
                       <a:r>
@@ -13282,7 +13209,7 @@
                       </a:endParaRPr>
                     </a:p>
                   </a:txBody>
-                  <a:tcPr marL="45720" marR="45720" marT="45720" marB="45720" anchor="mid">
+                  <a:tcPr marL="45720" marR="45720">
                     <a:lnL w="8255" cap="flat" cmpd="sng" algn="ctr">
                       <a:solidFill>
                         <a:srgbClr val="D0D5DD"/>
@@ -13326,7 +13253,7 @@
                     <a:bodyPr/>
                     <a:lstStyle/>
                     <a:p>
-                      <a:pPr indent="0" marL="0">
+                      <a:pPr marL="0" indent="0">
                         <a:buNone/>
                       </a:pPr>
                       <a:r>
@@ -13347,7 +13274,7 @@
                       </a:endParaRPr>
                     </a:p>
                   </a:txBody>
-                  <a:tcPr marL="45720" marR="45720" marT="45720" marB="45720" anchor="mid">
+                  <a:tcPr marL="45720" marR="45720">
                     <a:lnL w="8255" cap="flat" cmpd="sng" algn="ctr">
                       <a:solidFill>
                         <a:srgbClr val="D0D5DD"/>
@@ -13391,7 +13318,7 @@
                     <a:bodyPr/>
                     <a:lstStyle/>
                     <a:p>
-                      <a:pPr indent="0" marL="0">
+                      <a:pPr marL="0" indent="0">
                         <a:buNone/>
                       </a:pPr>
                       <a:r>
@@ -13412,7 +13339,7 @@
                       </a:endParaRPr>
                     </a:p>
                   </a:txBody>
-                  <a:tcPr marL="45720" marR="45720" marT="45720" marB="45720" anchor="mid">
+                  <a:tcPr marL="45720" marR="45720">
                     <a:lnL w="8255" cap="flat" cmpd="sng" algn="ctr">
                       <a:solidFill>
                         <a:srgbClr val="D0D5DD"/>
@@ -13451,6 +13378,11 @@
                     </a:lnB>
                   </a:tcPr>
                 </a:tc>
+                <a:extLst>
+                  <a:ext uri="{0D108BD9-81ED-4DB2-BD59-A6C34878D82A}">
+                    <a16:rowId xmlns:a16="http://schemas.microsoft.com/office/drawing/2014/main" val="10005"/>
+                  </a:ext>
+                </a:extLst>
               </a:tr>
               <a:tr h="502920">
                 <a:tc>
@@ -13458,7 +13390,7 @@
                     <a:bodyPr/>
                     <a:lstStyle/>
                     <a:p>
-                      <a:pPr indent="0" marL="0">
+                      <a:pPr marL="0" indent="0">
                         <a:buNone/>
                       </a:pPr>
                       <a:r>
@@ -13479,7 +13411,7 @@
                       </a:endParaRPr>
                     </a:p>
                   </a:txBody>
-                  <a:tcPr marL="45720" marR="45720" marT="45720" marB="45720" anchor="mid">
+                  <a:tcPr marL="45720" marR="45720">
                     <a:lnL w="8255" cap="flat" cmpd="sng" algn="ctr">
                       <a:solidFill>
                         <a:srgbClr val="D0D5DD"/>
@@ -13523,7 +13455,7 @@
                     <a:bodyPr/>
                     <a:lstStyle/>
                     <a:p>
-                      <a:pPr indent="0" marL="0">
+                      <a:pPr marL="0" indent="0">
                         <a:buNone/>
                       </a:pPr>
                       <a:r>
@@ -13544,7 +13476,7 @@
                       </a:endParaRPr>
                     </a:p>
                   </a:txBody>
-                  <a:tcPr marL="45720" marR="45720" marT="45720" marB="45720" anchor="mid">
+                  <a:tcPr marL="45720" marR="45720">
                     <a:lnL w="8255" cap="flat" cmpd="sng" algn="ctr">
                       <a:solidFill>
                         <a:srgbClr val="D0D5DD"/>
@@ -13588,7 +13520,7 @@
                     <a:bodyPr/>
                     <a:lstStyle/>
                     <a:p>
-                      <a:pPr indent="0" marL="0">
+                      <a:pPr marL="0" indent="0">
                         <a:buNone/>
                       </a:pPr>
                       <a:r>
@@ -13609,7 +13541,7 @@
                       </a:endParaRPr>
                     </a:p>
                   </a:txBody>
-                  <a:tcPr marL="45720" marR="45720" marT="45720" marB="45720" anchor="mid">
+                  <a:tcPr marL="45720" marR="45720">
                     <a:lnL w="8255" cap="flat" cmpd="sng" algn="ctr">
                       <a:solidFill>
                         <a:srgbClr val="D0D5DD"/>
@@ -13648,6 +13580,11 @@
                     </a:lnB>
                   </a:tcPr>
                 </a:tc>
+                <a:extLst>
+                  <a:ext uri="{0D108BD9-81ED-4DB2-BD59-A6C34878D82A}">
+                    <a16:rowId xmlns:a16="http://schemas.microsoft.com/office/drawing/2014/main" val="10006"/>
+                  </a:ext>
+                </a:extLst>
               </a:tr>
               <a:tr h="502920">
                 <a:tc>
@@ -13655,7 +13592,7 @@
                     <a:bodyPr/>
                     <a:lstStyle/>
                     <a:p>
-                      <a:pPr indent="0" marL="0">
+                      <a:pPr marL="0" indent="0">
                         <a:buNone/>
                       </a:pPr>
                       <a:r>
@@ -13676,7 +13613,7 @@
                       </a:endParaRPr>
                     </a:p>
                   </a:txBody>
-                  <a:tcPr marL="45720" marR="45720" marT="45720" marB="45720" anchor="mid">
+                  <a:tcPr marL="45720" marR="45720">
                     <a:lnL w="8255" cap="flat" cmpd="sng" algn="ctr">
                       <a:solidFill>
                         <a:srgbClr val="D0D5DD"/>
@@ -13720,7 +13657,7 @@
                     <a:bodyPr/>
                     <a:lstStyle/>
                     <a:p>
-                      <a:pPr indent="0" marL="0">
+                      <a:pPr marL="0" indent="0">
                         <a:buNone/>
                       </a:pPr>
                       <a:r>
@@ -13741,7 +13678,7 @@
                       </a:endParaRPr>
                     </a:p>
                   </a:txBody>
-                  <a:tcPr marL="45720" marR="45720" marT="45720" marB="45720" anchor="mid">
+                  <a:tcPr marL="45720" marR="45720">
                     <a:lnL w="8255" cap="flat" cmpd="sng" algn="ctr">
                       <a:solidFill>
                         <a:srgbClr val="D0D5DD"/>
@@ -13785,7 +13722,7 @@
                     <a:bodyPr/>
                     <a:lstStyle/>
                     <a:p>
-                      <a:pPr indent="0" marL="0">
+                      <a:pPr marL="0" indent="0">
                         <a:buNone/>
                       </a:pPr>
                       <a:r>
@@ -13806,7 +13743,7 @@
                       </a:endParaRPr>
                     </a:p>
                   </a:txBody>
-                  <a:tcPr marL="45720" marR="45720" marT="45720" marB="45720" anchor="mid">
+                  <a:tcPr marL="45720" marR="45720">
                     <a:lnL w="8255" cap="flat" cmpd="sng" algn="ctr">
                       <a:solidFill>
                         <a:srgbClr val="D0D5DD"/>
@@ -13845,6 +13782,11 @@
                     </a:lnB>
                   </a:tcPr>
                 </a:tc>
+                <a:extLst>
+                  <a:ext uri="{0D108BD9-81ED-4DB2-BD59-A6C34878D82A}">
+                    <a16:rowId xmlns:a16="http://schemas.microsoft.com/office/drawing/2014/main" val="10007"/>
+                  </a:ext>
+                </a:extLst>
               </a:tr>
               <a:tr h="502920">
                 <a:tc>
@@ -13852,7 +13794,7 @@
                     <a:bodyPr/>
                     <a:lstStyle/>
                     <a:p>
-                      <a:pPr indent="0" marL="0">
+                      <a:pPr marL="0" indent="0">
                         <a:buNone/>
                       </a:pPr>
                       <a:r>
@@ -13873,7 +13815,7 @@
                       </a:endParaRPr>
                     </a:p>
                   </a:txBody>
-                  <a:tcPr marL="45720" marR="45720" marT="45720" marB="45720" anchor="mid">
+                  <a:tcPr marL="45720" marR="45720">
                     <a:lnL w="8255" cap="flat" cmpd="sng" algn="ctr">
                       <a:solidFill>
                         <a:srgbClr val="D0D5DD"/>
@@ -13917,7 +13859,7 @@
                     <a:bodyPr/>
                     <a:lstStyle/>
                     <a:p>
-                      <a:pPr indent="0" marL="0">
+                      <a:pPr marL="0" indent="0">
                         <a:buNone/>
                       </a:pPr>
                       <a:r>
@@ -13938,7 +13880,7 @@
                       </a:endParaRPr>
                     </a:p>
                   </a:txBody>
-                  <a:tcPr marL="45720" marR="45720" marT="45720" marB="45720" anchor="mid">
+                  <a:tcPr marL="45720" marR="45720">
                     <a:lnL w="8255" cap="flat" cmpd="sng" algn="ctr">
                       <a:solidFill>
                         <a:srgbClr val="D0D5DD"/>
@@ -13982,7 +13924,7 @@
                     <a:bodyPr/>
                     <a:lstStyle/>
                     <a:p>
-                      <a:pPr indent="0" marL="0">
+                      <a:pPr marL="0" indent="0">
                         <a:buNone/>
                       </a:pPr>
                       <a:r>
@@ -14003,7 +13945,7 @@
                       </a:endParaRPr>
                     </a:p>
                   </a:txBody>
-                  <a:tcPr marL="45720" marR="45720" marT="45720" marB="45720" anchor="mid">
+                  <a:tcPr marL="45720" marR="45720">
                     <a:lnL w="8255" cap="flat" cmpd="sng" algn="ctr">
                       <a:solidFill>
                         <a:srgbClr val="D0D5DD"/>
@@ -14042,6 +13984,11 @@
                     </a:lnB>
                   </a:tcPr>
                 </a:tc>
+                <a:extLst>
+                  <a:ext uri="{0D108BD9-81ED-4DB2-BD59-A6C34878D82A}">
+                    <a16:rowId xmlns:a16="http://schemas.microsoft.com/office/drawing/2014/main" val="10008"/>
+                  </a:ext>
+                </a:extLst>
               </a:tr>
             </a:tbl>
           </a:graphicData>
@@ -14067,7 +14014,7 @@
           </a:prstGeom>
           <a:extLst>
             <a:ext uri="{C572A759-6A51-4108-AA02-DFA0A04FC94B}">
-              <ma14:wrappingTextBoxFlag xmlns:ma14="http://schemas.microsoft.com/office/mac/drawingml/2011/main" val="0"/>
+              <ma14:wrappingTextBoxFlag xmlns:ma14="http://schemas.microsoft.com/office/mac/drawingml/2011/main" xmlns="" val="0"/>
             </a:ext>
           </a:extLst>
         </p:spPr>
@@ -14088,7 +14035,7 @@
           <a:p>
             <a:pPr algn="l"/>
             <a:fld id="{F7021451-1387-4CA6-816F-3879F97B5CBC}" type="slidenum">
-              <a:rPr b="0" lang="en-US"/>
+              <a:rPr lang="en-US" b="0"/>
               <a:t>19</a:t>
             </a:fld>
             <a:endParaRPr lang="en-US"/>
@@ -14111,6 +14058,7 @@
         <a:solidFill>
           <a:srgbClr val="FFFFFF"/>
         </a:solidFill>
+        <a:effectLst/>
       </p:bgPr>
     </p:bg>
     <p:spTree>
@@ -14148,7 +14096,7 @@
           <a:bodyPr wrap="square" lIns="0" tIns="0" rIns="0" bIns="0" rtlCol="0" anchor="ctr"/>
           <a:lstStyle/>
           <a:p>
-            <a:pPr indent="0" marL="0">
+            <a:pPr marL="0" indent="0">
               <a:buNone/>
             </a:pPr>
             <a:r>
@@ -14189,7 +14137,7 @@
           </a:bodyPr>
           <a:lstStyle/>
           <a:p>
-            <a:pPr indent="0" marL="0">
+            <a:pPr marL="0" indent="0">
               <a:buNone/>
             </a:pPr>
             <a:r>
@@ -14274,11 +14222,11 @@
         </p:spPr>
         <p:txBody>
           <a:bodyPr wrap="square" lIns="381" tIns="381" rIns="381" bIns="381" rtlCol="0" anchor="t">
-            <a:normAutofit/>
+            <a:normAutofit lnSpcReduction="10000"/>
           </a:bodyPr>
           <a:lstStyle/>
           <a:p>
-            <a:pPr algn="ctr" indent="0" marL="0">
+            <a:pPr marL="0" indent="0" algn="ctr">
               <a:buNone/>
             </a:pPr>
             <a:r>
@@ -14319,7 +14267,7 @@
           </a:bodyPr>
           <a:lstStyle/>
           <a:p>
-            <a:pPr indent="0" marL="0">
+            <a:pPr marL="0" indent="0">
               <a:buNone/>
             </a:pPr>
             <a:r>
@@ -14381,11 +14329,11 @@
         </p:spPr>
         <p:txBody>
           <a:bodyPr wrap="square" lIns="381" tIns="381" rIns="381" bIns="381" rtlCol="0" anchor="t">
-            <a:normAutofit/>
+            <a:normAutofit lnSpcReduction="10000"/>
           </a:bodyPr>
           <a:lstStyle/>
           <a:p>
-            <a:pPr algn="ctr" indent="0" marL="0">
+            <a:pPr marL="0" indent="0" algn="ctr">
               <a:buNone/>
             </a:pPr>
             <a:r>
@@ -14426,7 +14374,7 @@
           </a:bodyPr>
           <a:lstStyle/>
           <a:p>
-            <a:pPr indent="0" marL="0">
+            <a:pPr marL="0" indent="0">
               <a:buNone/>
             </a:pPr>
             <a:r>
@@ -14488,11 +14436,11 @@
         </p:spPr>
         <p:txBody>
           <a:bodyPr wrap="square" lIns="381" tIns="381" rIns="381" bIns="381" rtlCol="0" anchor="t">
-            <a:normAutofit/>
+            <a:normAutofit lnSpcReduction="10000"/>
           </a:bodyPr>
           <a:lstStyle/>
           <a:p>
-            <a:pPr algn="ctr" indent="0" marL="0">
+            <a:pPr marL="0" indent="0" algn="ctr">
               <a:buNone/>
             </a:pPr>
             <a:r>
@@ -14529,11 +14477,11 @@
         </p:spPr>
         <p:txBody>
           <a:bodyPr wrap="square" lIns="381" tIns="381" rIns="381" bIns="381" rtlCol="0" anchor="t">
-            <a:normAutofit/>
+            <a:normAutofit fontScale="92500"/>
           </a:bodyPr>
           <a:lstStyle/>
           <a:p>
-            <a:pPr indent="0" marL="0">
+            <a:pPr marL="0" indent="0">
               <a:buNone/>
             </a:pPr>
             <a:r>
@@ -14595,11 +14543,11 @@
         </p:spPr>
         <p:txBody>
           <a:bodyPr wrap="square" lIns="381" tIns="381" rIns="381" bIns="381" rtlCol="0" anchor="t">
-            <a:normAutofit/>
+            <a:normAutofit lnSpcReduction="10000"/>
           </a:bodyPr>
           <a:lstStyle/>
           <a:p>
-            <a:pPr algn="ctr" indent="0" marL="0">
+            <a:pPr marL="0" indent="0" algn="ctr">
               <a:buNone/>
             </a:pPr>
             <a:r>
@@ -14640,7 +14588,7 @@
           </a:bodyPr>
           <a:lstStyle/>
           <a:p>
-            <a:pPr indent="0" marL="0">
+            <a:pPr marL="0" indent="0">
               <a:buNone/>
             </a:pPr>
             <a:r>
@@ -14702,11 +14650,11 @@
         </p:spPr>
         <p:txBody>
           <a:bodyPr wrap="square" lIns="381" tIns="381" rIns="381" bIns="381" rtlCol="0" anchor="t">
-            <a:normAutofit/>
+            <a:normAutofit lnSpcReduction="10000"/>
           </a:bodyPr>
           <a:lstStyle/>
           <a:p>
-            <a:pPr algn="ctr" indent="0" marL="0">
+            <a:pPr marL="0" indent="0" algn="ctr">
               <a:buNone/>
             </a:pPr>
             <a:r>
@@ -14747,7 +14695,7 @@
           </a:bodyPr>
           <a:lstStyle/>
           <a:p>
-            <a:pPr indent="0" marL="0">
+            <a:pPr marL="0" indent="0">
               <a:buNone/>
             </a:pPr>
             <a:r>
@@ -14809,11 +14757,11 @@
         </p:spPr>
         <p:txBody>
           <a:bodyPr wrap="square" lIns="381" tIns="381" rIns="381" bIns="381" rtlCol="0" anchor="t">
-            <a:normAutofit/>
+            <a:normAutofit lnSpcReduction="10000"/>
           </a:bodyPr>
           <a:lstStyle/>
           <a:p>
-            <a:pPr algn="ctr" indent="0" marL="0">
+            <a:pPr marL="0" indent="0" algn="ctr">
               <a:buNone/>
             </a:pPr>
             <a:r>
@@ -14850,11 +14798,11 @@
         </p:spPr>
         <p:txBody>
           <a:bodyPr wrap="square" lIns="381" tIns="381" rIns="381" bIns="381" rtlCol="0" anchor="t">
-            <a:normAutofit/>
+            <a:normAutofit fontScale="92500"/>
           </a:bodyPr>
           <a:lstStyle/>
           <a:p>
-            <a:pPr indent="0" marL="0">
+            <a:pPr marL="0" indent="0">
               <a:buNone/>
             </a:pPr>
             <a:r>
@@ -14916,11 +14864,11 @@
         </p:spPr>
         <p:txBody>
           <a:bodyPr wrap="square" lIns="381" tIns="381" rIns="381" bIns="381" rtlCol="0" anchor="t">
-            <a:normAutofit/>
+            <a:normAutofit lnSpcReduction="10000"/>
           </a:bodyPr>
           <a:lstStyle/>
           <a:p>
-            <a:pPr algn="ctr" indent="0" marL="0">
+            <a:pPr marL="0" indent="0" algn="ctr">
               <a:buNone/>
             </a:pPr>
             <a:r>
@@ -14961,7 +14909,7 @@
           </a:bodyPr>
           <a:lstStyle/>
           <a:p>
-            <a:pPr indent="0" marL="0">
+            <a:pPr marL="0" indent="0">
               <a:buNone/>
             </a:pPr>
             <a:r>
@@ -15023,11 +14971,11 @@
         </p:spPr>
         <p:txBody>
           <a:bodyPr wrap="square" lIns="381" tIns="381" rIns="381" bIns="381" rtlCol="0" anchor="t">
-            <a:normAutofit/>
+            <a:normAutofit lnSpcReduction="10000"/>
           </a:bodyPr>
           <a:lstStyle/>
           <a:p>
-            <a:pPr algn="ctr" indent="0" marL="0">
+            <a:pPr marL="0" indent="0" algn="ctr">
               <a:buNone/>
             </a:pPr>
             <a:r>
@@ -15068,7 +15016,7 @@
           </a:bodyPr>
           <a:lstStyle/>
           <a:p>
-            <a:pPr indent="0" marL="0">
+            <a:pPr marL="0" indent="0">
               <a:buNone/>
             </a:pPr>
             <a:r>
@@ -15130,11 +15078,11 @@
         </p:spPr>
         <p:txBody>
           <a:bodyPr wrap="square" lIns="381" tIns="381" rIns="381" bIns="381" rtlCol="0" anchor="t">
-            <a:normAutofit/>
+            <a:normAutofit lnSpcReduction="10000"/>
           </a:bodyPr>
           <a:lstStyle/>
           <a:p>
-            <a:pPr algn="ctr" indent="0" marL="0">
+            <a:pPr marL="0" indent="0" algn="ctr">
               <a:buNone/>
             </a:pPr>
             <a:r>
@@ -15171,11 +15119,11 @@
         </p:spPr>
         <p:txBody>
           <a:bodyPr wrap="square" lIns="381" tIns="381" rIns="381" bIns="381" rtlCol="0" anchor="t">
-            <a:normAutofit/>
+            <a:normAutofit fontScale="77500" lnSpcReduction="20000"/>
           </a:bodyPr>
           <a:lstStyle/>
           <a:p>
-            <a:pPr indent="0" marL="0">
+            <a:pPr marL="0" indent="0">
               <a:buNone/>
             </a:pPr>
             <a:r>
@@ -15237,11 +15185,11 @@
         </p:spPr>
         <p:txBody>
           <a:bodyPr wrap="square" lIns="381" tIns="381" rIns="381" bIns="381" rtlCol="0" anchor="t">
-            <a:normAutofit/>
+            <a:normAutofit lnSpcReduction="10000"/>
           </a:bodyPr>
           <a:lstStyle/>
           <a:p>
-            <a:pPr algn="ctr" indent="0" marL="0">
+            <a:pPr marL="0" indent="0" algn="ctr">
               <a:buNone/>
             </a:pPr>
             <a:r>
@@ -15282,7 +15230,7 @@
           </a:bodyPr>
           <a:lstStyle/>
           <a:p>
-            <a:pPr indent="0" marL="0">
+            <a:pPr marL="0" indent="0">
               <a:buNone/>
             </a:pPr>
             <a:r>
@@ -15302,7 +15250,7 @@
       </p:sp>
       <p:sp>
         <p:nvSpPr>
-          <p:cNvPr id="25" name="Slide Number Placeholder 0"/>
+          <p:cNvPr id="35" name="Slide Number Placeholder 0"/>
           <p:cNvSpPr>
             <a:spLocks noGrp="1"/>
           </p:cNvSpPr>
@@ -15320,7 +15268,7 @@
           </a:prstGeom>
           <a:extLst>
             <a:ext uri="{C572A759-6A51-4108-AA02-DFA0A04FC94B}">
-              <ma14:wrappingTextBoxFlag xmlns:ma14="http://schemas.microsoft.com/office/mac/drawingml/2011/main" val="0"/>
+              <ma14:wrappingTextBoxFlag xmlns:ma14="http://schemas.microsoft.com/office/mac/drawingml/2011/main" xmlns="" val="0"/>
             </a:ext>
           </a:extLst>
         </p:spPr>
@@ -15341,7 +15289,7 @@
           <a:p>
             <a:pPr algn="l"/>
             <a:fld id="{F7021451-1387-4CA6-816F-3879F97B5CBC}" type="slidenum">
-              <a:rPr b="0" lang="en-US"/>
+              <a:rPr lang="en-US" b="0"/>
               <a:t>2</a:t>
             </a:fld>
             <a:endParaRPr lang="en-US"/>
@@ -15364,6 +15312,7 @@
         <a:solidFill>
           <a:srgbClr val="FFFFFF"/>
         </a:solidFill>
+        <a:effectLst/>
       </p:bgPr>
     </p:bg>
     <p:spTree>
@@ -15401,7 +15350,7 @@
           <a:bodyPr wrap="square" lIns="0" tIns="0" rIns="0" bIns="0" rtlCol="0" anchor="ctr"/>
           <a:lstStyle/>
           <a:p>
-            <a:pPr indent="0" marL="0">
+            <a:pPr marL="0" indent="0">
               <a:buNone/>
             </a:pPr>
             <a:r>
@@ -15442,7 +15391,7 @@
           </a:bodyPr>
           <a:lstStyle/>
           <a:p>
-            <a:pPr indent="0" marL="0">
+            <a:pPr marL="0" indent="0">
               <a:buNone/>
             </a:pPr>
             <a:r>
@@ -15485,15 +15434,15 @@
       </p:sp>
       <p:pic>
         <p:nvPicPr>
-          <p:cNvPr id="5" name="Image 0" descr="D:\CRM\crystal-ball-insights\ai-portfolio-research\report\figures\ablation_bar.png">    </p:cNvPr>
+          <p:cNvPr id="5" name="Image 0" descr="D:\CRM\crystal-ball-insights\ai-portfolio-research\report\figures\ablation_bar.png"/>
           <p:cNvPicPr>
             <a:picLocks noChangeAspect="1"/>
           </p:cNvPicPr>
           <p:nvPr/>
         </p:nvPicPr>
         <p:blipFill>
-          <a:blip r:embed="rId1"/>
-          <a:srcRect l="0" r="0" t="0" b="0"/>
+          <a:blip r:embed="rId3"/>
+          <a:srcRect/>
           <a:stretch/>
         </p:blipFill>
         <p:spPr>
@@ -15529,9 +15478,27 @@
             <a:tbl>
               <a:tblPr/>
               <a:tblGrid>
-                <a:gridCol w="914400"/>
-                <a:gridCol w="914400"/>
-                <a:gridCol w="3246120"/>
+                <a:gridCol w="914400">
+                  <a:extLst>
+                    <a:ext uri="{9D8B030D-6E8A-4147-A177-3AD203B41FA5}">
+                      <a16:colId xmlns:a16="http://schemas.microsoft.com/office/drawing/2014/main" val="20000"/>
+                    </a:ext>
+                  </a:extLst>
+                </a:gridCol>
+                <a:gridCol w="914400">
+                  <a:extLst>
+                    <a:ext uri="{9D8B030D-6E8A-4147-A177-3AD203B41FA5}">
+                      <a16:colId xmlns:a16="http://schemas.microsoft.com/office/drawing/2014/main" val="20001"/>
+                    </a:ext>
+                  </a:extLst>
+                </a:gridCol>
+                <a:gridCol w="3246120">
+                  <a:extLst>
+                    <a:ext uri="{9D8B030D-6E8A-4147-A177-3AD203B41FA5}">
+                      <a16:colId xmlns:a16="http://schemas.microsoft.com/office/drawing/2014/main" val="20002"/>
+                    </a:ext>
+                  </a:extLst>
+                </a:gridCol>
               </a:tblGrid>
               <a:tr h="589788">
                 <a:tc>
@@ -15539,7 +15506,7 @@
                     <a:bodyPr/>
                     <a:lstStyle/>
                     <a:p>
-                      <a:pPr indent="0" marL="0">
+                      <a:pPr marL="0" indent="0">
                         <a:buNone/>
                       </a:pPr>
                       <a:r>
@@ -15560,7 +15527,7 @@
                       </a:endParaRPr>
                     </a:p>
                   </a:txBody>
-                  <a:tcPr marL="45720" marR="45720" marT="45720" marB="45720" anchor="mid">
+                  <a:tcPr marL="45720" marR="45720">
                     <a:lnL w="8255" cap="flat" cmpd="sng" algn="ctr">
                       <a:solidFill>
                         <a:srgbClr val="D0D5DD"/>
@@ -15604,7 +15571,7 @@
                     <a:bodyPr/>
                     <a:lstStyle/>
                     <a:p>
-                      <a:pPr indent="0" marL="0">
+                      <a:pPr marL="0" indent="0">
                         <a:buNone/>
                       </a:pPr>
                       <a:r>
@@ -15625,7 +15592,7 @@
                       </a:endParaRPr>
                     </a:p>
                   </a:txBody>
-                  <a:tcPr marL="45720" marR="45720" marT="45720" marB="45720" anchor="mid">
+                  <a:tcPr marL="45720" marR="45720">
                     <a:lnL w="8255" cap="flat" cmpd="sng" algn="ctr">
                       <a:solidFill>
                         <a:srgbClr val="D0D5DD"/>
@@ -15669,7 +15636,7 @@
                     <a:bodyPr/>
                     <a:lstStyle/>
                     <a:p>
-                      <a:pPr indent="0" marL="0">
+                      <a:pPr marL="0" indent="0">
                         <a:buNone/>
                       </a:pPr>
                       <a:r>
@@ -15690,7 +15657,7 @@
                       </a:endParaRPr>
                     </a:p>
                   </a:txBody>
-                  <a:tcPr marL="45720" marR="45720" marT="45720" marB="45720" anchor="mid">
+                  <a:tcPr marL="45720" marR="45720">
                     <a:lnL w="8255" cap="flat" cmpd="sng" algn="ctr">
                       <a:solidFill>
                         <a:srgbClr val="D0D5DD"/>
@@ -15729,6 +15696,11 @@
                     </a:lnB>
                   </a:tcPr>
                 </a:tc>
+                <a:extLst>
+                  <a:ext uri="{0D108BD9-81ED-4DB2-BD59-A6C34878D82A}">
+                    <a16:rowId xmlns:a16="http://schemas.microsoft.com/office/drawing/2014/main" val="10000"/>
+                  </a:ext>
+                </a:extLst>
               </a:tr>
               <a:tr h="589788">
                 <a:tc>
@@ -15736,7 +15708,7 @@
                     <a:bodyPr/>
                     <a:lstStyle/>
                     <a:p>
-                      <a:pPr indent="0" marL="0">
+                      <a:pPr marL="0" indent="0">
                         <a:buNone/>
                       </a:pPr>
                       <a:r>
@@ -15757,7 +15729,7 @@
                       </a:endParaRPr>
                     </a:p>
                   </a:txBody>
-                  <a:tcPr marL="45720" marR="45720" marT="45720" marB="45720" anchor="mid">
+                  <a:tcPr marL="45720" marR="45720">
                     <a:lnL w="8255" cap="flat" cmpd="sng" algn="ctr">
                       <a:solidFill>
                         <a:srgbClr val="D0D5DD"/>
@@ -15801,7 +15773,7 @@
                     <a:bodyPr/>
                     <a:lstStyle/>
                     <a:p>
-                      <a:pPr indent="0" marL="0">
+                      <a:pPr marL="0" indent="0">
                         <a:buNone/>
                       </a:pPr>
                       <a:r>
@@ -15822,7 +15794,7 @@
                       </a:endParaRPr>
                     </a:p>
                   </a:txBody>
-                  <a:tcPr marL="45720" marR="45720" marT="45720" marB="45720" anchor="mid">
+                  <a:tcPr marL="45720" marR="45720">
                     <a:lnL w="8255" cap="flat" cmpd="sng" algn="ctr">
                       <a:solidFill>
                         <a:srgbClr val="D0D5DD"/>
@@ -15866,7 +15838,7 @@
                     <a:bodyPr/>
                     <a:lstStyle/>
                     <a:p>
-                      <a:pPr indent="0" marL="0">
+                      <a:pPr marL="0" indent="0">
                         <a:buNone/>
                       </a:pPr>
                       <a:r>
@@ -15887,7 +15859,7 @@
                       </a:endParaRPr>
                     </a:p>
                   </a:txBody>
-                  <a:tcPr marL="45720" marR="45720" marT="45720" marB="45720" anchor="mid">
+                  <a:tcPr marL="45720" marR="45720">
                     <a:lnL w="8255" cap="flat" cmpd="sng" algn="ctr">
                       <a:solidFill>
                         <a:srgbClr val="D0D5DD"/>
@@ -15926,6 +15898,11 @@
                     </a:lnB>
                   </a:tcPr>
                 </a:tc>
+                <a:extLst>
+                  <a:ext uri="{0D108BD9-81ED-4DB2-BD59-A6C34878D82A}">
+                    <a16:rowId xmlns:a16="http://schemas.microsoft.com/office/drawing/2014/main" val="10001"/>
+                  </a:ext>
+                </a:extLst>
               </a:tr>
               <a:tr h="589788">
                 <a:tc>
@@ -15933,7 +15910,7 @@
                     <a:bodyPr/>
                     <a:lstStyle/>
                     <a:p>
-                      <a:pPr indent="0" marL="0">
+                      <a:pPr marL="0" indent="0">
                         <a:buNone/>
                       </a:pPr>
                       <a:r>
@@ -15954,7 +15931,7 @@
                       </a:endParaRPr>
                     </a:p>
                   </a:txBody>
-                  <a:tcPr marL="45720" marR="45720" marT="45720" marB="45720" anchor="mid">
+                  <a:tcPr marL="45720" marR="45720">
                     <a:lnL w="8255" cap="flat" cmpd="sng" algn="ctr">
                       <a:solidFill>
                         <a:srgbClr val="D0D5DD"/>
@@ -15998,7 +15975,7 @@
                     <a:bodyPr/>
                     <a:lstStyle/>
                     <a:p>
-                      <a:pPr indent="0" marL="0">
+                      <a:pPr marL="0" indent="0">
                         <a:buNone/>
                       </a:pPr>
                       <a:r>
@@ -16019,7 +15996,7 @@
                       </a:endParaRPr>
                     </a:p>
                   </a:txBody>
-                  <a:tcPr marL="45720" marR="45720" marT="45720" marB="45720" anchor="mid">
+                  <a:tcPr marL="45720" marR="45720">
                     <a:lnL w="8255" cap="flat" cmpd="sng" algn="ctr">
                       <a:solidFill>
                         <a:srgbClr val="D0D5DD"/>
@@ -16063,7 +16040,7 @@
                     <a:bodyPr/>
                     <a:lstStyle/>
                     <a:p>
-                      <a:pPr indent="0" marL="0">
+                      <a:pPr marL="0" indent="0">
                         <a:buNone/>
                       </a:pPr>
                       <a:r>
@@ -16084,7 +16061,7 @@
                       </a:endParaRPr>
                     </a:p>
                   </a:txBody>
-                  <a:tcPr marL="45720" marR="45720" marT="45720" marB="45720" anchor="mid">
+                  <a:tcPr marL="45720" marR="45720">
                     <a:lnL w="8255" cap="flat" cmpd="sng" algn="ctr">
                       <a:solidFill>
                         <a:srgbClr val="D0D5DD"/>
@@ -16123,6 +16100,11 @@
                     </a:lnB>
                   </a:tcPr>
                 </a:tc>
+                <a:extLst>
+                  <a:ext uri="{0D108BD9-81ED-4DB2-BD59-A6C34878D82A}">
+                    <a16:rowId xmlns:a16="http://schemas.microsoft.com/office/drawing/2014/main" val="10002"/>
+                  </a:ext>
+                </a:extLst>
               </a:tr>
               <a:tr h="589788">
                 <a:tc>
@@ -16130,7 +16112,7 @@
                     <a:bodyPr/>
                     <a:lstStyle/>
                     <a:p>
-                      <a:pPr indent="0" marL="0">
+                      <a:pPr marL="0" indent="0">
                         <a:buNone/>
                       </a:pPr>
                       <a:r>
@@ -16151,7 +16133,7 @@
                       </a:endParaRPr>
                     </a:p>
                   </a:txBody>
-                  <a:tcPr marL="45720" marR="45720" marT="45720" marB="45720" anchor="mid">
+                  <a:tcPr marL="45720" marR="45720">
                     <a:lnL w="8255" cap="flat" cmpd="sng" algn="ctr">
                       <a:solidFill>
                         <a:srgbClr val="D0D5DD"/>
@@ -16195,7 +16177,7 @@
                     <a:bodyPr/>
                     <a:lstStyle/>
                     <a:p>
-                      <a:pPr indent="0" marL="0">
+                      <a:pPr marL="0" indent="0">
                         <a:buNone/>
                       </a:pPr>
                       <a:r>
@@ -16216,7 +16198,7 @@
                       </a:endParaRPr>
                     </a:p>
                   </a:txBody>
-                  <a:tcPr marL="45720" marR="45720" marT="45720" marB="45720" anchor="mid">
+                  <a:tcPr marL="45720" marR="45720">
                     <a:lnL w="8255" cap="flat" cmpd="sng" algn="ctr">
                       <a:solidFill>
                         <a:srgbClr val="D0D5DD"/>
@@ -16260,7 +16242,7 @@
                     <a:bodyPr/>
                     <a:lstStyle/>
                     <a:p>
-                      <a:pPr indent="0" marL="0">
+                      <a:pPr marL="0" indent="0">
                         <a:buNone/>
                       </a:pPr>
                       <a:r>
@@ -16281,7 +16263,7 @@
                       </a:endParaRPr>
                     </a:p>
                   </a:txBody>
-                  <a:tcPr marL="45720" marR="45720" marT="45720" marB="45720" anchor="mid">
+                  <a:tcPr marL="45720" marR="45720">
                     <a:lnL w="8255" cap="flat" cmpd="sng" algn="ctr">
                       <a:solidFill>
                         <a:srgbClr val="D0D5DD"/>
@@ -16320,6 +16302,11 @@
                     </a:lnB>
                   </a:tcPr>
                 </a:tc>
+                <a:extLst>
+                  <a:ext uri="{0D108BD9-81ED-4DB2-BD59-A6C34878D82A}">
+                    <a16:rowId xmlns:a16="http://schemas.microsoft.com/office/drawing/2014/main" val="10003"/>
+                  </a:ext>
+                </a:extLst>
               </a:tr>
             </a:tbl>
           </a:graphicData>
@@ -16373,7 +16360,7 @@
           </a:bodyPr>
           <a:lstStyle/>
           <a:p>
-            <a:pPr indent="0" marL="0">
+            <a:pPr marL="0" indent="0">
               <a:buNone/>
             </a:pPr>
             <a:r>
@@ -16414,7 +16401,7 @@
           </a:bodyPr>
           <a:lstStyle/>
           <a:p>
-            <a:pPr indent="0" marL="0">
+            <a:pPr marL="0" indent="0">
               <a:buNone/>
             </a:pPr>
             <a:r>
@@ -16455,7 +16442,7 @@
           </a:bodyPr>
           <a:lstStyle/>
           <a:p>
-            <a:pPr indent="0" marL="0">
+            <a:pPr marL="0" indent="0">
               <a:buNone/>
             </a:pPr>
             <a:r>
@@ -16493,7 +16480,7 @@
           </a:prstGeom>
           <a:extLst>
             <a:ext uri="{C572A759-6A51-4108-AA02-DFA0A04FC94B}">
-              <ma14:wrappingTextBoxFlag xmlns:ma14="http://schemas.microsoft.com/office/mac/drawingml/2011/main" val="0"/>
+              <ma14:wrappingTextBoxFlag xmlns:ma14="http://schemas.microsoft.com/office/mac/drawingml/2011/main" xmlns="" val="0"/>
             </a:ext>
           </a:extLst>
         </p:spPr>
@@ -16514,7 +16501,7 @@
           <a:p>
             <a:pPr algn="l"/>
             <a:fld id="{F7021451-1387-4CA6-816F-3879F97B5CBC}" type="slidenum">
-              <a:rPr b="0" lang="en-US"/>
+              <a:rPr lang="en-US" b="0"/>
               <a:t>20</a:t>
             </a:fld>
             <a:endParaRPr lang="en-US"/>
@@ -16537,6 +16524,7 @@
         <a:solidFill>
           <a:srgbClr val="FFFFFF"/>
         </a:solidFill>
+        <a:effectLst/>
       </p:bgPr>
     </p:bg>
     <p:spTree>
@@ -16574,7 +16562,7 @@
           <a:bodyPr wrap="square" lIns="0" tIns="0" rIns="0" bIns="0" rtlCol="0" anchor="ctr"/>
           <a:lstStyle/>
           <a:p>
-            <a:pPr indent="0" marL="0">
+            <a:pPr marL="0" indent="0">
               <a:buNone/>
             </a:pPr>
             <a:r>
@@ -16615,7 +16603,7 @@
           </a:bodyPr>
           <a:lstStyle/>
           <a:p>
-            <a:pPr indent="0" marL="0">
+            <a:pPr marL="0" indent="0">
               <a:buNone/>
             </a:pPr>
             <a:r>
@@ -16658,15 +16646,15 @@
       </p:sp>
       <p:pic>
         <p:nvPicPr>
-          <p:cNvPr id="5" name="Image 0" descr="D:\CRM\crystal-ball-insights\ai-portfolio-research\report\figures\equity_curves.png">    </p:cNvPr>
+          <p:cNvPr id="5" name="Image 0" descr="D:\CRM\crystal-ball-insights\ai-portfolio-research\report\figures\equity_curves.png"/>
           <p:cNvPicPr>
             <a:picLocks noChangeAspect="1"/>
           </p:cNvPicPr>
           <p:nvPr/>
         </p:nvPicPr>
         <p:blipFill>
-          <a:blip r:embed="rId1"/>
-          <a:srcRect l="0" r="0" t="0" b="0"/>
+          <a:blip r:embed="rId3"/>
+          <a:srcRect/>
           <a:stretch/>
         </p:blipFill>
         <p:spPr>
@@ -16723,11 +16711,11 @@
         </p:spPr>
         <p:txBody>
           <a:bodyPr wrap="square" lIns="381" tIns="381" rIns="381" bIns="381" rtlCol="0" anchor="t">
-            <a:normAutofit/>
+            <a:normAutofit lnSpcReduction="10000"/>
           </a:bodyPr>
           <a:lstStyle/>
           <a:p>
-            <a:pPr algn="ctr" indent="0" marL="0">
+            <a:pPr marL="0" indent="0" algn="ctr">
               <a:buNone/>
             </a:pPr>
             <a:r>
@@ -16768,7 +16756,7 @@
           </a:bodyPr>
           <a:lstStyle/>
           <a:p>
-            <a:pPr algn="ctr" indent="0" marL="0">
+            <a:pPr marL="0" indent="0" algn="ctr">
               <a:buNone/>
             </a:pPr>
             <a:r>
@@ -16809,7 +16797,7 @@
           </a:bodyPr>
           <a:lstStyle/>
           <a:p>
-            <a:pPr algn="ctr" indent="0" marL="0">
+            <a:pPr marL="0" indent="0" algn="ctr">
               <a:buNone/>
             </a:pPr>
             <a:r>
@@ -16871,11 +16859,11 @@
         </p:spPr>
         <p:txBody>
           <a:bodyPr wrap="square" lIns="381" tIns="381" rIns="381" bIns="381" rtlCol="0" anchor="t">
-            <a:normAutofit/>
+            <a:normAutofit lnSpcReduction="10000"/>
           </a:bodyPr>
           <a:lstStyle/>
           <a:p>
-            <a:pPr algn="ctr" indent="0" marL="0">
+            <a:pPr marL="0" indent="0" algn="ctr">
               <a:buNone/>
             </a:pPr>
             <a:r>
@@ -16916,7 +16904,7 @@
           </a:bodyPr>
           <a:lstStyle/>
           <a:p>
-            <a:pPr algn="ctr" indent="0" marL="0">
+            <a:pPr marL="0" indent="0" algn="ctr">
               <a:buNone/>
             </a:pPr>
             <a:r>
@@ -16982,7 +16970,7 @@
           </a:bodyPr>
           <a:lstStyle/>
           <a:p>
-            <a:pPr indent="0" marL="0">
+            <a:pPr marL="0" indent="0">
               <a:buNone/>
             </a:pPr>
             <a:r>
@@ -17023,7 +17011,7 @@
           </a:bodyPr>
           <a:lstStyle/>
           <a:p>
-            <a:pPr indent="0" marL="0">
+            <a:pPr marL="0" indent="0">
               <a:buNone/>
             </a:pPr>
             <a:r>
@@ -17089,7 +17077,7 @@
           </a:bodyPr>
           <a:lstStyle/>
           <a:p>
-            <a:pPr indent="0" marL="0">
+            <a:pPr marL="0" indent="0">
               <a:buNone/>
             </a:pPr>
             <a:r>
@@ -17130,7 +17118,7 @@
           </a:bodyPr>
           <a:lstStyle/>
           <a:p>
-            <a:pPr indent="0" marL="0">
+            <a:pPr marL="0" indent="0">
               <a:buNone/>
             </a:pPr>
             <a:r>
@@ -17171,7 +17159,7 @@
           </a:bodyPr>
           <a:lstStyle/>
           <a:p>
-            <a:pPr indent="0" marL="0">
+            <a:pPr marL="0" indent="0">
               <a:buNone/>
             </a:pPr>
             <a:r>
@@ -17209,7 +17197,7 @@
           </a:prstGeom>
           <a:extLst>
             <a:ext uri="{C572A759-6A51-4108-AA02-DFA0A04FC94B}">
-              <ma14:wrappingTextBoxFlag xmlns:ma14="http://schemas.microsoft.com/office/mac/drawingml/2011/main" val="0"/>
+              <ma14:wrappingTextBoxFlag xmlns:ma14="http://schemas.microsoft.com/office/mac/drawingml/2011/main" xmlns="" val="0"/>
             </a:ext>
           </a:extLst>
         </p:spPr>
@@ -17230,7 +17218,7 @@
           <a:p>
             <a:pPr algn="l"/>
             <a:fld id="{F7021451-1387-4CA6-816F-3879F97B5CBC}" type="slidenum">
-              <a:rPr b="0" lang="en-US"/>
+              <a:rPr lang="en-US" b="0"/>
               <a:t>21</a:t>
             </a:fld>
             <a:endParaRPr lang="en-US"/>
@@ -17253,6 +17241,7 @@
         <a:solidFill>
           <a:srgbClr val="FFFFFF"/>
         </a:solidFill>
+        <a:effectLst/>
       </p:bgPr>
     </p:bg>
     <p:spTree>
@@ -17290,7 +17279,7 @@
           <a:bodyPr wrap="square" lIns="0" tIns="0" rIns="0" bIns="0" rtlCol="0" anchor="ctr"/>
           <a:lstStyle/>
           <a:p>
-            <a:pPr indent="0" marL="0">
+            <a:pPr marL="0" indent="0">
               <a:buNone/>
             </a:pPr>
             <a:r>
@@ -17331,7 +17320,7 @@
           </a:bodyPr>
           <a:lstStyle/>
           <a:p>
-            <a:pPr indent="0" marL="0">
+            <a:pPr marL="0" indent="0">
               <a:buNone/>
             </a:pPr>
             <a:r>
@@ -17374,15 +17363,15 @@
       </p:sp>
       <p:pic>
         <p:nvPicPr>
-          <p:cNvPr id="5" name="Image 0" descr="D:\CRM\crystal-ball-insights\ai-portfolio-research\report\figures\sharpe_comparison.png">    </p:cNvPr>
+          <p:cNvPr id="5" name="Image 0" descr="D:\CRM\crystal-ball-insights\ai-portfolio-research\report\figures\sharpe_comparison.png"/>
           <p:cNvPicPr>
             <a:picLocks noChangeAspect="1"/>
           </p:cNvPicPr>
           <p:nvPr/>
         </p:nvPicPr>
         <p:blipFill>
-          <a:blip r:embed="rId1"/>
-          <a:srcRect l="0" r="0" t="0" b="0"/>
+          <a:blip r:embed="rId3"/>
+          <a:srcRect/>
           <a:stretch/>
         </p:blipFill>
         <p:spPr>
@@ -17439,11 +17428,11 @@
         </p:spPr>
         <p:txBody>
           <a:bodyPr wrap="square" lIns="381" tIns="381" rIns="381" bIns="381" rtlCol="0" anchor="t">
-            <a:normAutofit/>
+            <a:normAutofit lnSpcReduction="10000"/>
           </a:bodyPr>
           <a:lstStyle/>
           <a:p>
-            <a:pPr algn="ctr" indent="0" marL="0">
+            <a:pPr marL="0" indent="0" algn="ctr">
               <a:buNone/>
             </a:pPr>
             <a:r>
@@ -17484,7 +17473,7 @@
           </a:bodyPr>
           <a:lstStyle/>
           <a:p>
-            <a:pPr algn="ctr" indent="0" marL="0">
+            <a:pPr marL="0" indent="0" algn="ctr">
               <a:buNone/>
             </a:pPr>
             <a:r>
@@ -17525,7 +17514,7 @@
           </a:bodyPr>
           <a:lstStyle/>
           <a:p>
-            <a:pPr algn="ctr" indent="0" marL="0">
+            <a:pPr marL="0" indent="0" algn="ctr">
               <a:buNone/>
             </a:pPr>
             <a:r>
@@ -17587,11 +17576,11 @@
         </p:spPr>
         <p:txBody>
           <a:bodyPr wrap="square" lIns="381" tIns="381" rIns="381" bIns="381" rtlCol="0" anchor="t">
-            <a:normAutofit/>
+            <a:normAutofit lnSpcReduction="10000"/>
           </a:bodyPr>
           <a:lstStyle/>
           <a:p>
-            <a:pPr algn="ctr" indent="0" marL="0">
+            <a:pPr marL="0" indent="0" algn="ctr">
               <a:buNone/>
             </a:pPr>
             <a:r>
@@ -17632,7 +17621,7 @@
           </a:bodyPr>
           <a:lstStyle/>
           <a:p>
-            <a:pPr algn="ctr" indent="0" marL="0">
+            <a:pPr marL="0" indent="0" algn="ctr">
               <a:buNone/>
             </a:pPr>
             <a:r>
@@ -17673,7 +17662,7 @@
           </a:bodyPr>
           <a:lstStyle/>
           <a:p>
-            <a:pPr algn="ctr" indent="0" marL="0">
+            <a:pPr marL="0" indent="0" algn="ctr">
               <a:buNone/>
             </a:pPr>
             <a:r>
@@ -17735,11 +17724,11 @@
         </p:spPr>
         <p:txBody>
           <a:bodyPr wrap="square" lIns="381" tIns="381" rIns="381" bIns="381" rtlCol="0" anchor="t">
-            <a:normAutofit/>
+            <a:normAutofit lnSpcReduction="10000"/>
           </a:bodyPr>
           <a:lstStyle/>
           <a:p>
-            <a:pPr algn="ctr" indent="0" marL="0">
+            <a:pPr marL="0" indent="0" algn="ctr">
               <a:buNone/>
             </a:pPr>
             <a:r>
@@ -17780,7 +17769,7 @@
           </a:bodyPr>
           <a:lstStyle/>
           <a:p>
-            <a:pPr algn="ctr" indent="0" marL="0">
+            <a:pPr marL="0" indent="0" algn="ctr">
               <a:buNone/>
             </a:pPr>
             <a:r>
@@ -17842,11 +17831,11 @@
         </p:spPr>
         <p:txBody>
           <a:bodyPr wrap="square" lIns="381" tIns="381" rIns="381" bIns="381" rtlCol="0" anchor="t">
-            <a:normAutofit/>
+            <a:normAutofit lnSpcReduction="10000"/>
           </a:bodyPr>
           <a:lstStyle/>
           <a:p>
-            <a:pPr algn="ctr" indent="0" marL="0">
+            <a:pPr marL="0" indent="0" algn="ctr">
               <a:buNone/>
             </a:pPr>
             <a:r>
@@ -17887,7 +17876,7 @@
           </a:bodyPr>
           <a:lstStyle/>
           <a:p>
-            <a:pPr algn="ctr" indent="0" marL="0">
+            <a:pPr marL="0" indent="0" algn="ctr">
               <a:buNone/>
             </a:pPr>
             <a:r>
@@ -17949,11 +17938,11 @@
         </p:spPr>
         <p:txBody>
           <a:bodyPr wrap="square" lIns="381" tIns="381" rIns="381" bIns="381" rtlCol="0" anchor="t">
-            <a:normAutofit/>
+            <a:normAutofit lnSpcReduction="10000"/>
           </a:bodyPr>
           <a:lstStyle/>
           <a:p>
-            <a:pPr algn="ctr" indent="0" marL="0">
+            <a:pPr marL="0" indent="0" algn="ctr">
               <a:buNone/>
             </a:pPr>
             <a:r>
@@ -17994,7 +17983,7 @@
           </a:bodyPr>
           <a:lstStyle/>
           <a:p>
-            <a:pPr algn="ctr" indent="0" marL="0">
+            <a:pPr marL="0" indent="0" algn="ctr">
               <a:buNone/>
             </a:pPr>
             <a:r>
@@ -18035,7 +18024,7 @@
           </a:bodyPr>
           <a:lstStyle/>
           <a:p>
-            <a:pPr algn="ctr" indent="0" marL="0">
+            <a:pPr marL="0" indent="0" algn="ctr">
               <a:buNone/>
             </a:pPr>
             <a:r>
@@ -18097,11 +18086,11 @@
         </p:spPr>
         <p:txBody>
           <a:bodyPr wrap="square" lIns="381" tIns="381" rIns="381" bIns="381" rtlCol="0" anchor="t">
-            <a:normAutofit/>
+            <a:normAutofit lnSpcReduction="10000"/>
           </a:bodyPr>
           <a:lstStyle/>
           <a:p>
-            <a:pPr algn="ctr" indent="0" marL="0">
+            <a:pPr marL="0" indent="0" algn="ctr">
               <a:buNone/>
             </a:pPr>
             <a:r>
@@ -18142,7 +18131,7 @@
           </a:bodyPr>
           <a:lstStyle/>
           <a:p>
-            <a:pPr algn="ctr" indent="0" marL="0">
+            <a:pPr marL="0" indent="0" algn="ctr">
               <a:buNone/>
             </a:pPr>
             <a:r>
@@ -18183,7 +18172,7 @@
           </a:bodyPr>
           <a:lstStyle/>
           <a:p>
-            <a:pPr algn="ctr" indent="0" marL="0">
+            <a:pPr marL="0" indent="0" algn="ctr">
               <a:buNone/>
             </a:pPr>
             <a:r>
@@ -18220,11 +18209,11 @@
         </p:spPr>
         <p:txBody>
           <a:bodyPr wrap="square" lIns="381" tIns="381" rIns="381" bIns="381" rtlCol="0" anchor="t">
-            <a:normAutofit/>
+            <a:normAutofit fontScale="92500" lnSpcReduction="20000"/>
           </a:bodyPr>
           <a:lstStyle/>
           <a:p>
-            <a:pPr algn="ctr" indent="0" marL="0">
+            <a:pPr marL="0" indent="0" algn="ctr">
               <a:buNone/>
             </a:pPr>
             <a:r>
@@ -18265,7 +18254,7 @@
           </a:bodyPr>
           <a:lstStyle/>
           <a:p>
-            <a:pPr indent="0" marL="0">
+            <a:pPr marL="0" indent="0">
               <a:buNone/>
             </a:pPr>
             <a:r>
@@ -18285,7 +18274,7 @@
       </p:sp>
       <p:sp>
         <p:nvSpPr>
-          <p:cNvPr id="25" name="Slide Number Placeholder 0"/>
+          <p:cNvPr id="30" name="Slide Number Placeholder 0"/>
           <p:cNvSpPr>
             <a:spLocks noGrp="1"/>
           </p:cNvSpPr>
@@ -18303,7 +18292,7 @@
           </a:prstGeom>
           <a:extLst>
             <a:ext uri="{C572A759-6A51-4108-AA02-DFA0A04FC94B}">
-              <ma14:wrappingTextBoxFlag xmlns:ma14="http://schemas.microsoft.com/office/mac/drawingml/2011/main" val="0"/>
+              <ma14:wrappingTextBoxFlag xmlns:ma14="http://schemas.microsoft.com/office/mac/drawingml/2011/main" xmlns="" val="0"/>
             </a:ext>
           </a:extLst>
         </p:spPr>
@@ -18324,7 +18313,7 @@
           <a:p>
             <a:pPr algn="l"/>
             <a:fld id="{F7021451-1387-4CA6-816F-3879F97B5CBC}" type="slidenum">
-              <a:rPr b="0" lang="en-US"/>
+              <a:rPr lang="en-US" b="0"/>
               <a:t>22</a:t>
             </a:fld>
             <a:endParaRPr lang="en-US"/>
@@ -18347,6 +18336,7 @@
         <a:solidFill>
           <a:srgbClr val="FFFFFF"/>
         </a:solidFill>
+        <a:effectLst/>
       </p:bgPr>
     </p:bg>
     <p:spTree>
@@ -18384,7 +18374,7 @@
           <a:bodyPr wrap="square" lIns="0" tIns="0" rIns="0" bIns="0" rtlCol="0" anchor="ctr"/>
           <a:lstStyle/>
           <a:p>
-            <a:pPr indent="0" marL="0">
+            <a:pPr marL="0" indent="0">
               <a:buNone/>
             </a:pPr>
             <a:r>
@@ -18425,7 +18415,7 @@
           </a:bodyPr>
           <a:lstStyle/>
           <a:p>
-            <a:pPr indent="0" marL="0">
+            <a:pPr marL="0" indent="0">
               <a:buNone/>
             </a:pPr>
             <a:r>
@@ -18468,15 +18458,15 @@
       </p:sp>
       <p:pic>
         <p:nvPicPr>
-          <p:cNvPr id="5" name="Image 0" descr="D:\CRM\crystal-ball-insights\ai-portfolio-research\report\figures\efficient_frontier.png">    </p:cNvPr>
+          <p:cNvPr id="5" name="Image 0" descr="D:\CRM\crystal-ball-insights\ai-portfolio-research\report\figures\efficient_frontier.png"/>
           <p:cNvPicPr>
             <a:picLocks noChangeAspect="1"/>
           </p:cNvPicPr>
           <p:nvPr/>
         </p:nvPicPr>
         <p:blipFill>
-          <a:blip r:embed="rId1"/>
-          <a:srcRect l="0" r="0" t="0" b="0"/>
+          <a:blip r:embed="rId3"/>
+          <a:srcRect/>
           <a:stretch/>
         </p:blipFill>
         <p:spPr>
@@ -18617,7 +18607,7 @@
           </a:bodyPr>
           <a:lstStyle/>
           <a:p>
-            <a:pPr indent="0" marL="0">
+            <a:pPr marL="0" indent="0">
               <a:buNone/>
             </a:pPr>
             <a:r>
@@ -18654,11 +18644,11 @@
         </p:spPr>
         <p:txBody>
           <a:bodyPr wrap="square" lIns="381" tIns="381" rIns="381" bIns="381" rtlCol="0" anchor="t">
-            <a:normAutofit/>
+            <a:normAutofit fontScale="92500"/>
           </a:bodyPr>
           <a:lstStyle/>
           <a:p>
-            <a:pPr indent="0" marL="0">
+            <a:pPr marL="0" indent="0">
               <a:buNone/>
             </a:pPr>
             <a:r>
@@ -18699,7 +18689,7 @@
           </a:bodyPr>
           <a:lstStyle/>
           <a:p>
-            <a:pPr indent="0" marL="0">
+            <a:pPr marL="0" indent="0">
               <a:buNone/>
             </a:pPr>
             <a:r>
@@ -18737,7 +18727,7 @@
           </a:prstGeom>
           <a:extLst>
             <a:ext uri="{C572A759-6A51-4108-AA02-DFA0A04FC94B}">
-              <ma14:wrappingTextBoxFlag xmlns:ma14="http://schemas.microsoft.com/office/mac/drawingml/2011/main" val="0"/>
+              <ma14:wrappingTextBoxFlag xmlns:ma14="http://schemas.microsoft.com/office/mac/drawingml/2011/main" xmlns="" val="0"/>
             </a:ext>
           </a:extLst>
         </p:spPr>
@@ -18758,7 +18748,7 @@
           <a:p>
             <a:pPr algn="l"/>
             <a:fld id="{F7021451-1387-4CA6-816F-3879F97B5CBC}" type="slidenum">
-              <a:rPr b="0" lang="en-US"/>
+              <a:rPr lang="en-US" b="0"/>
               <a:t>23</a:t>
             </a:fld>
             <a:endParaRPr lang="en-US"/>
@@ -18781,6 +18771,7 @@
         <a:solidFill>
           <a:srgbClr val="FFFFFF"/>
         </a:solidFill>
+        <a:effectLst/>
       </p:bgPr>
     </p:bg>
     <p:spTree>
@@ -18818,7 +18809,7 @@
           <a:bodyPr wrap="square" lIns="0" tIns="0" rIns="0" bIns="0" rtlCol="0" anchor="ctr"/>
           <a:lstStyle/>
           <a:p>
-            <a:pPr indent="0" marL="0">
+            <a:pPr marL="0" indent="0">
               <a:buNone/>
             </a:pPr>
             <a:r>
@@ -18859,7 +18850,7 @@
           </a:bodyPr>
           <a:lstStyle/>
           <a:p>
-            <a:pPr indent="0" marL="0">
+            <a:pPr marL="0" indent="0">
               <a:buNone/>
             </a:pPr>
             <a:r>
@@ -18948,7 +18939,7 @@
           </a:bodyPr>
           <a:lstStyle/>
           <a:p>
-            <a:pPr indent="0" marL="0">
+            <a:pPr marL="0" indent="0">
               <a:buNone/>
             </a:pPr>
             <a:r>
@@ -18989,7 +18980,7 @@
           </a:bodyPr>
           <a:lstStyle/>
           <a:p>
-            <a:pPr indent="0" marL="0">
+            <a:pPr marL="0" indent="0">
               <a:buNone/>
             </a:pPr>
             <a:r>
@@ -19006,7 +18997,7 @@
             <a:endParaRPr lang="en-US" sz="1180" dirty="0"/>
           </a:p>
           <a:p>
-            <a:pPr indent="0" marL="0">
+            <a:pPr marL="0" indent="0">
               <a:buNone/>
             </a:pPr>
             <a:r>
@@ -19072,7 +19063,7 @@
           </a:bodyPr>
           <a:lstStyle/>
           <a:p>
-            <a:pPr indent="0" marL="0">
+            <a:pPr marL="0" indent="0">
               <a:buNone/>
             </a:pPr>
             <a:r>
@@ -19089,7 +19080,7 @@
             <a:endParaRPr lang="en-US" sz="1330" dirty="0"/>
           </a:p>
           <a:p>
-            <a:pPr indent="0" marL="0">
+            <a:pPr marL="0" indent="0">
               <a:buNone/>
             </a:pPr>
             <a:r>
@@ -19106,7 +19097,7 @@
             <a:endParaRPr lang="en-US" sz="1330" dirty="0"/>
           </a:p>
           <a:p>
-            <a:pPr indent="0" marL="0">
+            <a:pPr marL="0" indent="0">
               <a:buNone/>
             </a:pPr>
             <a:r>
@@ -19172,7 +19163,7 @@
           </a:bodyPr>
           <a:lstStyle/>
           <a:p>
-            <a:pPr indent="0" marL="0">
+            <a:pPr marL="0" indent="0">
               <a:buNone/>
             </a:pPr>
             <a:r>
@@ -19213,7 +19204,7 @@
           </a:bodyPr>
           <a:lstStyle/>
           <a:p>
-            <a:pPr indent="0" marL="0">
+            <a:pPr marL="0" indent="0">
               <a:buNone/>
             </a:pPr>
             <a:r>
@@ -19279,7 +19270,7 @@
           </a:bodyPr>
           <a:lstStyle/>
           <a:p>
-            <a:pPr indent="0" marL="0">
+            <a:pPr marL="0" indent="0">
               <a:buNone/>
             </a:pPr>
             <a:r>
@@ -19320,7 +19311,7 @@
           </a:bodyPr>
           <a:lstStyle/>
           <a:p>
-            <a:pPr indent="0" marL="0">
+            <a:pPr marL="0" indent="0">
               <a:buNone/>
             </a:pPr>
             <a:r>
@@ -19386,7 +19377,7 @@
           </a:bodyPr>
           <a:lstStyle/>
           <a:p>
-            <a:pPr indent="0" marL="0">
+            <a:pPr marL="0" indent="0">
               <a:buNone/>
             </a:pPr>
             <a:r>
@@ -19427,7 +19418,7 @@
           </a:bodyPr>
           <a:lstStyle/>
           <a:p>
-            <a:pPr indent="0" marL="0">
+            <a:pPr marL="0" indent="0">
               <a:buNone/>
             </a:pPr>
             <a:r>
@@ -19493,7 +19484,7 @@
           </a:bodyPr>
           <a:lstStyle/>
           <a:p>
-            <a:pPr indent="0" marL="0">
+            <a:pPr marL="0" indent="0">
               <a:buNone/>
             </a:pPr>
             <a:r>
@@ -19534,7 +19525,7 @@
           </a:bodyPr>
           <a:lstStyle/>
           <a:p>
-            <a:pPr indent="0" marL="0">
+            <a:pPr marL="0" indent="0">
               <a:buNone/>
             </a:pPr>
             <a:r>
@@ -19600,7 +19591,7 @@
           </a:bodyPr>
           <a:lstStyle/>
           <a:p>
-            <a:pPr indent="0" marL="0">
+            <a:pPr marL="0" indent="0">
               <a:buNone/>
             </a:pPr>
             <a:r>
@@ -19641,7 +19632,7 @@
           </a:bodyPr>
           <a:lstStyle/>
           <a:p>
-            <a:pPr indent="0" marL="0">
+            <a:pPr marL="0" indent="0">
               <a:buNone/>
             </a:pPr>
             <a:r>
@@ -19707,7 +19698,7 @@
           </a:bodyPr>
           <a:lstStyle/>
           <a:p>
-            <a:pPr indent="0" marL="0">
+            <a:pPr marL="0" indent="0">
               <a:buNone/>
             </a:pPr>
             <a:r>
@@ -19744,11 +19735,11 @@
         </p:spPr>
         <p:txBody>
           <a:bodyPr wrap="square" lIns="381" tIns="381" rIns="381" bIns="381" rtlCol="0" anchor="t">
-            <a:normAutofit/>
+            <a:normAutofit fontScale="92500"/>
           </a:bodyPr>
           <a:lstStyle/>
           <a:p>
-            <a:pPr indent="0" marL="0">
+            <a:pPr marL="0" indent="0">
               <a:buNone/>
             </a:pPr>
             <a:r>
@@ -19768,7 +19759,7 @@
       </p:sp>
       <p:sp>
         <p:nvSpPr>
-          <p:cNvPr id="25" name="Slide Number Placeholder 0"/>
+          <p:cNvPr id="28" name="Slide Number Placeholder 0"/>
           <p:cNvSpPr>
             <a:spLocks noGrp="1"/>
           </p:cNvSpPr>
@@ -19786,7 +19777,7 @@
           </a:prstGeom>
           <a:extLst>
             <a:ext uri="{C572A759-6A51-4108-AA02-DFA0A04FC94B}">
-              <ma14:wrappingTextBoxFlag xmlns:ma14="http://schemas.microsoft.com/office/mac/drawingml/2011/main" val="0"/>
+              <ma14:wrappingTextBoxFlag xmlns:ma14="http://schemas.microsoft.com/office/mac/drawingml/2011/main" xmlns="" val="0"/>
             </a:ext>
           </a:extLst>
         </p:spPr>
@@ -19807,7 +19798,7 @@
           <a:p>
             <a:pPr algn="l"/>
             <a:fld id="{F7021451-1387-4CA6-816F-3879F97B5CBC}" type="slidenum">
-              <a:rPr b="0" lang="en-US"/>
+              <a:rPr lang="en-US" b="0"/>
               <a:t>24</a:t>
             </a:fld>
             <a:endParaRPr lang="en-US"/>
@@ -19830,6 +19821,7 @@
         <a:solidFill>
           <a:srgbClr val="FFFFFF"/>
         </a:solidFill>
+        <a:effectLst/>
       </p:bgPr>
     </p:bg>
     <p:spTree>
@@ -19867,7 +19859,7 @@
           <a:bodyPr wrap="square" lIns="0" tIns="0" rIns="0" bIns="0" rtlCol="0" anchor="ctr"/>
           <a:lstStyle/>
           <a:p>
-            <a:pPr indent="0" marL="0">
+            <a:pPr marL="0" indent="0">
               <a:buNone/>
             </a:pPr>
             <a:r>
@@ -19908,7 +19900,7 @@
           </a:bodyPr>
           <a:lstStyle/>
           <a:p>
-            <a:pPr indent="0" marL="0">
+            <a:pPr marL="0" indent="0">
               <a:buNone/>
             </a:pPr>
             <a:r>
@@ -19951,15 +19943,15 @@
       </p:sp>
       <p:pic>
         <p:nvPicPr>
-          <p:cNvPr id="5" name="Image 0" descr="D:\CRM\crystal-ball-insights\results\image.png">    </p:cNvPr>
+          <p:cNvPr id="5" name="Image 0" descr="D:\CRM\crystal-ball-insights\results\image.png"/>
           <p:cNvPicPr>
             <a:picLocks noChangeAspect="1"/>
           </p:cNvPicPr>
           <p:nvPr/>
         </p:nvPicPr>
         <p:blipFill>
-          <a:blip r:embed="rId1"/>
-          <a:srcRect l="0" r="0" t="0" b="0"/>
+          <a:blip r:embed="rId3"/>
+          <a:srcRect/>
           <a:stretch/>
         </p:blipFill>
         <p:spPr>
@@ -19995,9 +19987,27 @@
             <a:tbl>
               <a:tblPr/>
               <a:tblGrid>
-                <a:gridCol w="960120"/>
-                <a:gridCol w="1234440"/>
-                <a:gridCol w="3611880"/>
+                <a:gridCol w="960120">
+                  <a:extLst>
+                    <a:ext uri="{9D8B030D-6E8A-4147-A177-3AD203B41FA5}">
+                      <a16:colId xmlns:a16="http://schemas.microsoft.com/office/drawing/2014/main" val="20000"/>
+                    </a:ext>
+                  </a:extLst>
+                </a:gridCol>
+                <a:gridCol w="1234440">
+                  <a:extLst>
+                    <a:ext uri="{9D8B030D-6E8A-4147-A177-3AD203B41FA5}">
+                      <a16:colId xmlns:a16="http://schemas.microsoft.com/office/drawing/2014/main" val="20001"/>
+                    </a:ext>
+                  </a:extLst>
+                </a:gridCol>
+                <a:gridCol w="3611880">
+                  <a:extLst>
+                    <a:ext uri="{9D8B030D-6E8A-4147-A177-3AD203B41FA5}">
+                      <a16:colId xmlns:a16="http://schemas.microsoft.com/office/drawing/2014/main" val="20002"/>
+                    </a:ext>
+                  </a:extLst>
+                </a:gridCol>
               </a:tblGrid>
               <a:tr h="485775">
                 <a:tc>
@@ -20005,7 +20015,7 @@
                     <a:bodyPr/>
                     <a:lstStyle/>
                     <a:p>
-                      <a:pPr indent="0" marL="0">
+                      <a:pPr marL="0" indent="0">
                         <a:buNone/>
                       </a:pPr>
                       <a:r>
@@ -20026,7 +20036,7 @@
                       </a:endParaRPr>
                     </a:p>
                   </a:txBody>
-                  <a:tcPr marL="45720" marR="45720" marT="45720" marB="45720" anchor="mid">
+                  <a:tcPr marL="45720" marR="45720">
                     <a:lnL w="8255" cap="flat" cmpd="sng" algn="ctr">
                       <a:solidFill>
                         <a:srgbClr val="D0D5DD"/>
@@ -20070,7 +20080,7 @@
                     <a:bodyPr/>
                     <a:lstStyle/>
                     <a:p>
-                      <a:pPr indent="0" marL="0">
+                      <a:pPr marL="0" indent="0">
                         <a:buNone/>
                       </a:pPr>
                       <a:r>
@@ -20091,7 +20101,7 @@
                       </a:endParaRPr>
                     </a:p>
                   </a:txBody>
-                  <a:tcPr marL="45720" marR="45720" marT="45720" marB="45720" anchor="mid">
+                  <a:tcPr marL="45720" marR="45720">
                     <a:lnL w="8255" cap="flat" cmpd="sng" algn="ctr">
                       <a:solidFill>
                         <a:srgbClr val="D0D5DD"/>
@@ -20135,7 +20145,7 @@
                     <a:bodyPr/>
                     <a:lstStyle/>
                     <a:p>
-                      <a:pPr indent="0" marL="0">
+                      <a:pPr marL="0" indent="0">
                         <a:buNone/>
                       </a:pPr>
                       <a:r>
@@ -20156,7 +20166,7 @@
                       </a:endParaRPr>
                     </a:p>
                   </a:txBody>
-                  <a:tcPr marL="45720" marR="45720" marT="45720" marB="45720" anchor="mid">
+                  <a:tcPr marL="45720" marR="45720">
                     <a:lnL w="8255" cap="flat" cmpd="sng" algn="ctr">
                       <a:solidFill>
                         <a:srgbClr val="D0D5DD"/>
@@ -20195,6 +20205,11 @@
                     </a:lnB>
                   </a:tcPr>
                 </a:tc>
+                <a:extLst>
+                  <a:ext uri="{0D108BD9-81ED-4DB2-BD59-A6C34878D82A}">
+                    <a16:rowId xmlns:a16="http://schemas.microsoft.com/office/drawing/2014/main" val="10000"/>
+                  </a:ext>
+                </a:extLst>
               </a:tr>
               <a:tr h="485775">
                 <a:tc>
@@ -20202,7 +20217,7 @@
                     <a:bodyPr/>
                     <a:lstStyle/>
                     <a:p>
-                      <a:pPr indent="0" marL="0">
+                      <a:pPr marL="0" indent="0">
                         <a:buNone/>
                       </a:pPr>
                       <a:r>
@@ -20223,7 +20238,7 @@
                       </a:endParaRPr>
                     </a:p>
                   </a:txBody>
-                  <a:tcPr marL="45720" marR="45720" marT="45720" marB="45720" anchor="mid">
+                  <a:tcPr marL="45720" marR="45720">
                     <a:lnL w="8255" cap="flat" cmpd="sng" algn="ctr">
                       <a:solidFill>
                         <a:srgbClr val="D0D5DD"/>
@@ -20267,7 +20282,7 @@
                     <a:bodyPr/>
                     <a:lstStyle/>
                     <a:p>
-                      <a:pPr indent="0" marL="0">
+                      <a:pPr marL="0" indent="0">
                         <a:buNone/>
                       </a:pPr>
                       <a:r>
@@ -20288,7 +20303,7 @@
                       </a:endParaRPr>
                     </a:p>
                   </a:txBody>
-                  <a:tcPr marL="45720" marR="45720" marT="45720" marB="45720" anchor="mid">
+                  <a:tcPr marL="45720" marR="45720">
                     <a:lnL w="8255" cap="flat" cmpd="sng" algn="ctr">
                       <a:solidFill>
                         <a:srgbClr val="D0D5DD"/>
@@ -20332,7 +20347,7 @@
                     <a:bodyPr/>
                     <a:lstStyle/>
                     <a:p>
-                      <a:pPr indent="0" marL="0">
+                      <a:pPr marL="0" indent="0">
                         <a:buNone/>
                       </a:pPr>
                       <a:r>
@@ -20353,7 +20368,7 @@
                       </a:endParaRPr>
                     </a:p>
                   </a:txBody>
-                  <a:tcPr marL="45720" marR="45720" marT="45720" marB="45720" anchor="mid">
+                  <a:tcPr marL="45720" marR="45720">
                     <a:lnL w="8255" cap="flat" cmpd="sng" algn="ctr">
                       <a:solidFill>
                         <a:srgbClr val="D0D5DD"/>
@@ -20392,6 +20407,11 @@
                     </a:lnB>
                   </a:tcPr>
                 </a:tc>
+                <a:extLst>
+                  <a:ext uri="{0D108BD9-81ED-4DB2-BD59-A6C34878D82A}">
+                    <a16:rowId xmlns:a16="http://schemas.microsoft.com/office/drawing/2014/main" val="10001"/>
+                  </a:ext>
+                </a:extLst>
               </a:tr>
               <a:tr h="485775">
                 <a:tc>
@@ -20399,7 +20419,7 @@
                     <a:bodyPr/>
                     <a:lstStyle/>
                     <a:p>
-                      <a:pPr indent="0" marL="0">
+                      <a:pPr marL="0" indent="0">
                         <a:buNone/>
                       </a:pPr>
                       <a:r>
@@ -20420,7 +20440,7 @@
                       </a:endParaRPr>
                     </a:p>
                   </a:txBody>
-                  <a:tcPr marL="45720" marR="45720" marT="45720" marB="45720" anchor="mid">
+                  <a:tcPr marL="45720" marR="45720">
                     <a:lnL w="8255" cap="flat" cmpd="sng" algn="ctr">
                       <a:solidFill>
                         <a:srgbClr val="D0D5DD"/>
@@ -20464,7 +20484,7 @@
                     <a:bodyPr/>
                     <a:lstStyle/>
                     <a:p>
-                      <a:pPr indent="0" marL="0">
+                      <a:pPr marL="0" indent="0">
                         <a:buNone/>
                       </a:pPr>
                       <a:r>
@@ -20485,7 +20505,7 @@
                       </a:endParaRPr>
                     </a:p>
                   </a:txBody>
-                  <a:tcPr marL="45720" marR="45720" marT="45720" marB="45720" anchor="mid">
+                  <a:tcPr marL="45720" marR="45720">
                     <a:lnL w="8255" cap="flat" cmpd="sng" algn="ctr">
                       <a:solidFill>
                         <a:srgbClr val="D0D5DD"/>
@@ -20529,7 +20549,7 @@
                     <a:bodyPr/>
                     <a:lstStyle/>
                     <a:p>
-                      <a:pPr indent="0" marL="0">
+                      <a:pPr marL="0" indent="0">
                         <a:buNone/>
                       </a:pPr>
                       <a:r>
@@ -20550,7 +20570,7 @@
                       </a:endParaRPr>
                     </a:p>
                   </a:txBody>
-                  <a:tcPr marL="45720" marR="45720" marT="45720" marB="45720" anchor="mid">
+                  <a:tcPr marL="45720" marR="45720">
                     <a:lnL w="8255" cap="flat" cmpd="sng" algn="ctr">
                       <a:solidFill>
                         <a:srgbClr val="D0D5DD"/>
@@ -20589,6 +20609,11 @@
                     </a:lnB>
                   </a:tcPr>
                 </a:tc>
+                <a:extLst>
+                  <a:ext uri="{0D108BD9-81ED-4DB2-BD59-A6C34878D82A}">
+                    <a16:rowId xmlns:a16="http://schemas.microsoft.com/office/drawing/2014/main" val="10002"/>
+                  </a:ext>
+                </a:extLst>
               </a:tr>
               <a:tr h="485775">
                 <a:tc>
@@ -20596,7 +20621,7 @@
                     <a:bodyPr/>
                     <a:lstStyle/>
                     <a:p>
-                      <a:pPr indent="0" marL="0">
+                      <a:pPr marL="0" indent="0">
                         <a:buNone/>
                       </a:pPr>
                       <a:r>
@@ -20617,7 +20642,7 @@
                       </a:endParaRPr>
                     </a:p>
                   </a:txBody>
-                  <a:tcPr marL="45720" marR="45720" marT="45720" marB="45720" anchor="mid">
+                  <a:tcPr marL="45720" marR="45720">
                     <a:lnL w="8255" cap="flat" cmpd="sng" algn="ctr">
                       <a:solidFill>
                         <a:srgbClr val="D0D5DD"/>
@@ -20661,7 +20686,7 @@
                     <a:bodyPr/>
                     <a:lstStyle/>
                     <a:p>
-                      <a:pPr indent="0" marL="0">
+                      <a:pPr marL="0" indent="0">
                         <a:buNone/>
                       </a:pPr>
                       <a:r>
@@ -20682,7 +20707,7 @@
                       </a:endParaRPr>
                     </a:p>
                   </a:txBody>
-                  <a:tcPr marL="45720" marR="45720" marT="45720" marB="45720" anchor="mid">
+                  <a:tcPr marL="45720" marR="45720">
                     <a:lnL w="8255" cap="flat" cmpd="sng" algn="ctr">
                       <a:solidFill>
                         <a:srgbClr val="D0D5DD"/>
@@ -20726,7 +20751,7 @@
                     <a:bodyPr/>
                     <a:lstStyle/>
                     <a:p>
-                      <a:pPr indent="0" marL="0">
+                      <a:pPr marL="0" indent="0">
                         <a:buNone/>
                       </a:pPr>
                       <a:r>
@@ -20747,7 +20772,7 @@
                       </a:endParaRPr>
                     </a:p>
                   </a:txBody>
-                  <a:tcPr marL="45720" marR="45720" marT="45720" marB="45720" anchor="mid">
+                  <a:tcPr marL="45720" marR="45720">
                     <a:lnL w="8255" cap="flat" cmpd="sng" algn="ctr">
                       <a:solidFill>
                         <a:srgbClr val="D0D5DD"/>
@@ -20786,6 +20811,11 @@
                     </a:lnB>
                   </a:tcPr>
                 </a:tc>
+                <a:extLst>
+                  <a:ext uri="{0D108BD9-81ED-4DB2-BD59-A6C34878D82A}">
+                    <a16:rowId xmlns:a16="http://schemas.microsoft.com/office/drawing/2014/main" val="10003"/>
+                  </a:ext>
+                </a:extLst>
               </a:tr>
               <a:tr h="485775">
                 <a:tc>
@@ -20793,7 +20823,7 @@
                     <a:bodyPr/>
                     <a:lstStyle/>
                     <a:p>
-                      <a:pPr indent="0" marL="0">
+                      <a:pPr marL="0" indent="0">
                         <a:buNone/>
                       </a:pPr>
                       <a:r>
@@ -20814,7 +20844,7 @@
                       </a:endParaRPr>
                     </a:p>
                   </a:txBody>
-                  <a:tcPr marL="45720" marR="45720" marT="45720" marB="45720" anchor="mid">
+                  <a:tcPr marL="45720" marR="45720">
                     <a:lnL w="8255" cap="flat" cmpd="sng" algn="ctr">
                       <a:solidFill>
                         <a:srgbClr val="D0D5DD"/>
@@ -20858,7 +20888,7 @@
                     <a:bodyPr/>
                     <a:lstStyle/>
                     <a:p>
-                      <a:pPr indent="0" marL="0">
+                      <a:pPr marL="0" indent="0">
                         <a:buNone/>
                       </a:pPr>
                       <a:r>
@@ -20879,7 +20909,7 @@
                       </a:endParaRPr>
                     </a:p>
                   </a:txBody>
-                  <a:tcPr marL="45720" marR="45720" marT="45720" marB="45720" anchor="mid">
+                  <a:tcPr marL="45720" marR="45720">
                     <a:lnL w="8255" cap="flat" cmpd="sng" algn="ctr">
                       <a:solidFill>
                         <a:srgbClr val="D0D5DD"/>
@@ -20923,7 +20953,7 @@
                     <a:bodyPr/>
                     <a:lstStyle/>
                     <a:p>
-                      <a:pPr indent="0" marL="0">
+                      <a:pPr marL="0" indent="0">
                         <a:buNone/>
                       </a:pPr>
                       <a:r>
@@ -20944,7 +20974,7 @@
                       </a:endParaRPr>
                     </a:p>
                   </a:txBody>
-                  <a:tcPr marL="45720" marR="45720" marT="45720" marB="45720" anchor="mid">
+                  <a:tcPr marL="45720" marR="45720">
                     <a:lnL w="8255" cap="flat" cmpd="sng" algn="ctr">
                       <a:solidFill>
                         <a:srgbClr val="D0D5DD"/>
@@ -20983,6 +21013,11 @@
                     </a:lnB>
                   </a:tcPr>
                 </a:tc>
+                <a:extLst>
+                  <a:ext uri="{0D108BD9-81ED-4DB2-BD59-A6C34878D82A}">
+                    <a16:rowId xmlns:a16="http://schemas.microsoft.com/office/drawing/2014/main" val="10004"/>
+                  </a:ext>
+                </a:extLst>
               </a:tr>
               <a:tr h="485775">
                 <a:tc>
@@ -20990,7 +21025,7 @@
                     <a:bodyPr/>
                     <a:lstStyle/>
                     <a:p>
-                      <a:pPr indent="0" marL="0">
+                      <a:pPr marL="0" indent="0">
                         <a:buNone/>
                       </a:pPr>
                       <a:r>
@@ -21011,7 +21046,7 @@
                       </a:endParaRPr>
                     </a:p>
                   </a:txBody>
-                  <a:tcPr marL="45720" marR="45720" marT="45720" marB="45720" anchor="mid">
+                  <a:tcPr marL="45720" marR="45720">
                     <a:lnL w="8255" cap="flat" cmpd="sng" algn="ctr">
                       <a:solidFill>
                         <a:srgbClr val="D0D5DD"/>
@@ -21055,7 +21090,7 @@
                     <a:bodyPr/>
                     <a:lstStyle/>
                     <a:p>
-                      <a:pPr indent="0" marL="0">
+                      <a:pPr marL="0" indent="0">
                         <a:buNone/>
                       </a:pPr>
                       <a:r>
@@ -21076,7 +21111,7 @@
                       </a:endParaRPr>
                     </a:p>
                   </a:txBody>
-                  <a:tcPr marL="45720" marR="45720" marT="45720" marB="45720" anchor="mid">
+                  <a:tcPr marL="45720" marR="45720">
                     <a:lnL w="8255" cap="flat" cmpd="sng" algn="ctr">
                       <a:solidFill>
                         <a:srgbClr val="D0D5DD"/>
@@ -21120,7 +21155,7 @@
                     <a:bodyPr/>
                     <a:lstStyle/>
                     <a:p>
-                      <a:pPr indent="0" marL="0">
+                      <a:pPr marL="0" indent="0">
                         <a:buNone/>
                       </a:pPr>
                       <a:r>
@@ -21141,7 +21176,7 @@
                       </a:endParaRPr>
                     </a:p>
                   </a:txBody>
-                  <a:tcPr marL="45720" marR="45720" marT="45720" marB="45720" anchor="mid">
+                  <a:tcPr marL="45720" marR="45720">
                     <a:lnL w="8255" cap="flat" cmpd="sng" algn="ctr">
                       <a:solidFill>
                         <a:srgbClr val="D0D5DD"/>
@@ -21180,6 +21215,11 @@
                     </a:lnB>
                   </a:tcPr>
                 </a:tc>
+                <a:extLst>
+                  <a:ext uri="{0D108BD9-81ED-4DB2-BD59-A6C34878D82A}">
+                    <a16:rowId xmlns:a16="http://schemas.microsoft.com/office/drawing/2014/main" val="10005"/>
+                  </a:ext>
+                </a:extLst>
               </a:tr>
               <a:tr h="485775">
                 <a:tc>
@@ -21187,7 +21227,7 @@
                     <a:bodyPr/>
                     <a:lstStyle/>
                     <a:p>
-                      <a:pPr indent="0" marL="0">
+                      <a:pPr marL="0" indent="0">
                         <a:buNone/>
                       </a:pPr>
                       <a:r>
@@ -21208,7 +21248,7 @@
                       </a:endParaRPr>
                     </a:p>
                   </a:txBody>
-                  <a:tcPr marL="45720" marR="45720" marT="45720" marB="45720" anchor="mid">
+                  <a:tcPr marL="45720" marR="45720">
                     <a:lnL w="8255" cap="flat" cmpd="sng" algn="ctr">
                       <a:solidFill>
                         <a:srgbClr val="D0D5DD"/>
@@ -21252,7 +21292,7 @@
                     <a:bodyPr/>
                     <a:lstStyle/>
                     <a:p>
-                      <a:pPr indent="0" marL="0">
+                      <a:pPr marL="0" indent="0">
                         <a:buNone/>
                       </a:pPr>
                       <a:r>
@@ -21273,7 +21313,7 @@
                       </a:endParaRPr>
                     </a:p>
                   </a:txBody>
-                  <a:tcPr marL="45720" marR="45720" marT="45720" marB="45720" anchor="mid">
+                  <a:tcPr marL="45720" marR="45720">
                     <a:lnL w="8255" cap="flat" cmpd="sng" algn="ctr">
                       <a:solidFill>
                         <a:srgbClr val="D0D5DD"/>
@@ -21317,7 +21357,7 @@
                     <a:bodyPr/>
                     <a:lstStyle/>
                     <a:p>
-                      <a:pPr indent="0" marL="0">
+                      <a:pPr marL="0" indent="0">
                         <a:buNone/>
                       </a:pPr>
                       <a:r>
@@ -21338,7 +21378,7 @@
                       </a:endParaRPr>
                     </a:p>
                   </a:txBody>
-                  <a:tcPr marL="45720" marR="45720" marT="45720" marB="45720" anchor="mid">
+                  <a:tcPr marL="45720" marR="45720">
                     <a:lnL w="8255" cap="flat" cmpd="sng" algn="ctr">
                       <a:solidFill>
                         <a:srgbClr val="D0D5DD"/>
@@ -21377,6 +21417,11 @@
                     </a:lnB>
                   </a:tcPr>
                 </a:tc>
+                <a:extLst>
+                  <a:ext uri="{0D108BD9-81ED-4DB2-BD59-A6C34878D82A}">
+                    <a16:rowId xmlns:a16="http://schemas.microsoft.com/office/drawing/2014/main" val="10006"/>
+                  </a:ext>
+                </a:extLst>
               </a:tr>
               <a:tr h="485775">
                 <a:tc>
@@ -21384,7 +21429,7 @@
                     <a:bodyPr/>
                     <a:lstStyle/>
                     <a:p>
-                      <a:pPr indent="0" marL="0">
+                      <a:pPr marL="0" indent="0">
                         <a:buNone/>
                       </a:pPr>
                       <a:r>
@@ -21405,7 +21450,7 @@
                       </a:endParaRPr>
                     </a:p>
                   </a:txBody>
-                  <a:tcPr marL="45720" marR="45720" marT="45720" marB="45720" anchor="mid">
+                  <a:tcPr marL="45720" marR="45720">
                     <a:lnL w="8255" cap="flat" cmpd="sng" algn="ctr">
                       <a:solidFill>
                         <a:srgbClr val="D0D5DD"/>
@@ -21449,7 +21494,7 @@
                     <a:bodyPr/>
                     <a:lstStyle/>
                     <a:p>
-                      <a:pPr indent="0" marL="0">
+                      <a:pPr marL="0" indent="0">
                         <a:buNone/>
                       </a:pPr>
                       <a:r>
@@ -21470,7 +21515,7 @@
                       </a:endParaRPr>
                     </a:p>
                   </a:txBody>
-                  <a:tcPr marL="45720" marR="45720" marT="45720" marB="45720" anchor="mid">
+                  <a:tcPr marL="45720" marR="45720">
                     <a:lnL w="8255" cap="flat" cmpd="sng" algn="ctr">
                       <a:solidFill>
                         <a:srgbClr val="D0D5DD"/>
@@ -21514,7 +21559,7 @@
                     <a:bodyPr/>
                     <a:lstStyle/>
                     <a:p>
-                      <a:pPr indent="0" marL="0">
+                      <a:pPr marL="0" indent="0">
                         <a:buNone/>
                       </a:pPr>
                       <a:r>
@@ -21535,7 +21580,7 @@
                       </a:endParaRPr>
                     </a:p>
                   </a:txBody>
-                  <a:tcPr marL="45720" marR="45720" marT="45720" marB="45720" anchor="mid">
+                  <a:tcPr marL="45720" marR="45720">
                     <a:lnL w="8255" cap="flat" cmpd="sng" algn="ctr">
                       <a:solidFill>
                         <a:srgbClr val="D0D5DD"/>
@@ -21574,6 +21619,11 @@
                     </a:lnB>
                   </a:tcPr>
                 </a:tc>
+                <a:extLst>
+                  <a:ext uri="{0D108BD9-81ED-4DB2-BD59-A6C34878D82A}">
+                    <a16:rowId xmlns:a16="http://schemas.microsoft.com/office/drawing/2014/main" val="10007"/>
+                  </a:ext>
+                </a:extLst>
               </a:tr>
             </a:tbl>
           </a:graphicData>
@@ -21602,7 +21652,7 @@
           </a:bodyPr>
           <a:lstStyle/>
           <a:p>
-            <a:pPr algn="ctr" indent="0" marL="0">
+            <a:pPr marL="0" indent="0" algn="ctr">
               <a:buNone/>
             </a:pPr>
             <a:r>
@@ -21640,7 +21690,7 @@
           </a:prstGeom>
           <a:extLst>
             <a:ext uri="{C572A759-6A51-4108-AA02-DFA0A04FC94B}">
-              <ma14:wrappingTextBoxFlag xmlns:ma14="http://schemas.microsoft.com/office/mac/drawingml/2011/main" val="0"/>
+              <ma14:wrappingTextBoxFlag xmlns:ma14="http://schemas.microsoft.com/office/mac/drawingml/2011/main" xmlns="" val="0"/>
             </a:ext>
           </a:extLst>
         </p:spPr>
@@ -21661,7 +21711,7 @@
           <a:p>
             <a:pPr algn="l"/>
             <a:fld id="{F7021451-1387-4CA6-816F-3879F97B5CBC}" type="slidenum">
-              <a:rPr b="0" lang="en-US"/>
+              <a:rPr lang="en-US" b="0"/>
               <a:t>25</a:t>
             </a:fld>
             <a:endParaRPr lang="en-US"/>
@@ -21684,6 +21734,7 @@
         <a:solidFill>
           <a:srgbClr val="FFFFFF"/>
         </a:solidFill>
+        <a:effectLst/>
       </p:bgPr>
     </p:bg>
     <p:spTree>
@@ -21721,7 +21772,7 @@
           <a:bodyPr wrap="square" lIns="0" tIns="0" rIns="0" bIns="0" rtlCol="0" anchor="ctr"/>
           <a:lstStyle/>
           <a:p>
-            <a:pPr indent="0" marL="0">
+            <a:pPr marL="0" indent="0">
               <a:buNone/>
             </a:pPr>
             <a:r>
@@ -21762,7 +21813,7 @@
           </a:bodyPr>
           <a:lstStyle/>
           <a:p>
-            <a:pPr indent="0" marL="0">
+            <a:pPr marL="0" indent="0">
               <a:buNone/>
             </a:pPr>
             <a:r>
@@ -21851,7 +21902,7 @@
           </a:bodyPr>
           <a:lstStyle/>
           <a:p>
-            <a:pPr indent="0" marL="0">
+            <a:pPr marL="0" indent="0">
               <a:buNone/>
             </a:pPr>
             <a:r>
@@ -21892,7 +21943,7 @@
           </a:bodyPr>
           <a:lstStyle/>
           <a:p>
-            <a:pPr indent="0" marL="0">
+            <a:pPr marL="0" indent="0">
               <a:buNone/>
             </a:pPr>
             <a:r>
@@ -21958,7 +22009,7 @@
           </a:bodyPr>
           <a:lstStyle/>
           <a:p>
-            <a:pPr indent="0" marL="0">
+            <a:pPr marL="0" indent="0">
               <a:buNone/>
             </a:pPr>
             <a:r>
@@ -21999,7 +22050,7 @@
           </a:bodyPr>
           <a:lstStyle/>
           <a:p>
-            <a:pPr indent="0" marL="0">
+            <a:pPr marL="0" indent="0">
               <a:buNone/>
             </a:pPr>
             <a:r>
@@ -22065,7 +22116,7 @@
           </a:bodyPr>
           <a:lstStyle/>
           <a:p>
-            <a:pPr indent="0" marL="0">
+            <a:pPr marL="0" indent="0">
               <a:buNone/>
             </a:pPr>
             <a:r>
@@ -22106,7 +22157,7 @@
           </a:bodyPr>
           <a:lstStyle/>
           <a:p>
-            <a:pPr indent="0" marL="0">
+            <a:pPr marL="0" indent="0">
               <a:buNone/>
             </a:pPr>
             <a:r>
@@ -22224,7 +22275,7 @@
           </a:prstGeom>
           <a:extLst>
             <a:ext uri="{C572A759-6A51-4108-AA02-DFA0A04FC94B}">
-              <ma14:wrappingTextBoxFlag xmlns:ma14="http://schemas.microsoft.com/office/mac/drawingml/2011/main" val="0"/>
+              <ma14:wrappingTextBoxFlag xmlns:ma14="http://schemas.microsoft.com/office/mac/drawingml/2011/main" xmlns="" val="0"/>
             </a:ext>
           </a:extLst>
         </p:spPr>
@@ -22245,7 +22296,7 @@
           <a:p>
             <a:pPr algn="l"/>
             <a:fld id="{F7021451-1387-4CA6-816F-3879F97B5CBC}" type="slidenum">
-              <a:rPr b="0" lang="en-US"/>
+              <a:rPr lang="en-US" b="0"/>
               <a:t>26</a:t>
             </a:fld>
             <a:endParaRPr lang="en-US"/>
@@ -22268,6 +22319,7 @@
         <a:solidFill>
           <a:srgbClr val="FFFFFF"/>
         </a:solidFill>
+        <a:effectLst/>
       </p:bgPr>
     </p:bg>
     <p:spTree>
@@ -22305,7 +22357,7 @@
           <a:bodyPr wrap="square" lIns="0" tIns="0" rIns="0" bIns="0" rtlCol="0" anchor="ctr"/>
           <a:lstStyle/>
           <a:p>
-            <a:pPr indent="0" marL="0">
+            <a:pPr marL="0" indent="0">
               <a:buNone/>
             </a:pPr>
             <a:r>
@@ -22346,7 +22398,7 @@
           </a:bodyPr>
           <a:lstStyle/>
           <a:p>
-            <a:pPr indent="0" marL="0">
+            <a:pPr marL="0" indent="0">
               <a:buNone/>
             </a:pPr>
             <a:r>
@@ -22406,11 +22458,11 @@
         </p:spPr>
         <p:txBody>
           <a:bodyPr wrap="square" lIns="381" tIns="381" rIns="381" bIns="381" rtlCol="0" anchor="t">
-            <a:normAutofit/>
+            <a:normAutofit fontScale="77500" lnSpcReduction="20000"/>
           </a:bodyPr>
           <a:lstStyle/>
           <a:p>
-            <a:pPr algn="ctr" indent="0" marL="0">
+            <a:pPr marL="0" indent="0" algn="ctr">
               <a:buNone/>
             </a:pPr>
             <a:r>
@@ -22472,11 +22524,11 @@
         </p:spPr>
         <p:txBody>
           <a:bodyPr wrap="square" lIns="381" tIns="381" rIns="381" bIns="381" rtlCol="0" anchor="t">
-            <a:normAutofit/>
+            <a:normAutofit lnSpcReduction="10000"/>
           </a:bodyPr>
           <a:lstStyle/>
           <a:p>
-            <a:pPr algn="ctr" indent="0" marL="0">
+            <a:pPr marL="0" indent="0" algn="ctr">
               <a:buNone/>
             </a:pPr>
             <a:r>
@@ -22517,7 +22569,7 @@
           </a:bodyPr>
           <a:lstStyle/>
           <a:p>
-            <a:pPr algn="ctr" indent="0" marL="0">
+            <a:pPr marL="0" indent="0" algn="ctr">
               <a:buNone/>
             </a:pPr>
             <a:r>
@@ -22558,7 +22610,7 @@
           </a:bodyPr>
           <a:lstStyle/>
           <a:p>
-            <a:pPr algn="ctr" indent="0" marL="0">
+            <a:pPr marL="0" indent="0" algn="ctr">
               <a:buNone/>
             </a:pPr>
             <a:r>
@@ -22620,11 +22672,11 @@
         </p:spPr>
         <p:txBody>
           <a:bodyPr wrap="square" lIns="381" tIns="381" rIns="381" bIns="381" rtlCol="0" anchor="t">
-            <a:normAutofit/>
+            <a:normAutofit lnSpcReduction="10000"/>
           </a:bodyPr>
           <a:lstStyle/>
           <a:p>
-            <a:pPr algn="ctr" indent="0" marL="0">
+            <a:pPr marL="0" indent="0" algn="ctr">
               <a:buNone/>
             </a:pPr>
             <a:r>
@@ -22665,7 +22717,7 @@
           </a:bodyPr>
           <a:lstStyle/>
           <a:p>
-            <a:pPr algn="ctr" indent="0" marL="0">
+            <a:pPr marL="0" indent="0" algn="ctr">
               <a:buNone/>
             </a:pPr>
             <a:r>
@@ -22706,7 +22758,7 @@
           </a:bodyPr>
           <a:lstStyle/>
           <a:p>
-            <a:pPr algn="ctr" indent="0" marL="0">
+            <a:pPr marL="0" indent="0" algn="ctr">
               <a:buNone/>
             </a:pPr>
             <a:r>
@@ -22768,11 +22820,11 @@
         </p:spPr>
         <p:txBody>
           <a:bodyPr wrap="square" lIns="381" tIns="381" rIns="381" bIns="381" rtlCol="0" anchor="t">
-            <a:normAutofit/>
+            <a:normAutofit lnSpcReduction="10000"/>
           </a:bodyPr>
           <a:lstStyle/>
           <a:p>
-            <a:pPr algn="ctr" indent="0" marL="0">
+            <a:pPr marL="0" indent="0" algn="ctr">
               <a:buNone/>
             </a:pPr>
             <a:r>
@@ -22813,7 +22865,7 @@
           </a:bodyPr>
           <a:lstStyle/>
           <a:p>
-            <a:pPr algn="ctr" indent="0" marL="0">
+            <a:pPr marL="0" indent="0" algn="ctr">
               <a:buNone/>
             </a:pPr>
             <a:r>
@@ -22854,7 +22906,7 @@
           </a:bodyPr>
           <a:lstStyle/>
           <a:p>
-            <a:pPr algn="ctr" indent="0" marL="0">
+            <a:pPr marL="0" indent="0" algn="ctr">
               <a:buNone/>
             </a:pPr>
             <a:r>
@@ -22916,11 +22968,11 @@
         </p:spPr>
         <p:txBody>
           <a:bodyPr wrap="square" lIns="381" tIns="381" rIns="381" bIns="381" rtlCol="0" anchor="t">
-            <a:normAutofit/>
+            <a:normAutofit lnSpcReduction="10000"/>
           </a:bodyPr>
           <a:lstStyle/>
           <a:p>
-            <a:pPr algn="ctr" indent="0" marL="0">
+            <a:pPr marL="0" indent="0" algn="ctr">
               <a:buNone/>
             </a:pPr>
             <a:r>
@@ -22961,7 +23013,7 @@
           </a:bodyPr>
           <a:lstStyle/>
           <a:p>
-            <a:pPr algn="ctr" indent="0" marL="0">
+            <a:pPr marL="0" indent="0" algn="ctr">
               <a:buNone/>
             </a:pPr>
             <a:r>
@@ -23002,7 +23054,7 @@
           </a:bodyPr>
           <a:lstStyle/>
           <a:p>
-            <a:pPr algn="ctr" indent="0" marL="0">
+            <a:pPr marL="0" indent="0" algn="ctr">
               <a:buNone/>
             </a:pPr>
             <a:r>
@@ -23064,11 +23116,11 @@
         </p:spPr>
         <p:txBody>
           <a:bodyPr wrap="square" lIns="381" tIns="381" rIns="381" bIns="381" rtlCol="0" anchor="t">
-            <a:normAutofit/>
+            <a:normAutofit lnSpcReduction="10000"/>
           </a:bodyPr>
           <a:lstStyle/>
           <a:p>
-            <a:pPr algn="ctr" indent="0" marL="0">
+            <a:pPr marL="0" indent="0" algn="ctr">
               <a:buNone/>
             </a:pPr>
             <a:r>
@@ -23109,7 +23161,7 @@
           </a:bodyPr>
           <a:lstStyle/>
           <a:p>
-            <a:pPr algn="ctr" indent="0" marL="0">
+            <a:pPr marL="0" indent="0" algn="ctr">
               <a:buNone/>
             </a:pPr>
             <a:r>
@@ -23150,7 +23202,7 @@
           </a:bodyPr>
           <a:lstStyle/>
           <a:p>
-            <a:pPr algn="ctr" indent="0" marL="0">
+            <a:pPr marL="0" indent="0" algn="ctr">
               <a:buNone/>
             </a:pPr>
             <a:r>
@@ -23236,7 +23288,7 @@
       </p:sp>
       <p:sp>
         <p:nvSpPr>
-          <p:cNvPr id="25" name="Slide Number Placeholder 0"/>
+          <p:cNvPr id="27" name="Slide Number Placeholder 0"/>
           <p:cNvSpPr>
             <a:spLocks noGrp="1"/>
           </p:cNvSpPr>
@@ -23254,7 +23306,7 @@
           </a:prstGeom>
           <a:extLst>
             <a:ext uri="{C572A759-6A51-4108-AA02-DFA0A04FC94B}">
-              <ma14:wrappingTextBoxFlag xmlns:ma14="http://schemas.microsoft.com/office/mac/drawingml/2011/main" val="0"/>
+              <ma14:wrappingTextBoxFlag xmlns:ma14="http://schemas.microsoft.com/office/mac/drawingml/2011/main" xmlns="" val="0"/>
             </a:ext>
           </a:extLst>
         </p:spPr>
@@ -23275,7 +23327,7 @@
           <a:p>
             <a:pPr algn="l"/>
             <a:fld id="{F7021451-1387-4CA6-816F-3879F97B5CBC}" type="slidenum">
-              <a:rPr b="0" lang="en-US"/>
+              <a:rPr lang="en-US" b="0"/>
               <a:t>27</a:t>
             </a:fld>
             <a:endParaRPr lang="en-US"/>
@@ -23298,6 +23350,7 @@
         <a:solidFill>
           <a:srgbClr val="FFFFFF"/>
         </a:solidFill>
+        <a:effectLst/>
       </p:bgPr>
     </p:bg>
     <p:spTree>
@@ -23335,7 +23388,7 @@
           <a:bodyPr wrap="square" lIns="0" tIns="0" rIns="0" bIns="0" rtlCol="0" anchor="ctr"/>
           <a:lstStyle/>
           <a:p>
-            <a:pPr indent="0" marL="0">
+            <a:pPr marL="0" indent="0">
               <a:buNone/>
             </a:pPr>
             <a:r>
@@ -23376,7 +23429,7 @@
           </a:bodyPr>
           <a:lstStyle/>
           <a:p>
-            <a:pPr indent="0" marL="0">
+            <a:pPr marL="0" indent="0">
               <a:buNone/>
             </a:pPr>
             <a:r>
@@ -23436,11 +23489,11 @@
         </p:spPr>
         <p:txBody>
           <a:bodyPr wrap="square" lIns="381" tIns="381" rIns="381" bIns="381" rtlCol="0" anchor="t">
-            <a:normAutofit/>
+            <a:normAutofit lnSpcReduction="10000"/>
           </a:bodyPr>
           <a:lstStyle/>
           <a:p>
-            <a:pPr indent="0" marL="0">
+            <a:pPr marL="0" indent="0">
               <a:buNone/>
             </a:pPr>
             <a:r>
@@ -23506,7 +23559,7 @@
           </a:bodyPr>
           <a:lstStyle/>
           <a:p>
-            <a:pPr indent="0" marL="0">
+            <a:pPr marL="0" indent="0">
               <a:buNone/>
             </a:pPr>
             <a:r>
@@ -23547,7 +23600,7 @@
           </a:bodyPr>
           <a:lstStyle/>
           <a:p>
-            <a:pPr indent="0" marL="0">
+            <a:pPr marL="0" indent="0">
               <a:buNone/>
             </a:pPr>
             <a:r>
@@ -23613,7 +23666,7 @@
           </a:bodyPr>
           <a:lstStyle/>
           <a:p>
-            <a:pPr indent="0" marL="0">
+            <a:pPr marL="0" indent="0">
               <a:buNone/>
             </a:pPr>
             <a:r>
@@ -23654,7 +23707,7 @@
           </a:bodyPr>
           <a:lstStyle/>
           <a:p>
-            <a:pPr indent="0" marL="0">
+            <a:pPr marL="0" indent="0">
               <a:buNone/>
             </a:pPr>
             <a:r>
@@ -23720,7 +23773,7 @@
           </a:bodyPr>
           <a:lstStyle/>
           <a:p>
-            <a:pPr indent="0" marL="0">
+            <a:pPr marL="0" indent="0">
               <a:buNone/>
             </a:pPr>
             <a:r>
@@ -23761,7 +23814,7 @@
           </a:bodyPr>
           <a:lstStyle/>
           <a:p>
-            <a:pPr indent="0" marL="0">
+            <a:pPr marL="0" indent="0">
               <a:buNone/>
             </a:pPr>
             <a:r>
@@ -23798,11 +23851,11 @@
         </p:spPr>
         <p:txBody>
           <a:bodyPr wrap="square" lIns="381" tIns="381" rIns="381" bIns="381" rtlCol="0" anchor="t">
-            <a:normAutofit/>
+            <a:normAutofit fontScale="85000" lnSpcReduction="10000"/>
           </a:bodyPr>
           <a:lstStyle/>
           <a:p>
-            <a:pPr algn="ctr" indent="0" marL="0">
+            <a:pPr marL="0" indent="0" algn="ctr">
               <a:buNone/>
             </a:pPr>
             <a:r>
@@ -23840,7 +23893,7 @@
           </a:prstGeom>
           <a:extLst>
             <a:ext uri="{C572A759-6A51-4108-AA02-DFA0A04FC94B}">
-              <ma14:wrappingTextBoxFlag xmlns:ma14="http://schemas.microsoft.com/office/mac/drawingml/2011/main" val="0"/>
+              <ma14:wrappingTextBoxFlag xmlns:ma14="http://schemas.microsoft.com/office/mac/drawingml/2011/main" xmlns="" val="0"/>
             </a:ext>
           </a:extLst>
         </p:spPr>
@@ -23861,7 +23914,7 @@
           <a:p>
             <a:pPr algn="l"/>
             <a:fld id="{F7021451-1387-4CA6-816F-3879F97B5CBC}" type="slidenum">
-              <a:rPr b="0" lang="en-US"/>
+              <a:rPr lang="en-US" b="0"/>
               <a:t>3</a:t>
             </a:fld>
             <a:endParaRPr lang="en-US"/>
@@ -23884,6 +23937,7 @@
         <a:solidFill>
           <a:srgbClr val="FFFFFF"/>
         </a:solidFill>
+        <a:effectLst/>
       </p:bgPr>
     </p:bg>
     <p:spTree>
@@ -23921,7 +23975,7 @@
           <a:bodyPr wrap="square" lIns="0" tIns="0" rIns="0" bIns="0" rtlCol="0" anchor="ctr"/>
           <a:lstStyle/>
           <a:p>
-            <a:pPr indent="0" marL="0">
+            <a:pPr marL="0" indent="0">
               <a:buNone/>
             </a:pPr>
             <a:r>
@@ -23962,7 +24016,7 @@
           </a:bodyPr>
           <a:lstStyle/>
           <a:p>
-            <a:pPr indent="0" marL="0">
+            <a:pPr marL="0" indent="0">
               <a:buNone/>
             </a:pPr>
             <a:r>
@@ -24051,7 +24105,7 @@
           </a:bodyPr>
           <a:lstStyle/>
           <a:p>
-            <a:pPr indent="0" marL="0">
+            <a:pPr marL="0" indent="0">
               <a:buNone/>
             </a:pPr>
             <a:r>
@@ -24092,7 +24146,7 @@
           </a:bodyPr>
           <a:lstStyle/>
           <a:p>
-            <a:pPr indent="0" marL="0">
+            <a:pPr marL="0" indent="0">
               <a:buNone/>
             </a:pPr>
             <a:r>
@@ -24158,7 +24212,7 @@
           </a:bodyPr>
           <a:lstStyle/>
           <a:p>
-            <a:pPr indent="0" marL="0">
+            <a:pPr marL="0" indent="0">
               <a:buNone/>
             </a:pPr>
             <a:r>
@@ -24199,7 +24253,7 @@
           </a:bodyPr>
           <a:lstStyle/>
           <a:p>
-            <a:pPr indent="0" marL="0">
+            <a:pPr marL="0" indent="0">
               <a:buNone/>
             </a:pPr>
             <a:r>
@@ -24265,7 +24319,7 @@
           </a:bodyPr>
           <a:lstStyle/>
           <a:p>
-            <a:pPr indent="0" marL="0">
+            <a:pPr marL="0" indent="0">
               <a:buNone/>
             </a:pPr>
             <a:r>
@@ -24306,7 +24360,7 @@
           </a:bodyPr>
           <a:lstStyle/>
           <a:p>
-            <a:pPr indent="0" marL="0">
+            <a:pPr marL="0" indent="0">
               <a:buNone/>
             </a:pPr>
             <a:r>
@@ -24372,7 +24426,7 @@
           </a:bodyPr>
           <a:lstStyle/>
           <a:p>
-            <a:pPr indent="0" marL="0">
+            <a:pPr marL="0" indent="0">
               <a:buNone/>
             </a:pPr>
             <a:r>
@@ -24413,7 +24467,7 @@
           </a:bodyPr>
           <a:lstStyle/>
           <a:p>
-            <a:pPr indent="0" marL="0">
+            <a:pPr marL="0" indent="0">
               <a:buNone/>
             </a:pPr>
             <a:r>
@@ -24451,7 +24505,7 @@
           </a:prstGeom>
           <a:extLst>
             <a:ext uri="{C572A759-6A51-4108-AA02-DFA0A04FC94B}">
-              <ma14:wrappingTextBoxFlag xmlns:ma14="http://schemas.microsoft.com/office/mac/drawingml/2011/main" val="0"/>
+              <ma14:wrappingTextBoxFlag xmlns:ma14="http://schemas.microsoft.com/office/mac/drawingml/2011/main" xmlns="" val="0"/>
             </a:ext>
           </a:extLst>
         </p:spPr>
@@ -24472,7 +24526,7 @@
           <a:p>
             <a:pPr algn="l"/>
             <a:fld id="{F7021451-1387-4CA6-816F-3879F97B5CBC}" type="slidenum">
-              <a:rPr b="0" lang="en-US"/>
+              <a:rPr lang="en-US" b="0"/>
               <a:t>4</a:t>
             </a:fld>
             <a:endParaRPr lang="en-US"/>
@@ -24495,6 +24549,7 @@
         <a:solidFill>
           <a:srgbClr val="FFFFFF"/>
         </a:solidFill>
+        <a:effectLst/>
       </p:bgPr>
     </p:bg>
     <p:spTree>
@@ -24532,7 +24587,7 @@
           <a:bodyPr wrap="square" lIns="0" tIns="0" rIns="0" bIns="0" rtlCol="0" anchor="ctr"/>
           <a:lstStyle/>
           <a:p>
-            <a:pPr indent="0" marL="0">
+            <a:pPr marL="0" indent="0">
               <a:buNone/>
             </a:pPr>
             <a:r>
@@ -24573,7 +24628,7 @@
           </a:bodyPr>
           <a:lstStyle/>
           <a:p>
-            <a:pPr indent="0" marL="0">
+            <a:pPr marL="0" indent="0">
               <a:buNone/>
             </a:pPr>
             <a:r>
@@ -24637,9 +24692,27 @@
             <a:tbl>
               <a:tblPr/>
               <a:tblGrid>
-                <a:gridCol w="1828800"/>
-                <a:gridCol w="4663440"/>
-                <a:gridCol w="4389120"/>
+                <a:gridCol w="1828800">
+                  <a:extLst>
+                    <a:ext uri="{9D8B030D-6E8A-4147-A177-3AD203B41FA5}">
+                      <a16:colId xmlns:a16="http://schemas.microsoft.com/office/drawing/2014/main" val="20000"/>
+                    </a:ext>
+                  </a:extLst>
+                </a:gridCol>
+                <a:gridCol w="4663440">
+                  <a:extLst>
+                    <a:ext uri="{9D8B030D-6E8A-4147-A177-3AD203B41FA5}">
+                      <a16:colId xmlns:a16="http://schemas.microsoft.com/office/drawing/2014/main" val="20001"/>
+                    </a:ext>
+                  </a:extLst>
+                </a:gridCol>
+                <a:gridCol w="4389120">
+                  <a:extLst>
+                    <a:ext uri="{9D8B030D-6E8A-4147-A177-3AD203B41FA5}">
+                      <a16:colId xmlns:a16="http://schemas.microsoft.com/office/drawing/2014/main" val="20002"/>
+                    </a:ext>
+                  </a:extLst>
+                </a:gridCol>
               </a:tblGrid>
               <a:tr h="646611">
                 <a:tc>
@@ -24647,7 +24720,7 @@
                     <a:bodyPr/>
                     <a:lstStyle/>
                     <a:p>
-                      <a:pPr indent="0" marL="0">
+                      <a:pPr marL="0" indent="0">
                         <a:buNone/>
                       </a:pPr>
                       <a:r>
@@ -24668,7 +24741,7 @@
                       </a:endParaRPr>
                     </a:p>
                   </a:txBody>
-                  <a:tcPr marL="45720" marR="45720" marT="45720" marB="45720" anchor="mid">
+                  <a:tcPr marL="45720" marR="45720">
                     <a:lnL w="8255" cap="flat" cmpd="sng" algn="ctr">
                       <a:solidFill>
                         <a:srgbClr val="D0D5DD"/>
@@ -24712,7 +24785,7 @@
                     <a:bodyPr/>
                     <a:lstStyle/>
                     <a:p>
-                      <a:pPr indent="0" marL="0">
+                      <a:pPr marL="0" indent="0">
                         <a:buNone/>
                       </a:pPr>
                       <a:r>
@@ -24733,7 +24806,7 @@
                       </a:endParaRPr>
                     </a:p>
                   </a:txBody>
-                  <a:tcPr marL="45720" marR="45720" marT="45720" marB="45720" anchor="mid">
+                  <a:tcPr marL="45720" marR="45720">
                     <a:lnL w="8255" cap="flat" cmpd="sng" algn="ctr">
                       <a:solidFill>
                         <a:srgbClr val="D0D5DD"/>
@@ -24777,7 +24850,7 @@
                     <a:bodyPr/>
                     <a:lstStyle/>
                     <a:p>
-                      <a:pPr indent="0" marL="0">
+                      <a:pPr marL="0" indent="0">
                         <a:buNone/>
                       </a:pPr>
                       <a:r>
@@ -24798,7 +24871,7 @@
                       </a:endParaRPr>
                     </a:p>
                   </a:txBody>
-                  <a:tcPr marL="45720" marR="45720" marT="45720" marB="45720" anchor="mid">
+                  <a:tcPr marL="45720" marR="45720">
                     <a:lnL w="8255" cap="flat" cmpd="sng" algn="ctr">
                       <a:solidFill>
                         <a:srgbClr val="D0D5DD"/>
@@ -24837,6 +24910,11 @@
                     </a:lnB>
                   </a:tcPr>
                 </a:tc>
+                <a:extLst>
+                  <a:ext uri="{0D108BD9-81ED-4DB2-BD59-A6C34878D82A}">
+                    <a16:rowId xmlns:a16="http://schemas.microsoft.com/office/drawing/2014/main" val="10000"/>
+                  </a:ext>
+                </a:extLst>
               </a:tr>
               <a:tr h="646611">
                 <a:tc>
@@ -24844,7 +24922,7 @@
                     <a:bodyPr/>
                     <a:lstStyle/>
                     <a:p>
-                      <a:pPr indent="0" marL="0">
+                      <a:pPr marL="0" indent="0">
                         <a:buNone/>
                       </a:pPr>
                       <a:r>
@@ -24865,7 +24943,7 @@
                       </a:endParaRPr>
                     </a:p>
                   </a:txBody>
-                  <a:tcPr marL="45720" marR="45720" marT="45720" marB="45720" anchor="mid">
+                  <a:tcPr marL="45720" marR="45720">
                     <a:lnL w="8255" cap="flat" cmpd="sng" algn="ctr">
                       <a:solidFill>
                         <a:srgbClr val="D0D5DD"/>
@@ -24909,7 +24987,7 @@
                     <a:bodyPr/>
                     <a:lstStyle/>
                     <a:p>
-                      <a:pPr indent="0" marL="0">
+                      <a:pPr marL="0" indent="0">
                         <a:buNone/>
                       </a:pPr>
                       <a:r>
@@ -24930,7 +25008,7 @@
                       </a:endParaRPr>
                     </a:p>
                   </a:txBody>
-                  <a:tcPr marL="45720" marR="45720" marT="45720" marB="45720" anchor="mid">
+                  <a:tcPr marL="45720" marR="45720">
                     <a:lnL w="8255" cap="flat" cmpd="sng" algn="ctr">
                       <a:solidFill>
                         <a:srgbClr val="D0D5DD"/>
@@ -24974,7 +25052,7 @@
                     <a:bodyPr/>
                     <a:lstStyle/>
                     <a:p>
-                      <a:pPr indent="0" marL="0">
+                      <a:pPr marL="0" indent="0">
                         <a:buNone/>
                       </a:pPr>
                       <a:r>
@@ -24995,7 +25073,7 @@
                       </a:endParaRPr>
                     </a:p>
                   </a:txBody>
-                  <a:tcPr marL="45720" marR="45720" marT="45720" marB="45720" anchor="mid">
+                  <a:tcPr marL="45720" marR="45720">
                     <a:lnL w="8255" cap="flat" cmpd="sng" algn="ctr">
                       <a:solidFill>
                         <a:srgbClr val="D0D5DD"/>
@@ -25034,6 +25112,11 @@
                     </a:lnB>
                   </a:tcPr>
                 </a:tc>
+                <a:extLst>
+                  <a:ext uri="{0D108BD9-81ED-4DB2-BD59-A6C34878D82A}">
+                    <a16:rowId xmlns:a16="http://schemas.microsoft.com/office/drawing/2014/main" val="10001"/>
+                  </a:ext>
+                </a:extLst>
               </a:tr>
               <a:tr h="646611">
                 <a:tc>
@@ -25041,7 +25124,7 @@
                     <a:bodyPr/>
                     <a:lstStyle/>
                     <a:p>
-                      <a:pPr indent="0" marL="0">
+                      <a:pPr marL="0" indent="0">
                         <a:buNone/>
                       </a:pPr>
                       <a:r>
@@ -25062,7 +25145,7 @@
                       </a:endParaRPr>
                     </a:p>
                   </a:txBody>
-                  <a:tcPr marL="45720" marR="45720" marT="45720" marB="45720" anchor="mid">
+                  <a:tcPr marL="45720" marR="45720">
                     <a:lnL w="8255" cap="flat" cmpd="sng" algn="ctr">
                       <a:solidFill>
                         <a:srgbClr val="D0D5DD"/>
@@ -25106,7 +25189,7 @@
                     <a:bodyPr/>
                     <a:lstStyle/>
                     <a:p>
-                      <a:pPr indent="0" marL="0">
+                      <a:pPr marL="0" indent="0">
                         <a:buNone/>
                       </a:pPr>
                       <a:r>
@@ -25127,7 +25210,7 @@
                       </a:endParaRPr>
                     </a:p>
                   </a:txBody>
-                  <a:tcPr marL="45720" marR="45720" marT="45720" marB="45720" anchor="mid">
+                  <a:tcPr marL="45720" marR="45720">
                     <a:lnL w="8255" cap="flat" cmpd="sng" algn="ctr">
                       <a:solidFill>
                         <a:srgbClr val="D0D5DD"/>
@@ -25171,7 +25254,7 @@
                     <a:bodyPr/>
                     <a:lstStyle/>
                     <a:p>
-                      <a:pPr indent="0" marL="0">
+                      <a:pPr marL="0" indent="0">
                         <a:buNone/>
                       </a:pPr>
                       <a:r>
@@ -25192,7 +25275,7 @@
                       </a:endParaRPr>
                     </a:p>
                   </a:txBody>
-                  <a:tcPr marL="45720" marR="45720" marT="45720" marB="45720" anchor="mid">
+                  <a:tcPr marL="45720" marR="45720">
                     <a:lnL w="8255" cap="flat" cmpd="sng" algn="ctr">
                       <a:solidFill>
                         <a:srgbClr val="D0D5DD"/>
@@ -25231,6 +25314,11 @@
                     </a:lnB>
                   </a:tcPr>
                 </a:tc>
+                <a:extLst>
+                  <a:ext uri="{0D108BD9-81ED-4DB2-BD59-A6C34878D82A}">
+                    <a16:rowId xmlns:a16="http://schemas.microsoft.com/office/drawing/2014/main" val="10002"/>
+                  </a:ext>
+                </a:extLst>
               </a:tr>
               <a:tr h="646611">
                 <a:tc>
@@ -25238,7 +25326,7 @@
                     <a:bodyPr/>
                     <a:lstStyle/>
                     <a:p>
-                      <a:pPr indent="0" marL="0">
+                      <a:pPr marL="0" indent="0">
                         <a:buNone/>
                       </a:pPr>
                       <a:r>
@@ -25259,7 +25347,7 @@
                       </a:endParaRPr>
                     </a:p>
                   </a:txBody>
-                  <a:tcPr marL="45720" marR="45720" marT="45720" marB="45720" anchor="mid">
+                  <a:tcPr marL="45720" marR="45720">
                     <a:lnL w="8255" cap="flat" cmpd="sng" algn="ctr">
                       <a:solidFill>
                         <a:srgbClr val="D0D5DD"/>
@@ -25303,7 +25391,7 @@
                     <a:bodyPr/>
                     <a:lstStyle/>
                     <a:p>
-                      <a:pPr indent="0" marL="0">
+                      <a:pPr marL="0" indent="0">
                         <a:buNone/>
                       </a:pPr>
                       <a:r>
@@ -25324,7 +25412,7 @@
                       </a:endParaRPr>
                     </a:p>
                   </a:txBody>
-                  <a:tcPr marL="45720" marR="45720" marT="45720" marB="45720" anchor="mid">
+                  <a:tcPr marL="45720" marR="45720">
                     <a:lnL w="8255" cap="flat" cmpd="sng" algn="ctr">
                       <a:solidFill>
                         <a:srgbClr val="D0D5DD"/>
@@ -25368,7 +25456,7 @@
                     <a:bodyPr/>
                     <a:lstStyle/>
                     <a:p>
-                      <a:pPr indent="0" marL="0">
+                      <a:pPr marL="0" indent="0">
                         <a:buNone/>
                       </a:pPr>
                       <a:r>
@@ -25389,7 +25477,7 @@
                       </a:endParaRPr>
                     </a:p>
                   </a:txBody>
-                  <a:tcPr marL="45720" marR="45720" marT="45720" marB="45720" anchor="mid">
+                  <a:tcPr marL="45720" marR="45720">
                     <a:lnL w="8255" cap="flat" cmpd="sng" algn="ctr">
                       <a:solidFill>
                         <a:srgbClr val="D0D5DD"/>
@@ -25428,6 +25516,11 @@
                     </a:lnB>
                   </a:tcPr>
                 </a:tc>
+                <a:extLst>
+                  <a:ext uri="{0D108BD9-81ED-4DB2-BD59-A6C34878D82A}">
+                    <a16:rowId xmlns:a16="http://schemas.microsoft.com/office/drawing/2014/main" val="10003"/>
+                  </a:ext>
+                </a:extLst>
               </a:tr>
               <a:tr h="646611">
                 <a:tc>
@@ -25435,7 +25528,7 @@
                     <a:bodyPr/>
                     <a:lstStyle/>
                     <a:p>
-                      <a:pPr indent="0" marL="0">
+                      <a:pPr marL="0" indent="0">
                         <a:buNone/>
                       </a:pPr>
                       <a:r>
@@ -25456,7 +25549,7 @@
                       </a:endParaRPr>
                     </a:p>
                   </a:txBody>
-                  <a:tcPr marL="45720" marR="45720" marT="45720" marB="45720" anchor="mid">
+                  <a:tcPr marL="45720" marR="45720">
                     <a:lnL w="8255" cap="flat" cmpd="sng" algn="ctr">
                       <a:solidFill>
                         <a:srgbClr val="D0D5DD"/>
@@ -25500,7 +25593,7 @@
                     <a:bodyPr/>
                     <a:lstStyle/>
                     <a:p>
-                      <a:pPr indent="0" marL="0">
+                      <a:pPr marL="0" indent="0">
                         <a:buNone/>
                       </a:pPr>
                       <a:r>
@@ -25521,7 +25614,7 @@
                       </a:endParaRPr>
                     </a:p>
                   </a:txBody>
-                  <a:tcPr marL="45720" marR="45720" marT="45720" marB="45720" anchor="mid">
+                  <a:tcPr marL="45720" marR="45720">
                     <a:lnL w="8255" cap="flat" cmpd="sng" algn="ctr">
                       <a:solidFill>
                         <a:srgbClr val="D0D5DD"/>
@@ -25565,7 +25658,7 @@
                     <a:bodyPr/>
                     <a:lstStyle/>
                     <a:p>
-                      <a:pPr indent="0" marL="0">
+                      <a:pPr marL="0" indent="0">
                         <a:buNone/>
                       </a:pPr>
                       <a:r>
@@ -25586,7 +25679,7 @@
                       </a:endParaRPr>
                     </a:p>
                   </a:txBody>
-                  <a:tcPr marL="45720" marR="45720" marT="45720" marB="45720" anchor="mid">
+                  <a:tcPr marL="45720" marR="45720">
                     <a:lnL w="8255" cap="flat" cmpd="sng" algn="ctr">
                       <a:solidFill>
                         <a:srgbClr val="D0D5DD"/>
@@ -25625,6 +25718,11 @@
                     </a:lnB>
                   </a:tcPr>
                 </a:tc>
+                <a:extLst>
+                  <a:ext uri="{0D108BD9-81ED-4DB2-BD59-A6C34878D82A}">
+                    <a16:rowId xmlns:a16="http://schemas.microsoft.com/office/drawing/2014/main" val="10004"/>
+                  </a:ext>
+                </a:extLst>
               </a:tr>
               <a:tr h="646611">
                 <a:tc>
@@ -25632,7 +25730,7 @@
                     <a:bodyPr/>
                     <a:lstStyle/>
                     <a:p>
-                      <a:pPr indent="0" marL="0">
+                      <a:pPr marL="0" indent="0">
                         <a:buNone/>
                       </a:pPr>
                       <a:r>
@@ -25653,7 +25751,7 @@
                       </a:endParaRPr>
                     </a:p>
                   </a:txBody>
-                  <a:tcPr marL="45720" marR="45720" marT="45720" marB="45720" anchor="mid">
+                  <a:tcPr marL="45720" marR="45720">
                     <a:lnL w="8255" cap="flat" cmpd="sng" algn="ctr">
                       <a:solidFill>
                         <a:srgbClr val="D0D5DD"/>
@@ -25697,7 +25795,7 @@
                     <a:bodyPr/>
                     <a:lstStyle/>
                     <a:p>
-                      <a:pPr indent="0" marL="0">
+                      <a:pPr marL="0" indent="0">
                         <a:buNone/>
                       </a:pPr>
                       <a:r>
@@ -25718,7 +25816,7 @@
                       </a:endParaRPr>
                     </a:p>
                   </a:txBody>
-                  <a:tcPr marL="45720" marR="45720" marT="45720" marB="45720" anchor="mid">
+                  <a:tcPr marL="45720" marR="45720">
                     <a:lnL w="8255" cap="flat" cmpd="sng" algn="ctr">
                       <a:solidFill>
                         <a:srgbClr val="D0D5DD"/>
@@ -25762,7 +25860,7 @@
                     <a:bodyPr/>
                     <a:lstStyle/>
                     <a:p>
-                      <a:pPr indent="0" marL="0">
+                      <a:pPr marL="0" indent="0">
                         <a:buNone/>
                       </a:pPr>
                       <a:r>
@@ -25783,7 +25881,7 @@
                       </a:endParaRPr>
                     </a:p>
                   </a:txBody>
-                  <a:tcPr marL="45720" marR="45720" marT="45720" marB="45720" anchor="mid">
+                  <a:tcPr marL="45720" marR="45720">
                     <a:lnL w="8255" cap="flat" cmpd="sng" algn="ctr">
                       <a:solidFill>
                         <a:srgbClr val="D0D5DD"/>
@@ -25822,6 +25920,11 @@
                     </a:lnB>
                   </a:tcPr>
                 </a:tc>
+                <a:extLst>
+                  <a:ext uri="{0D108BD9-81ED-4DB2-BD59-A6C34878D82A}">
+                    <a16:rowId xmlns:a16="http://schemas.microsoft.com/office/drawing/2014/main" val="10005"/>
+                  </a:ext>
+                </a:extLst>
               </a:tr>
               <a:tr h="646611">
                 <a:tc>
@@ -25829,7 +25932,7 @@
                     <a:bodyPr/>
                     <a:lstStyle/>
                     <a:p>
-                      <a:pPr indent="0" marL="0">
+                      <a:pPr marL="0" indent="0">
                         <a:buNone/>
                       </a:pPr>
                       <a:r>
@@ -25850,7 +25953,7 @@
                       </a:endParaRPr>
                     </a:p>
                   </a:txBody>
-                  <a:tcPr marL="45720" marR="45720" marT="45720" marB="45720" anchor="mid">
+                  <a:tcPr marL="45720" marR="45720">
                     <a:lnL w="8255" cap="flat" cmpd="sng" algn="ctr">
                       <a:solidFill>
                         <a:srgbClr val="D0D5DD"/>
@@ -25894,7 +25997,7 @@
                     <a:bodyPr/>
                     <a:lstStyle/>
                     <a:p>
-                      <a:pPr indent="0" marL="0">
+                      <a:pPr marL="0" indent="0">
                         <a:buNone/>
                       </a:pPr>
                       <a:r>
@@ -25915,7 +26018,7 @@
                       </a:endParaRPr>
                     </a:p>
                   </a:txBody>
-                  <a:tcPr marL="45720" marR="45720" marT="45720" marB="45720" anchor="mid">
+                  <a:tcPr marL="45720" marR="45720">
                     <a:lnL w="8255" cap="flat" cmpd="sng" algn="ctr">
                       <a:solidFill>
                         <a:srgbClr val="D0D5DD"/>
@@ -25959,7 +26062,7 @@
                     <a:bodyPr/>
                     <a:lstStyle/>
                     <a:p>
-                      <a:pPr indent="0" marL="0">
+                      <a:pPr marL="0" indent="0">
                         <a:buNone/>
                       </a:pPr>
                       <a:r>
@@ -25980,7 +26083,7 @@
                       </a:endParaRPr>
                     </a:p>
                   </a:txBody>
-                  <a:tcPr marL="45720" marR="45720" marT="45720" marB="45720" anchor="mid">
+                  <a:tcPr marL="45720" marR="45720">
                     <a:lnL w="8255" cap="flat" cmpd="sng" algn="ctr">
                       <a:solidFill>
                         <a:srgbClr val="D0D5DD"/>
@@ -26019,6 +26122,11 @@
                     </a:lnB>
                   </a:tcPr>
                 </a:tc>
+                <a:extLst>
+                  <a:ext uri="{0D108BD9-81ED-4DB2-BD59-A6C34878D82A}">
+                    <a16:rowId xmlns:a16="http://schemas.microsoft.com/office/drawing/2014/main" val="10006"/>
+                  </a:ext>
+                </a:extLst>
               </a:tr>
             </a:tbl>
           </a:graphicData>
@@ -26026,7 +26134,7 @@
       </p:graphicFrame>
       <p:sp>
         <p:nvSpPr>
-          <p:cNvPr id="6" name="Text 3"/>
+          <p:cNvPr id="5" name="Text 3"/>
           <p:cNvSpPr/>
           <p:nvPr/>
         </p:nvSpPr>
@@ -26047,7 +26155,7 @@
           </a:bodyPr>
           <a:lstStyle/>
           <a:p>
-            <a:pPr indent="0" marL="0">
+            <a:pPr marL="0" indent="0">
               <a:buNone/>
             </a:pPr>
             <a:r>
@@ -26085,7 +26193,7 @@
           </a:prstGeom>
           <a:extLst>
             <a:ext uri="{C572A759-6A51-4108-AA02-DFA0A04FC94B}">
-              <ma14:wrappingTextBoxFlag xmlns:ma14="http://schemas.microsoft.com/office/mac/drawingml/2011/main" val="0"/>
+              <ma14:wrappingTextBoxFlag xmlns:ma14="http://schemas.microsoft.com/office/mac/drawingml/2011/main" xmlns="" val="0"/>
             </a:ext>
           </a:extLst>
         </p:spPr>
@@ -26106,7 +26214,7 @@
           <a:p>
             <a:pPr algn="l"/>
             <a:fld id="{F7021451-1387-4CA6-816F-3879F97B5CBC}" type="slidenum">
-              <a:rPr b="0" lang="en-US"/>
+              <a:rPr lang="en-US" b="0"/>
               <a:t>5</a:t>
             </a:fld>
             <a:endParaRPr lang="en-US"/>
@@ -26129,6 +26237,7 @@
         <a:solidFill>
           <a:srgbClr val="FFFFFF"/>
         </a:solidFill>
+        <a:effectLst/>
       </p:bgPr>
     </p:bg>
     <p:spTree>
@@ -26166,7 +26275,7 @@
           <a:bodyPr wrap="square" lIns="0" tIns="0" rIns="0" bIns="0" rtlCol="0" anchor="ctr"/>
           <a:lstStyle/>
           <a:p>
-            <a:pPr indent="0" marL="0">
+            <a:pPr marL="0" indent="0">
               <a:buNone/>
             </a:pPr>
             <a:r>
@@ -26207,7 +26316,7 @@
           </a:bodyPr>
           <a:lstStyle/>
           <a:p>
-            <a:pPr indent="0" marL="0">
+            <a:pPr marL="0" indent="0">
               <a:buNone/>
             </a:pPr>
             <a:r>
@@ -26296,7 +26405,7 @@
           </a:bodyPr>
           <a:lstStyle/>
           <a:p>
-            <a:pPr indent="0" marL="0">
+            <a:pPr marL="0" indent="0">
               <a:buNone/>
             </a:pPr>
             <a:r>
@@ -26337,7 +26446,7 @@
           </a:bodyPr>
           <a:lstStyle/>
           <a:p>
-            <a:pPr indent="0" marL="0">
+            <a:pPr marL="0" indent="0">
               <a:buNone/>
             </a:pPr>
             <a:r>
@@ -26403,7 +26512,7 @@
           </a:bodyPr>
           <a:lstStyle/>
           <a:p>
-            <a:pPr indent="0" marL="0">
+            <a:pPr marL="0" indent="0">
               <a:buNone/>
             </a:pPr>
             <a:r>
@@ -26444,7 +26553,7 @@
           </a:bodyPr>
           <a:lstStyle/>
           <a:p>
-            <a:pPr indent="0" marL="0">
+            <a:pPr marL="0" indent="0">
               <a:buNone/>
             </a:pPr>
             <a:r>
@@ -26510,7 +26619,7 @@
           </a:bodyPr>
           <a:lstStyle/>
           <a:p>
-            <a:pPr indent="0" marL="0">
+            <a:pPr marL="0" indent="0">
               <a:buNone/>
             </a:pPr>
             <a:r>
@@ -26551,7 +26660,7 @@
           </a:bodyPr>
           <a:lstStyle/>
           <a:p>
-            <a:pPr indent="0" marL="0">
+            <a:pPr marL="0" indent="0">
               <a:buNone/>
             </a:pPr>
             <a:r>
@@ -26617,7 +26726,7 @@
           </a:bodyPr>
           <a:lstStyle/>
           <a:p>
-            <a:pPr indent="0" marL="0">
+            <a:pPr marL="0" indent="0">
               <a:buNone/>
             </a:pPr>
             <a:r>
@@ -26658,7 +26767,7 @@
           </a:bodyPr>
           <a:lstStyle/>
           <a:p>
-            <a:pPr indent="0" marL="0">
+            <a:pPr marL="0" indent="0">
               <a:buNone/>
             </a:pPr>
             <a:r>
@@ -26724,7 +26833,7 @@
           </a:bodyPr>
           <a:lstStyle/>
           <a:p>
-            <a:pPr indent="0" marL="0">
+            <a:pPr marL="0" indent="0">
               <a:buNone/>
             </a:pPr>
             <a:r>
@@ -26765,7 +26874,7 @@
           </a:bodyPr>
           <a:lstStyle/>
           <a:p>
-            <a:pPr indent="0" marL="0">
+            <a:pPr marL="0" indent="0">
               <a:buNone/>
             </a:pPr>
             <a:r>
@@ -26831,7 +26940,7 @@
           </a:bodyPr>
           <a:lstStyle/>
           <a:p>
-            <a:pPr indent="0" marL="0">
+            <a:pPr marL="0" indent="0">
               <a:buNone/>
             </a:pPr>
             <a:r>
@@ -26872,7 +26981,7 @@
           </a:bodyPr>
           <a:lstStyle/>
           <a:p>
-            <a:pPr indent="0" marL="0">
+            <a:pPr marL="0" indent="0">
               <a:buNone/>
             </a:pPr>
             <a:r>
@@ -26913,7 +27022,7 @@
           </a:bodyPr>
           <a:lstStyle/>
           <a:p>
-            <a:pPr algn="ctr" indent="0" marL="0">
+            <a:pPr marL="0" indent="0" algn="ctr">
               <a:buNone/>
             </a:pPr>
             <a:r>
@@ -26951,7 +27060,7 @@
           </a:prstGeom>
           <a:extLst>
             <a:ext uri="{C572A759-6A51-4108-AA02-DFA0A04FC94B}">
-              <ma14:wrappingTextBoxFlag xmlns:ma14="http://schemas.microsoft.com/office/mac/drawingml/2011/main" val="0"/>
+              <ma14:wrappingTextBoxFlag xmlns:ma14="http://schemas.microsoft.com/office/mac/drawingml/2011/main" xmlns="" val="0"/>
             </a:ext>
           </a:extLst>
         </p:spPr>
@@ -26972,7 +27081,7 @@
           <a:p>
             <a:pPr algn="l"/>
             <a:fld id="{F7021451-1387-4CA6-816F-3879F97B5CBC}" type="slidenum">
-              <a:rPr b="0" lang="en-US"/>
+              <a:rPr lang="en-US" b="0"/>
               <a:t>6</a:t>
             </a:fld>
             <a:endParaRPr lang="en-US"/>
@@ -26995,6 +27104,7 @@
         <a:solidFill>
           <a:srgbClr val="FFFFFF"/>
         </a:solidFill>
+        <a:effectLst/>
       </p:bgPr>
     </p:bg>
     <p:spTree>
@@ -27032,7 +27142,7 @@
           <a:bodyPr wrap="square" lIns="0" tIns="0" rIns="0" bIns="0" rtlCol="0" anchor="ctr"/>
           <a:lstStyle/>
           <a:p>
-            <a:pPr indent="0" marL="0">
+            <a:pPr marL="0" indent="0">
               <a:buNone/>
             </a:pPr>
             <a:r>
@@ -27073,7 +27183,7 @@
           </a:bodyPr>
           <a:lstStyle/>
           <a:p>
-            <a:pPr indent="0" marL="0">
+            <a:pPr marL="0" indent="0">
               <a:buNone/>
             </a:pPr>
             <a:r>
@@ -27158,11 +27268,11 @@
         </p:spPr>
         <p:txBody>
           <a:bodyPr wrap="square" lIns="381" tIns="381" rIns="381" bIns="381" rtlCol="0" anchor="t">
-            <a:normAutofit/>
+            <a:normAutofit lnSpcReduction="10000"/>
           </a:bodyPr>
           <a:lstStyle/>
           <a:p>
-            <a:pPr algn="ctr" indent="0" marL="0">
+            <a:pPr marL="0" indent="0" algn="ctr">
               <a:buNone/>
             </a:pPr>
             <a:r>
@@ -27203,7 +27313,7 @@
           </a:bodyPr>
           <a:lstStyle/>
           <a:p>
-            <a:pPr algn="ctr" indent="0" marL="0">
+            <a:pPr marL="0" indent="0" algn="ctr">
               <a:buNone/>
             </a:pPr>
             <a:r>
@@ -27244,7 +27354,7 @@
           </a:bodyPr>
           <a:lstStyle/>
           <a:p>
-            <a:pPr algn="ctr" indent="0" marL="0">
+            <a:pPr marL="0" indent="0" algn="ctr">
               <a:buNone/>
             </a:pPr>
             <a:r>
@@ -27306,11 +27416,11 @@
         </p:spPr>
         <p:txBody>
           <a:bodyPr wrap="square" lIns="381" tIns="381" rIns="381" bIns="381" rtlCol="0" anchor="t">
-            <a:normAutofit/>
+            <a:normAutofit lnSpcReduction="10000"/>
           </a:bodyPr>
           <a:lstStyle/>
           <a:p>
-            <a:pPr algn="ctr" indent="0" marL="0">
+            <a:pPr marL="0" indent="0" algn="ctr">
               <a:buNone/>
             </a:pPr>
             <a:r>
@@ -27351,7 +27461,7 @@
           </a:bodyPr>
           <a:lstStyle/>
           <a:p>
-            <a:pPr algn="ctr" indent="0" marL="0">
+            <a:pPr marL="0" indent="0" algn="ctr">
               <a:buNone/>
             </a:pPr>
             <a:r>
@@ -27392,7 +27502,7 @@
           </a:bodyPr>
           <a:lstStyle/>
           <a:p>
-            <a:pPr algn="ctr" indent="0" marL="0">
+            <a:pPr marL="0" indent="0" algn="ctr">
               <a:buNone/>
             </a:pPr>
             <a:r>
@@ -27454,11 +27564,11 @@
         </p:spPr>
         <p:txBody>
           <a:bodyPr wrap="square" lIns="381" tIns="381" rIns="381" bIns="381" rtlCol="0" anchor="t">
-            <a:normAutofit/>
+            <a:normAutofit lnSpcReduction="10000"/>
           </a:bodyPr>
           <a:lstStyle/>
           <a:p>
-            <a:pPr algn="ctr" indent="0" marL="0">
+            <a:pPr marL="0" indent="0" algn="ctr">
               <a:buNone/>
             </a:pPr>
             <a:r>
@@ -27499,7 +27609,7 @@
           </a:bodyPr>
           <a:lstStyle/>
           <a:p>
-            <a:pPr algn="ctr" indent="0" marL="0">
+            <a:pPr marL="0" indent="0" algn="ctr">
               <a:buNone/>
             </a:pPr>
             <a:r>
@@ -27561,11 +27671,11 @@
         </p:spPr>
         <p:txBody>
           <a:bodyPr wrap="square" lIns="381" tIns="381" rIns="381" bIns="381" rtlCol="0" anchor="t">
-            <a:normAutofit/>
+            <a:normAutofit lnSpcReduction="10000"/>
           </a:bodyPr>
           <a:lstStyle/>
           <a:p>
-            <a:pPr algn="ctr" indent="0" marL="0">
+            <a:pPr marL="0" indent="0" algn="ctr">
               <a:buNone/>
             </a:pPr>
             <a:r>
@@ -27606,7 +27716,7 @@
           </a:bodyPr>
           <a:lstStyle/>
           <a:p>
-            <a:pPr algn="ctr" indent="0" marL="0">
+            <a:pPr marL="0" indent="0" algn="ctr">
               <a:buNone/>
             </a:pPr>
             <a:r>
@@ -27668,11 +27778,11 @@
         </p:spPr>
         <p:txBody>
           <a:bodyPr wrap="square" lIns="381" tIns="381" rIns="381" bIns="381" rtlCol="0" anchor="t">
-            <a:normAutofit/>
+            <a:normAutofit lnSpcReduction="10000"/>
           </a:bodyPr>
           <a:lstStyle/>
           <a:p>
-            <a:pPr algn="ctr" indent="0" marL="0">
+            <a:pPr marL="0" indent="0" algn="ctr">
               <a:buNone/>
             </a:pPr>
             <a:r>
@@ -27713,7 +27823,7 @@
           </a:bodyPr>
           <a:lstStyle/>
           <a:p>
-            <a:pPr algn="ctr" indent="0" marL="0">
+            <a:pPr marL="0" indent="0" algn="ctr">
               <a:buNone/>
             </a:pPr>
             <a:r>
@@ -27754,7 +27864,7 @@
           </a:bodyPr>
           <a:lstStyle/>
           <a:p>
-            <a:pPr algn="ctr" indent="0" marL="0">
+            <a:pPr marL="0" indent="0" algn="ctr">
               <a:buNone/>
             </a:pPr>
             <a:r>
@@ -27774,7 +27884,7 @@
       </p:sp>
       <p:graphicFrame>
         <p:nvGraphicFramePr>
-          <p:cNvPr id="8" name="Table 0"/>
+          <p:cNvPr id="23" name="Table 0"/>
           <p:cNvGraphicFramePr>
             <a:graphicFrameLocks noGrp="1"/>
           </p:cNvGraphicFramePr>
@@ -27795,8 +27905,20 @@
             <a:tbl>
               <a:tblPr/>
               <a:tblGrid>
-                <a:gridCol w="2194560"/>
-                <a:gridCol w="8366760"/>
+                <a:gridCol w="2194560">
+                  <a:extLst>
+                    <a:ext uri="{9D8B030D-6E8A-4147-A177-3AD203B41FA5}">
+                      <a16:colId xmlns:a16="http://schemas.microsoft.com/office/drawing/2014/main" val="20000"/>
+                    </a:ext>
+                  </a:extLst>
+                </a:gridCol>
+                <a:gridCol w="8366760">
+                  <a:extLst>
+                    <a:ext uri="{9D8B030D-6E8A-4147-A177-3AD203B41FA5}">
+                      <a16:colId xmlns:a16="http://schemas.microsoft.com/office/drawing/2014/main" val="20001"/>
+                    </a:ext>
+                  </a:extLst>
+                </a:gridCol>
               </a:tblGrid>
               <a:tr h="449580">
                 <a:tc>
@@ -27804,7 +27926,7 @@
                     <a:bodyPr/>
                     <a:lstStyle/>
                     <a:p>
-                      <a:pPr indent="0" marL="0">
+                      <a:pPr marL="0" indent="0">
                         <a:buNone/>
                       </a:pPr>
                       <a:r>
@@ -27825,7 +27947,7 @@
                       </a:endParaRPr>
                     </a:p>
                   </a:txBody>
-                  <a:tcPr marL="45720" marR="45720" marT="45720" marB="45720" anchor="mid">
+                  <a:tcPr marL="45720" marR="45720">
                     <a:lnL w="8255" cap="flat" cmpd="sng" algn="ctr">
                       <a:solidFill>
                         <a:srgbClr val="D0D5DD"/>
@@ -27869,7 +27991,7 @@
                     <a:bodyPr/>
                     <a:lstStyle/>
                     <a:p>
-                      <a:pPr indent="0" marL="0">
+                      <a:pPr marL="0" indent="0">
                         <a:buNone/>
                       </a:pPr>
                       <a:r>
@@ -27890,7 +28012,7 @@
                       </a:endParaRPr>
                     </a:p>
                   </a:txBody>
-                  <a:tcPr marL="45720" marR="45720" marT="45720" marB="45720" anchor="mid">
+                  <a:tcPr marL="45720" marR="45720">
                     <a:lnL w="8255" cap="flat" cmpd="sng" algn="ctr">
                       <a:solidFill>
                         <a:srgbClr val="D0D5DD"/>
@@ -27929,6 +28051,11 @@
                     </a:lnB>
                   </a:tcPr>
                 </a:tc>
+                <a:extLst>
+                  <a:ext uri="{0D108BD9-81ED-4DB2-BD59-A6C34878D82A}">
+                    <a16:rowId xmlns:a16="http://schemas.microsoft.com/office/drawing/2014/main" val="10000"/>
+                  </a:ext>
+                </a:extLst>
               </a:tr>
               <a:tr h="449580">
                 <a:tc>
@@ -27936,7 +28063,7 @@
                     <a:bodyPr/>
                     <a:lstStyle/>
                     <a:p>
-                      <a:pPr indent="0" marL="0">
+                      <a:pPr marL="0" indent="0">
                         <a:buNone/>
                       </a:pPr>
                       <a:r>
@@ -27957,7 +28084,7 @@
                       </a:endParaRPr>
                     </a:p>
                   </a:txBody>
-                  <a:tcPr marL="45720" marR="45720" marT="45720" marB="45720" anchor="mid">
+                  <a:tcPr marL="45720" marR="45720">
                     <a:lnL w="8255" cap="flat" cmpd="sng" algn="ctr">
                       <a:solidFill>
                         <a:srgbClr val="D0D5DD"/>
@@ -28001,7 +28128,7 @@
                     <a:bodyPr/>
                     <a:lstStyle/>
                     <a:p>
-                      <a:pPr indent="0" marL="0">
+                      <a:pPr marL="0" indent="0">
                         <a:buNone/>
                       </a:pPr>
                       <a:r>
@@ -28022,7 +28149,7 @@
                       </a:endParaRPr>
                     </a:p>
                   </a:txBody>
-                  <a:tcPr marL="45720" marR="45720" marT="45720" marB="45720" anchor="mid">
+                  <a:tcPr marL="45720" marR="45720">
                     <a:lnL w="8255" cap="flat" cmpd="sng" algn="ctr">
                       <a:solidFill>
                         <a:srgbClr val="D0D5DD"/>
@@ -28061,6 +28188,11 @@
                     </a:lnB>
                   </a:tcPr>
                 </a:tc>
+                <a:extLst>
+                  <a:ext uri="{0D108BD9-81ED-4DB2-BD59-A6C34878D82A}">
+                    <a16:rowId xmlns:a16="http://schemas.microsoft.com/office/drawing/2014/main" val="10001"/>
+                  </a:ext>
+                </a:extLst>
               </a:tr>
               <a:tr h="449580">
                 <a:tc>
@@ -28068,7 +28200,7 @@
                     <a:bodyPr/>
                     <a:lstStyle/>
                     <a:p>
-                      <a:pPr indent="0" marL="0">
+                      <a:pPr marL="0" indent="0">
                         <a:buNone/>
                       </a:pPr>
                       <a:r>
@@ -28089,7 +28221,7 @@
                       </a:endParaRPr>
                     </a:p>
                   </a:txBody>
-                  <a:tcPr marL="45720" marR="45720" marT="45720" marB="45720" anchor="mid">
+                  <a:tcPr marL="45720" marR="45720">
                     <a:lnL w="8255" cap="flat" cmpd="sng" algn="ctr">
                       <a:solidFill>
                         <a:srgbClr val="D0D5DD"/>
@@ -28133,7 +28265,7 @@
                     <a:bodyPr/>
                     <a:lstStyle/>
                     <a:p>
-                      <a:pPr indent="0" marL="0">
+                      <a:pPr marL="0" indent="0">
                         <a:buNone/>
                       </a:pPr>
                       <a:r>
@@ -28154,7 +28286,7 @@
                       </a:endParaRPr>
                     </a:p>
                   </a:txBody>
-                  <a:tcPr marL="45720" marR="45720" marT="45720" marB="45720" anchor="mid">
+                  <a:tcPr marL="45720" marR="45720">
                     <a:lnL w="8255" cap="flat" cmpd="sng" algn="ctr">
                       <a:solidFill>
                         <a:srgbClr val="D0D5DD"/>
@@ -28193,6 +28325,11 @@
                     </a:lnB>
                   </a:tcPr>
                 </a:tc>
+                <a:extLst>
+                  <a:ext uri="{0D108BD9-81ED-4DB2-BD59-A6C34878D82A}">
+                    <a16:rowId xmlns:a16="http://schemas.microsoft.com/office/drawing/2014/main" val="10002"/>
+                  </a:ext>
+                </a:extLst>
               </a:tr>
               <a:tr h="449580">
                 <a:tc>
@@ -28200,7 +28337,7 @@
                     <a:bodyPr/>
                     <a:lstStyle/>
                     <a:p>
-                      <a:pPr indent="0" marL="0">
+                      <a:pPr marL="0" indent="0">
                         <a:buNone/>
                       </a:pPr>
                       <a:r>
@@ -28221,7 +28358,7 @@
                       </a:endParaRPr>
                     </a:p>
                   </a:txBody>
-                  <a:tcPr marL="45720" marR="45720" marT="45720" marB="45720" anchor="mid">
+                  <a:tcPr marL="45720" marR="45720">
                     <a:lnL w="8255" cap="flat" cmpd="sng" algn="ctr">
                       <a:solidFill>
                         <a:srgbClr val="D0D5DD"/>
@@ -28265,7 +28402,7 @@
                     <a:bodyPr/>
                     <a:lstStyle/>
                     <a:p>
-                      <a:pPr indent="0" marL="0">
+                      <a:pPr marL="0" indent="0">
                         <a:buNone/>
                       </a:pPr>
                       <a:r>
@@ -28286,7 +28423,7 @@
                       </a:endParaRPr>
                     </a:p>
                   </a:txBody>
-                  <a:tcPr marL="45720" marR="45720" marT="45720" marB="45720" anchor="mid">
+                  <a:tcPr marL="45720" marR="45720">
                     <a:lnL w="8255" cap="flat" cmpd="sng" algn="ctr">
                       <a:solidFill>
                         <a:srgbClr val="D0D5DD"/>
@@ -28325,6 +28462,11 @@
                     </a:lnB>
                   </a:tcPr>
                 </a:tc>
+                <a:extLst>
+                  <a:ext uri="{0D108BD9-81ED-4DB2-BD59-A6C34878D82A}">
+                    <a16:rowId xmlns:a16="http://schemas.microsoft.com/office/drawing/2014/main" val="10003"/>
+                  </a:ext>
+                </a:extLst>
               </a:tr>
               <a:tr h="449580">
                 <a:tc>
@@ -28332,7 +28474,7 @@
                     <a:bodyPr/>
                     <a:lstStyle/>
                     <a:p>
-                      <a:pPr indent="0" marL="0">
+                      <a:pPr marL="0" indent="0">
                         <a:buNone/>
                       </a:pPr>
                       <a:r>
@@ -28353,7 +28495,7 @@
                       </a:endParaRPr>
                     </a:p>
                   </a:txBody>
-                  <a:tcPr marL="45720" marR="45720" marT="45720" marB="45720" anchor="mid">
+                  <a:tcPr marL="45720" marR="45720">
                     <a:lnL w="8255" cap="flat" cmpd="sng" algn="ctr">
                       <a:solidFill>
                         <a:srgbClr val="D0D5DD"/>
@@ -28397,7 +28539,7 @@
                     <a:bodyPr/>
                     <a:lstStyle/>
                     <a:p>
-                      <a:pPr indent="0" marL="0">
+                      <a:pPr marL="0" indent="0">
                         <a:buNone/>
                       </a:pPr>
                       <a:r>
@@ -28418,7 +28560,7 @@
                       </a:endParaRPr>
                     </a:p>
                   </a:txBody>
-                  <a:tcPr marL="45720" marR="45720" marT="45720" marB="45720" anchor="mid">
+                  <a:tcPr marL="45720" marR="45720">
                     <a:lnL w="8255" cap="flat" cmpd="sng" algn="ctr">
                       <a:solidFill>
                         <a:srgbClr val="D0D5DD"/>
@@ -28457,6 +28599,11 @@
                     </a:lnB>
                   </a:tcPr>
                 </a:tc>
+                <a:extLst>
+                  <a:ext uri="{0D108BD9-81ED-4DB2-BD59-A6C34878D82A}">
+                    <a16:rowId xmlns:a16="http://schemas.microsoft.com/office/drawing/2014/main" val="10004"/>
+                  </a:ext>
+                </a:extLst>
               </a:tr>
               <a:tr h="449580">
                 <a:tc>
@@ -28464,7 +28611,7 @@
                     <a:bodyPr/>
                     <a:lstStyle/>
                     <a:p>
-                      <a:pPr indent="0" marL="0">
+                      <a:pPr marL="0" indent="0">
                         <a:buNone/>
                       </a:pPr>
                       <a:r>
@@ -28485,7 +28632,7 @@
                       </a:endParaRPr>
                     </a:p>
                   </a:txBody>
-                  <a:tcPr marL="45720" marR="45720" marT="45720" marB="45720" anchor="mid">
+                  <a:tcPr marL="45720" marR="45720">
                     <a:lnL w="8255" cap="flat" cmpd="sng" algn="ctr">
                       <a:solidFill>
                         <a:srgbClr val="D0D5DD"/>
@@ -28529,7 +28676,7 @@
                     <a:bodyPr/>
                     <a:lstStyle/>
                     <a:p>
-                      <a:pPr indent="0" marL="0">
+                      <a:pPr marL="0" indent="0">
                         <a:buNone/>
                       </a:pPr>
                       <a:r>
@@ -28550,7 +28697,7 @@
                       </a:endParaRPr>
                     </a:p>
                   </a:txBody>
-                  <a:tcPr marL="45720" marR="45720" marT="45720" marB="45720" anchor="mid">
+                  <a:tcPr marL="45720" marR="45720">
                     <a:lnL w="8255" cap="flat" cmpd="sng" algn="ctr">
                       <a:solidFill>
                         <a:srgbClr val="D0D5DD"/>
@@ -28589,6 +28736,11 @@
                     </a:lnB>
                   </a:tcPr>
                 </a:tc>
+                <a:extLst>
+                  <a:ext uri="{0D108BD9-81ED-4DB2-BD59-A6C34878D82A}">
+                    <a16:rowId xmlns:a16="http://schemas.microsoft.com/office/drawing/2014/main" val="10005"/>
+                  </a:ext>
+                </a:extLst>
               </a:tr>
             </a:tbl>
           </a:graphicData>
@@ -28617,7 +28769,7 @@
           </a:bodyPr>
           <a:lstStyle/>
           <a:p>
-            <a:pPr indent="0" marL="0">
+            <a:pPr marL="0" indent="0">
               <a:buNone/>
             </a:pPr>
             <a:r>
@@ -28655,7 +28807,7 @@
           </a:prstGeom>
           <a:extLst>
             <a:ext uri="{C572A759-6A51-4108-AA02-DFA0A04FC94B}">
-              <ma14:wrappingTextBoxFlag xmlns:ma14="http://schemas.microsoft.com/office/mac/drawingml/2011/main" val="0"/>
+              <ma14:wrappingTextBoxFlag xmlns:ma14="http://schemas.microsoft.com/office/mac/drawingml/2011/main" xmlns="" val="0"/>
             </a:ext>
           </a:extLst>
         </p:spPr>
@@ -28676,7 +28828,7 @@
           <a:p>
             <a:pPr algn="l"/>
             <a:fld id="{F7021451-1387-4CA6-816F-3879F97B5CBC}" type="slidenum">
-              <a:rPr b="0" lang="en-US"/>
+              <a:rPr lang="en-US" b="0"/>
               <a:t>7</a:t>
             </a:fld>
             <a:endParaRPr lang="en-US"/>
@@ -28699,6 +28851,7 @@
         <a:solidFill>
           <a:srgbClr val="FFFFFF"/>
         </a:solidFill>
+        <a:effectLst/>
       </p:bgPr>
     </p:bg>
     <p:spTree>
@@ -28736,7 +28889,7 @@
           <a:bodyPr wrap="square" lIns="0" tIns="0" rIns="0" bIns="0" rtlCol="0" anchor="ctr"/>
           <a:lstStyle/>
           <a:p>
-            <a:pPr indent="0" marL="0">
+            <a:pPr marL="0" indent="0">
               <a:buNone/>
             </a:pPr>
             <a:r>
@@ -28777,7 +28930,7 @@
           </a:bodyPr>
           <a:lstStyle/>
           <a:p>
-            <a:pPr indent="0" marL="0">
+            <a:pPr marL="0" indent="0">
               <a:buNone/>
             </a:pPr>
             <a:r>
@@ -28841,9 +28994,27 @@
             <a:tbl>
               <a:tblPr/>
               <a:tblGrid>
-                <a:gridCol w="685800"/>
-                <a:gridCol w="3520440"/>
-                <a:gridCol w="2331720"/>
+                <a:gridCol w="685800">
+                  <a:extLst>
+                    <a:ext uri="{9D8B030D-6E8A-4147-A177-3AD203B41FA5}">
+                      <a16:colId xmlns:a16="http://schemas.microsoft.com/office/drawing/2014/main" val="20000"/>
+                    </a:ext>
+                  </a:extLst>
+                </a:gridCol>
+                <a:gridCol w="3520440">
+                  <a:extLst>
+                    <a:ext uri="{9D8B030D-6E8A-4147-A177-3AD203B41FA5}">
+                      <a16:colId xmlns:a16="http://schemas.microsoft.com/office/drawing/2014/main" val="20001"/>
+                    </a:ext>
+                  </a:extLst>
+                </a:gridCol>
+                <a:gridCol w="2331720">
+                  <a:extLst>
+                    <a:ext uri="{9D8B030D-6E8A-4147-A177-3AD203B41FA5}">
+                      <a16:colId xmlns:a16="http://schemas.microsoft.com/office/drawing/2014/main" val="20002"/>
+                    </a:ext>
+                  </a:extLst>
+                </a:gridCol>
               </a:tblGrid>
               <a:tr h="632460">
                 <a:tc>
@@ -28851,7 +29022,7 @@
                     <a:bodyPr/>
                     <a:lstStyle/>
                     <a:p>
-                      <a:pPr indent="0" marL="0">
+                      <a:pPr marL="0" indent="0">
                         <a:buNone/>
                       </a:pPr>
                       <a:r>
@@ -28872,7 +29043,7 @@
                       </a:endParaRPr>
                     </a:p>
                   </a:txBody>
-                  <a:tcPr marL="45720" marR="45720" marT="45720" marB="45720" anchor="mid">
+                  <a:tcPr marL="45720" marR="45720">
                     <a:lnL w="8255" cap="flat" cmpd="sng" algn="ctr">
                       <a:solidFill>
                         <a:srgbClr val="D0D5DD"/>
@@ -28916,7 +29087,7 @@
                     <a:bodyPr/>
                     <a:lstStyle/>
                     <a:p>
-                      <a:pPr indent="0" marL="0">
+                      <a:pPr marL="0" indent="0">
                         <a:buNone/>
                       </a:pPr>
                       <a:r>
@@ -28937,7 +29108,7 @@
                       </a:endParaRPr>
                     </a:p>
                   </a:txBody>
-                  <a:tcPr marL="45720" marR="45720" marT="45720" marB="45720" anchor="mid">
+                  <a:tcPr marL="45720" marR="45720">
                     <a:lnL w="8255" cap="flat" cmpd="sng" algn="ctr">
                       <a:solidFill>
                         <a:srgbClr val="D0D5DD"/>
@@ -28981,7 +29152,7 @@
                     <a:bodyPr/>
                     <a:lstStyle/>
                     <a:p>
-                      <a:pPr indent="0" marL="0">
+                      <a:pPr marL="0" indent="0">
                         <a:buNone/>
                       </a:pPr>
                       <a:r>
@@ -29002,7 +29173,7 @@
                       </a:endParaRPr>
                     </a:p>
                   </a:txBody>
-                  <a:tcPr marL="45720" marR="45720" marT="45720" marB="45720" anchor="mid">
+                  <a:tcPr marL="45720" marR="45720">
                     <a:lnL w="8255" cap="flat" cmpd="sng" algn="ctr">
                       <a:solidFill>
                         <a:srgbClr val="D0D5DD"/>
@@ -29041,6 +29212,11 @@
                     </a:lnB>
                   </a:tcPr>
                 </a:tc>
+                <a:extLst>
+                  <a:ext uri="{0D108BD9-81ED-4DB2-BD59-A6C34878D82A}">
+                    <a16:rowId xmlns:a16="http://schemas.microsoft.com/office/drawing/2014/main" val="10000"/>
+                  </a:ext>
+                </a:extLst>
               </a:tr>
               <a:tr h="632460">
                 <a:tc>
@@ -29048,7 +29224,7 @@
                     <a:bodyPr/>
                     <a:lstStyle/>
                     <a:p>
-                      <a:pPr indent="0" marL="0">
+                      <a:pPr marL="0" indent="0">
                         <a:buNone/>
                       </a:pPr>
                       <a:r>
@@ -29069,7 +29245,7 @@
                       </a:endParaRPr>
                     </a:p>
                   </a:txBody>
-                  <a:tcPr marL="45720" marR="45720" marT="45720" marB="45720" anchor="mid">
+                  <a:tcPr marL="45720" marR="45720">
                     <a:lnL w="8255" cap="flat" cmpd="sng" algn="ctr">
                       <a:solidFill>
                         <a:srgbClr val="D0D5DD"/>
@@ -29113,7 +29289,7 @@
                     <a:bodyPr/>
                     <a:lstStyle/>
                     <a:p>
-                      <a:pPr indent="0" marL="0">
+                      <a:pPr marL="0" indent="0">
                         <a:buNone/>
                       </a:pPr>
                       <a:r>
@@ -29134,7 +29310,7 @@
                       </a:endParaRPr>
                     </a:p>
                   </a:txBody>
-                  <a:tcPr marL="45720" marR="45720" marT="45720" marB="45720" anchor="mid">
+                  <a:tcPr marL="45720" marR="45720">
                     <a:lnL w="8255" cap="flat" cmpd="sng" algn="ctr">
                       <a:solidFill>
                         <a:srgbClr val="D0D5DD"/>
@@ -29178,7 +29354,7 @@
                     <a:bodyPr/>
                     <a:lstStyle/>
                     <a:p>
-                      <a:pPr indent="0" marL="0">
+                      <a:pPr marL="0" indent="0">
                         <a:buNone/>
                       </a:pPr>
                       <a:r>
@@ -29199,7 +29375,7 @@
                       </a:endParaRPr>
                     </a:p>
                   </a:txBody>
-                  <a:tcPr marL="45720" marR="45720" marT="45720" marB="45720" anchor="mid">
+                  <a:tcPr marL="45720" marR="45720">
                     <a:lnL w="8255" cap="flat" cmpd="sng" algn="ctr">
                       <a:solidFill>
                         <a:srgbClr val="D0D5DD"/>
@@ -29238,6 +29414,11 @@
                     </a:lnB>
                   </a:tcPr>
                 </a:tc>
+                <a:extLst>
+                  <a:ext uri="{0D108BD9-81ED-4DB2-BD59-A6C34878D82A}">
+                    <a16:rowId xmlns:a16="http://schemas.microsoft.com/office/drawing/2014/main" val="10001"/>
+                  </a:ext>
+                </a:extLst>
               </a:tr>
               <a:tr h="632460">
                 <a:tc>
@@ -29245,7 +29426,7 @@
                     <a:bodyPr/>
                     <a:lstStyle/>
                     <a:p>
-                      <a:pPr indent="0" marL="0">
+                      <a:pPr marL="0" indent="0">
                         <a:buNone/>
                       </a:pPr>
                       <a:r>
@@ -29266,7 +29447,7 @@
                       </a:endParaRPr>
                     </a:p>
                   </a:txBody>
-                  <a:tcPr marL="45720" marR="45720" marT="45720" marB="45720" anchor="mid">
+                  <a:tcPr marL="45720" marR="45720">
                     <a:lnL w="8255" cap="flat" cmpd="sng" algn="ctr">
                       <a:solidFill>
                         <a:srgbClr val="D0D5DD"/>
@@ -29310,7 +29491,7 @@
                     <a:bodyPr/>
                     <a:lstStyle/>
                     <a:p>
-                      <a:pPr indent="0" marL="0">
+                      <a:pPr marL="0" indent="0">
                         <a:buNone/>
                       </a:pPr>
                       <a:r>
@@ -29331,7 +29512,7 @@
                       </a:endParaRPr>
                     </a:p>
                   </a:txBody>
-                  <a:tcPr marL="45720" marR="45720" marT="45720" marB="45720" anchor="mid">
+                  <a:tcPr marL="45720" marR="45720">
                     <a:lnL w="8255" cap="flat" cmpd="sng" algn="ctr">
                       <a:solidFill>
                         <a:srgbClr val="D0D5DD"/>
@@ -29375,7 +29556,7 @@
                     <a:bodyPr/>
                     <a:lstStyle/>
                     <a:p>
-                      <a:pPr indent="0" marL="0">
+                      <a:pPr marL="0" indent="0">
                         <a:buNone/>
                       </a:pPr>
                       <a:r>
@@ -29396,7 +29577,7 @@
                       </a:endParaRPr>
                     </a:p>
                   </a:txBody>
-                  <a:tcPr marL="45720" marR="45720" marT="45720" marB="45720" anchor="mid">
+                  <a:tcPr marL="45720" marR="45720">
                     <a:lnL w="8255" cap="flat" cmpd="sng" algn="ctr">
                       <a:solidFill>
                         <a:srgbClr val="D0D5DD"/>
@@ -29435,6 +29616,11 @@
                     </a:lnB>
                   </a:tcPr>
                 </a:tc>
+                <a:extLst>
+                  <a:ext uri="{0D108BD9-81ED-4DB2-BD59-A6C34878D82A}">
+                    <a16:rowId xmlns:a16="http://schemas.microsoft.com/office/drawing/2014/main" val="10002"/>
+                  </a:ext>
+                </a:extLst>
               </a:tr>
               <a:tr h="632460">
                 <a:tc>
@@ -29442,7 +29628,7 @@
                     <a:bodyPr/>
                     <a:lstStyle/>
                     <a:p>
-                      <a:pPr indent="0" marL="0">
+                      <a:pPr marL="0" indent="0">
                         <a:buNone/>
                       </a:pPr>
                       <a:r>
@@ -29463,7 +29649,7 @@
                       </a:endParaRPr>
                     </a:p>
                   </a:txBody>
-                  <a:tcPr marL="45720" marR="45720" marT="45720" marB="45720" anchor="mid">
+                  <a:tcPr marL="45720" marR="45720">
                     <a:lnL w="8255" cap="flat" cmpd="sng" algn="ctr">
                       <a:solidFill>
                         <a:srgbClr val="D0D5DD"/>
@@ -29507,7 +29693,7 @@
                     <a:bodyPr/>
                     <a:lstStyle/>
                     <a:p>
-                      <a:pPr indent="0" marL="0">
+                      <a:pPr marL="0" indent="0">
                         <a:buNone/>
                       </a:pPr>
                       <a:r>
@@ -29528,7 +29714,7 @@
                       </a:endParaRPr>
                     </a:p>
                   </a:txBody>
-                  <a:tcPr marL="45720" marR="45720" marT="45720" marB="45720" anchor="mid">
+                  <a:tcPr marL="45720" marR="45720">
                     <a:lnL w="8255" cap="flat" cmpd="sng" algn="ctr">
                       <a:solidFill>
                         <a:srgbClr val="D0D5DD"/>
@@ -29572,7 +29758,7 @@
                     <a:bodyPr/>
                     <a:lstStyle/>
                     <a:p>
-                      <a:pPr indent="0" marL="0">
+                      <a:pPr marL="0" indent="0">
                         <a:buNone/>
                       </a:pPr>
                       <a:r>
@@ -29593,7 +29779,7 @@
                       </a:endParaRPr>
                     </a:p>
                   </a:txBody>
-                  <a:tcPr marL="45720" marR="45720" marT="45720" marB="45720" anchor="mid">
+                  <a:tcPr marL="45720" marR="45720">
                     <a:lnL w="8255" cap="flat" cmpd="sng" algn="ctr">
                       <a:solidFill>
                         <a:srgbClr val="D0D5DD"/>
@@ -29632,6 +29818,11 @@
                     </a:lnB>
                   </a:tcPr>
                 </a:tc>
+                <a:extLst>
+                  <a:ext uri="{0D108BD9-81ED-4DB2-BD59-A6C34878D82A}">
+                    <a16:rowId xmlns:a16="http://schemas.microsoft.com/office/drawing/2014/main" val="10003"/>
+                  </a:ext>
+                </a:extLst>
               </a:tr>
               <a:tr h="632460">
                 <a:tc>
@@ -29639,7 +29830,7 @@
                     <a:bodyPr/>
                     <a:lstStyle/>
                     <a:p>
-                      <a:pPr indent="0" marL="0">
+                      <a:pPr marL="0" indent="0">
                         <a:buNone/>
                       </a:pPr>
                       <a:r>
@@ -29660,7 +29851,7 @@
                       </a:endParaRPr>
                     </a:p>
                   </a:txBody>
-                  <a:tcPr marL="45720" marR="45720" marT="45720" marB="45720" anchor="mid">
+                  <a:tcPr marL="45720" marR="45720">
                     <a:lnL w="8255" cap="flat" cmpd="sng" algn="ctr">
                       <a:solidFill>
                         <a:srgbClr val="D0D5DD"/>
@@ -29704,7 +29895,7 @@
                     <a:bodyPr/>
                     <a:lstStyle/>
                     <a:p>
-                      <a:pPr indent="0" marL="0">
+                      <a:pPr marL="0" indent="0">
                         <a:buNone/>
                       </a:pPr>
                       <a:r>
@@ -29725,7 +29916,7 @@
                       </a:endParaRPr>
                     </a:p>
                   </a:txBody>
-                  <a:tcPr marL="45720" marR="45720" marT="45720" marB="45720" anchor="mid">
+                  <a:tcPr marL="45720" marR="45720">
                     <a:lnL w="8255" cap="flat" cmpd="sng" algn="ctr">
                       <a:solidFill>
                         <a:srgbClr val="D0D5DD"/>
@@ -29769,7 +29960,7 @@
                     <a:bodyPr/>
                     <a:lstStyle/>
                     <a:p>
-                      <a:pPr indent="0" marL="0">
+                      <a:pPr marL="0" indent="0">
                         <a:buNone/>
                       </a:pPr>
                       <a:r>
@@ -29790,7 +29981,7 @@
                       </a:endParaRPr>
                     </a:p>
                   </a:txBody>
-                  <a:tcPr marL="45720" marR="45720" marT="45720" marB="45720" anchor="mid">
+                  <a:tcPr marL="45720" marR="45720">
                     <a:lnL w="8255" cap="flat" cmpd="sng" algn="ctr">
                       <a:solidFill>
                         <a:srgbClr val="D0D5DD"/>
@@ -29829,6 +30020,11 @@
                     </a:lnB>
                   </a:tcPr>
                 </a:tc>
+                <a:extLst>
+                  <a:ext uri="{0D108BD9-81ED-4DB2-BD59-A6C34878D82A}">
+                    <a16:rowId xmlns:a16="http://schemas.microsoft.com/office/drawing/2014/main" val="10004"/>
+                  </a:ext>
+                </a:extLst>
               </a:tr>
               <a:tr h="632460">
                 <a:tc>
@@ -29836,7 +30032,7 @@
                     <a:bodyPr/>
                     <a:lstStyle/>
                     <a:p>
-                      <a:pPr indent="0" marL="0">
+                      <a:pPr marL="0" indent="0">
                         <a:buNone/>
                       </a:pPr>
                       <a:r>
@@ -29857,7 +30053,7 @@
                       </a:endParaRPr>
                     </a:p>
                   </a:txBody>
-                  <a:tcPr marL="45720" marR="45720" marT="45720" marB="45720" anchor="mid">
+                  <a:tcPr marL="45720" marR="45720">
                     <a:lnL w="8255" cap="flat" cmpd="sng" algn="ctr">
                       <a:solidFill>
                         <a:srgbClr val="D0D5DD"/>
@@ -29901,7 +30097,7 @@
                     <a:bodyPr/>
                     <a:lstStyle/>
                     <a:p>
-                      <a:pPr indent="0" marL="0">
+                      <a:pPr marL="0" indent="0">
                         <a:buNone/>
                       </a:pPr>
                       <a:r>
@@ -29922,7 +30118,7 @@
                       </a:endParaRPr>
                     </a:p>
                   </a:txBody>
-                  <a:tcPr marL="45720" marR="45720" marT="45720" marB="45720" anchor="mid">
+                  <a:tcPr marL="45720" marR="45720">
                     <a:lnL w="8255" cap="flat" cmpd="sng" algn="ctr">
                       <a:solidFill>
                         <a:srgbClr val="D0D5DD"/>
@@ -29966,7 +30162,7 @@
                     <a:bodyPr/>
                     <a:lstStyle/>
                     <a:p>
-                      <a:pPr indent="0" marL="0">
+                      <a:pPr marL="0" indent="0">
                         <a:buNone/>
                       </a:pPr>
                       <a:r>
@@ -29987,7 +30183,7 @@
                       </a:endParaRPr>
                     </a:p>
                   </a:txBody>
-                  <a:tcPr marL="45720" marR="45720" marT="45720" marB="45720" anchor="mid">
+                  <a:tcPr marL="45720" marR="45720">
                     <a:lnL w="8255" cap="flat" cmpd="sng" algn="ctr">
                       <a:solidFill>
                         <a:srgbClr val="D0D5DD"/>
@@ -30026,6 +30222,11 @@
                     </a:lnB>
                   </a:tcPr>
                 </a:tc>
+                <a:extLst>
+                  <a:ext uri="{0D108BD9-81ED-4DB2-BD59-A6C34878D82A}">
+                    <a16:rowId xmlns:a16="http://schemas.microsoft.com/office/drawing/2014/main" val="10005"/>
+                  </a:ext>
+                </a:extLst>
               </a:tr>
             </a:tbl>
           </a:graphicData>
@@ -30079,7 +30280,7 @@
           </a:bodyPr>
           <a:lstStyle/>
           <a:p>
-            <a:pPr indent="0" marL="0">
+            <a:pPr marL="0" indent="0">
               <a:buNone/>
             </a:pPr>
             <a:r>
@@ -30120,7 +30321,7 @@
           </a:bodyPr>
           <a:lstStyle/>
           <a:p>
-            <a:pPr indent="0" marL="0">
+            <a:pPr marL="0" indent="0">
               <a:buNone/>
             </a:pPr>
             <a:r>
@@ -30140,7 +30341,7 @@
       </p:sp>
       <p:sp>
         <p:nvSpPr>
-          <p:cNvPr id="9" name="Shape 6"/>
+          <p:cNvPr id="5" name="Shape 6"/>
           <p:cNvSpPr/>
           <p:nvPr/>
         </p:nvSpPr>
@@ -30186,7 +30387,7 @@
           </a:bodyPr>
           <a:lstStyle/>
           <a:p>
-            <a:pPr indent="0" marL="0">
+            <a:pPr marL="0" indent="0">
               <a:buNone/>
             </a:pPr>
             <a:r>
@@ -30227,7 +30428,7 @@
           </a:bodyPr>
           <a:lstStyle/>
           <a:p>
-            <a:pPr indent="0" marL="0">
+            <a:pPr marL="0" indent="0">
               <a:buNone/>
             </a:pPr>
             <a:r>
@@ -30293,7 +30494,7 @@
           </a:bodyPr>
           <a:lstStyle/>
           <a:p>
-            <a:pPr indent="0" marL="0">
+            <a:pPr marL="0" indent="0">
               <a:buNone/>
             </a:pPr>
             <a:r>
@@ -30334,7 +30535,7 @@
           </a:bodyPr>
           <a:lstStyle/>
           <a:p>
-            <a:pPr indent="0" marL="0">
+            <a:pPr marL="0" indent="0">
               <a:buNone/>
             </a:pPr>
             <a:r>
@@ -30375,7 +30576,7 @@
           </a:bodyPr>
           <a:lstStyle/>
           <a:p>
-            <a:pPr indent="0" marL="0">
+            <a:pPr marL="0" indent="0">
               <a:buNone/>
             </a:pPr>
             <a:r>
@@ -30413,7 +30614,7 @@
           </a:prstGeom>
           <a:extLst>
             <a:ext uri="{C572A759-6A51-4108-AA02-DFA0A04FC94B}">
-              <ma14:wrappingTextBoxFlag xmlns:ma14="http://schemas.microsoft.com/office/mac/drawingml/2011/main" val="0"/>
+              <ma14:wrappingTextBoxFlag xmlns:ma14="http://schemas.microsoft.com/office/mac/drawingml/2011/main" xmlns="" val="0"/>
             </a:ext>
           </a:extLst>
         </p:spPr>
@@ -30434,7 +30635,7 @@
           <a:p>
             <a:pPr algn="l"/>
             <a:fld id="{F7021451-1387-4CA6-816F-3879F97B5CBC}" type="slidenum">
-              <a:rPr b="0" lang="en-US"/>
+              <a:rPr lang="en-US" b="0"/>
               <a:t>8</a:t>
             </a:fld>
             <a:endParaRPr lang="en-US"/>
@@ -30457,6 +30658,7 @@
         <a:solidFill>
           <a:srgbClr val="FFFFFF"/>
         </a:solidFill>
+        <a:effectLst/>
       </p:bgPr>
     </p:bg>
     <p:spTree>
@@ -30494,7 +30696,7 @@
           <a:bodyPr wrap="square" lIns="0" tIns="0" rIns="0" bIns="0" rtlCol="0" anchor="ctr"/>
           <a:lstStyle/>
           <a:p>
-            <a:pPr indent="0" marL="0">
+            <a:pPr marL="0" indent="0">
               <a:buNone/>
             </a:pPr>
             <a:r>
@@ -30535,7 +30737,7 @@
           </a:bodyPr>
           <a:lstStyle/>
           <a:p>
-            <a:pPr indent="0" marL="0">
+            <a:pPr marL="0" indent="0">
               <a:buNone/>
             </a:pPr>
             <a:r>
@@ -30624,7 +30826,7 @@
           </a:bodyPr>
           <a:lstStyle/>
           <a:p>
-            <a:pPr indent="0" marL="0">
+            <a:pPr marL="0" indent="0">
               <a:buNone/>
             </a:pPr>
             <a:r>
@@ -30665,7 +30867,7 @@
           </a:bodyPr>
           <a:lstStyle/>
           <a:p>
-            <a:pPr indent="0" marL="0">
+            <a:pPr marL="0" indent="0">
               <a:buNone/>
             </a:pPr>
             <a:r>
@@ -30731,7 +30933,7 @@
           </a:bodyPr>
           <a:lstStyle/>
           <a:p>
-            <a:pPr indent="0" marL="0">
+            <a:pPr marL="0" indent="0">
               <a:buNone/>
             </a:pPr>
             <a:r>
@@ -30772,7 +30974,7 @@
           </a:bodyPr>
           <a:lstStyle/>
           <a:p>
-            <a:pPr indent="0" marL="0">
+            <a:pPr marL="0" indent="0">
               <a:buNone/>
             </a:pPr>
             <a:r>
@@ -30838,7 +31040,7 @@
           </a:bodyPr>
           <a:lstStyle/>
           <a:p>
-            <a:pPr indent="0" marL="0">
+            <a:pPr marL="0" indent="0">
               <a:buNone/>
             </a:pPr>
             <a:r>
@@ -30879,7 +31081,7 @@
           </a:bodyPr>
           <a:lstStyle/>
           <a:p>
-            <a:pPr indent="0" marL="0">
+            <a:pPr marL="0" indent="0">
               <a:buNone/>
             </a:pPr>
             <a:r>
@@ -30945,7 +31147,7 @@
           </a:bodyPr>
           <a:lstStyle/>
           <a:p>
-            <a:pPr indent="0" marL="0">
+            <a:pPr marL="0" indent="0">
               <a:buNone/>
             </a:pPr>
             <a:r>
@@ -30986,7 +31188,7 @@
           </a:bodyPr>
           <a:lstStyle/>
           <a:p>
-            <a:pPr indent="0" marL="0">
+            <a:pPr marL="0" indent="0">
               <a:buNone/>
             </a:pPr>
             <a:r>
@@ -31052,7 +31254,7 @@
           </a:bodyPr>
           <a:lstStyle/>
           <a:p>
-            <a:pPr indent="0" marL="0">
+            <a:pPr marL="0" indent="0">
               <a:buNone/>
             </a:pPr>
             <a:r>
@@ -31093,7 +31295,7 @@
           </a:bodyPr>
           <a:lstStyle/>
           <a:p>
-            <a:pPr indent="0" marL="0">
+            <a:pPr marL="0" indent="0">
               <a:buNone/>
             </a:pPr>
             <a:r>
@@ -31159,7 +31361,7 @@
           </a:bodyPr>
           <a:lstStyle/>
           <a:p>
-            <a:pPr indent="0" marL="0">
+            <a:pPr marL="0" indent="0">
               <a:buNone/>
             </a:pPr>
             <a:r>
@@ -31200,7 +31402,7 @@
           </a:bodyPr>
           <a:lstStyle/>
           <a:p>
-            <a:pPr indent="0" marL="0">
+            <a:pPr marL="0" indent="0">
               <a:buNone/>
             </a:pPr>
             <a:r>
@@ -31266,7 +31468,7 @@
           </a:bodyPr>
           <a:lstStyle/>
           <a:p>
-            <a:pPr indent="0" marL="0">
+            <a:pPr marL="0" indent="0">
               <a:buNone/>
             </a:pPr>
             <a:r>
@@ -31307,7 +31509,7 @@
           </a:bodyPr>
           <a:lstStyle/>
           <a:p>
-            <a:pPr indent="0" marL="0">
+            <a:pPr marL="0" indent="0">
               <a:buNone/>
             </a:pPr>
             <a:r>
@@ -31373,7 +31575,7 @@
           </a:bodyPr>
           <a:lstStyle/>
           <a:p>
-            <a:pPr indent="0" marL="0">
+            <a:pPr marL="0" indent="0">
               <a:buNone/>
             </a:pPr>
             <a:r>
@@ -31414,7 +31616,7 @@
           </a:bodyPr>
           <a:lstStyle/>
           <a:p>
-            <a:pPr indent="0" marL="0">
+            <a:pPr marL="0" indent="0">
               <a:buNone/>
             </a:pPr>
             <a:r>
@@ -31455,7 +31657,7 @@
           </a:bodyPr>
           <a:lstStyle/>
           <a:p>
-            <a:pPr algn="ctr" indent="0" marL="0">
+            <a:pPr marL="0" indent="0" algn="ctr">
               <a:buNone/>
             </a:pPr>
             <a:r>
@@ -31475,7 +31677,7 @@
       </p:sp>
       <p:sp>
         <p:nvSpPr>
-          <p:cNvPr id="25" name="Slide Number Placeholder 0"/>
+          <p:cNvPr id="30" name="Slide Number Placeholder 0"/>
           <p:cNvSpPr>
             <a:spLocks noGrp="1"/>
           </p:cNvSpPr>
@@ -31493,7 +31695,7 @@
           </a:prstGeom>
           <a:extLst>
             <a:ext uri="{C572A759-6A51-4108-AA02-DFA0A04FC94B}">
-              <ma14:wrappingTextBoxFlag xmlns:ma14="http://schemas.microsoft.com/office/mac/drawingml/2011/main" val="0"/>
+              <ma14:wrappingTextBoxFlag xmlns:ma14="http://schemas.microsoft.com/office/mac/drawingml/2011/main" xmlns="" val="0"/>
             </a:ext>
           </a:extLst>
         </p:spPr>
@@ -31514,7 +31716,7 @@
           <a:p>
             <a:pPr algn="l"/>
             <a:fld id="{F7021451-1387-4CA6-816F-3879F97B5CBC}" type="slidenum">
-              <a:rPr b="0" lang="en-US"/>
+              <a:rPr lang="en-US" b="0"/>
               <a:t>9</a:t>
             </a:fld>
             <a:endParaRPr lang="en-US"/>
@@ -31822,4 +32024,265 @@
     </a:ext>
   </a:extLst>
 </a:theme>
+</file>
+
+<file path=ppt/theme/theme2.xml><?xml version="1.0" encoding="utf-8"?>
+<a:theme xmlns:a="http://schemas.openxmlformats.org/drawingml/2006/main" name="Office Theme">
+  <a:themeElements>
+    <a:clrScheme name="Office">
+      <a:dk1>
+        <a:sysClr val="windowText" lastClr="000000"/>
+      </a:dk1>
+      <a:lt1>
+        <a:sysClr val="window" lastClr="FFFFFF"/>
+      </a:lt1>
+      <a:dk2>
+        <a:srgbClr val="44546A"/>
+      </a:dk2>
+      <a:lt2>
+        <a:srgbClr val="E7E6E6"/>
+      </a:lt2>
+      <a:accent1>
+        <a:srgbClr val="5B9BD5"/>
+      </a:accent1>
+      <a:accent2>
+        <a:srgbClr val="ED7D31"/>
+      </a:accent2>
+      <a:accent3>
+        <a:srgbClr val="A5A5A5"/>
+      </a:accent3>
+      <a:accent4>
+        <a:srgbClr val="FFC000"/>
+      </a:accent4>
+      <a:accent5>
+        <a:srgbClr val="4472C4"/>
+      </a:accent5>
+      <a:accent6>
+        <a:srgbClr val="70AD47"/>
+      </a:accent6>
+      <a:hlink>
+        <a:srgbClr val="0563C1"/>
+      </a:hlink>
+      <a:folHlink>
+        <a:srgbClr val="954F72"/>
+      </a:folHlink>
+    </a:clrScheme>
+    <a:fontScheme name="Office">
+      <a:majorFont>
+        <a:latin typeface="Calibri Light" panose="020F0302020204030204"/>
+        <a:ea typeface=""/>
+        <a:cs typeface=""/>
+        <a:font script="Jpan" typeface="游ゴシック Light"/>
+        <a:font script="Hang" typeface="맑은 고딕"/>
+        <a:font script="Hans" typeface="等线 Light"/>
+        <a:font script="Hant" typeface="新細明體"/>
+        <a:font script="Arab" typeface="Times New Roman"/>
+        <a:font script="Hebr" typeface="Times New Roman"/>
+        <a:font script="Thai" typeface="Angsana New"/>
+        <a:font script="Ethi" typeface="Nyala"/>
+        <a:font script="Beng" typeface="Vrinda"/>
+        <a:font script="Gujr" typeface="Shruti"/>
+        <a:font script="Khmr" typeface="MoolBoran"/>
+        <a:font script="Knda" typeface="Tunga"/>
+        <a:font script="Guru" typeface="Raavi"/>
+        <a:font script="Cans" typeface="Euphemia"/>
+        <a:font script="Cher" typeface="Plantagenet Cherokee"/>
+        <a:font script="Yiii" typeface="Microsoft Yi Baiti"/>
+        <a:font script="Tibt" typeface="Microsoft Himalaya"/>
+        <a:font script="Thaa" typeface="MV Boli"/>
+        <a:font script="Deva" typeface="Mangal"/>
+        <a:font script="Telu" typeface="Gautami"/>
+        <a:font script="Taml" typeface="Latha"/>
+        <a:font script="Syrc" typeface="Estrangelo Edessa"/>
+        <a:font script="Orya" typeface="Kalinga"/>
+        <a:font script="Mlym" typeface="Kartika"/>
+        <a:font script="Laoo" typeface="DokChampa"/>
+        <a:font script="Sinh" typeface="Iskoola Pota"/>
+        <a:font script="Mong" typeface="Mongolian Baiti"/>
+        <a:font script="Viet" typeface="Times New Roman"/>
+        <a:font script="Uigh" typeface="Microsoft Uighur"/>
+        <a:font script="Geor" typeface="Sylfaen"/>
+      </a:majorFont>
+      <a:minorFont>
+        <a:latin typeface="Calibri" panose="020F0502020204030204"/>
+        <a:ea typeface=""/>
+        <a:cs typeface=""/>
+        <a:font script="Jpan" typeface="游ゴシック"/>
+        <a:font script="Hang" typeface="맑은 고딕"/>
+        <a:font script="Hans" typeface="等线"/>
+        <a:font script="Hant" typeface="新細明體"/>
+        <a:font script="Arab" typeface="Arial"/>
+        <a:font script="Hebr" typeface="Arial"/>
+        <a:font script="Thai" typeface="Cordia New"/>
+        <a:font script="Ethi" typeface="Nyala"/>
+        <a:font script="Beng" typeface="Vrinda"/>
+        <a:font script="Gujr" typeface="Shruti"/>
+        <a:font script="Khmr" typeface="DaunPenh"/>
+        <a:font script="Knda" typeface="Tunga"/>
+        <a:font script="Guru" typeface="Raavi"/>
+        <a:font script="Cans" typeface="Euphemia"/>
+        <a:font script="Cher" typeface="Plantagenet Cherokee"/>
+        <a:font script="Yiii" typeface="Microsoft Yi Baiti"/>
+        <a:font script="Tibt" typeface="Microsoft Himalaya"/>
+        <a:font script="Thaa" typeface="MV Boli"/>
+        <a:font script="Deva" typeface="Mangal"/>
+        <a:font script="Telu" typeface="Gautami"/>
+        <a:font script="Taml" typeface="Latha"/>
+        <a:font script="Syrc" typeface="Estrangelo Edessa"/>
+        <a:font script="Orya" typeface="Kalinga"/>
+        <a:font script="Mlym" typeface="Kartika"/>
+        <a:font script="Laoo" typeface="DokChampa"/>
+        <a:font script="Sinh" typeface="Iskoola Pota"/>
+        <a:font script="Mong" typeface="Mongolian Baiti"/>
+        <a:font script="Viet" typeface="Arial"/>
+        <a:font script="Uigh" typeface="Microsoft Uighur"/>
+        <a:font script="Geor" typeface="Sylfaen"/>
+      </a:minorFont>
+    </a:fontScheme>
+    <a:fmtScheme name="Office">
+      <a:fillStyleLst>
+        <a:solidFill>
+          <a:schemeClr val="phClr"/>
+        </a:solidFill>
+        <a:gradFill rotWithShape="1">
+          <a:gsLst>
+            <a:gs pos="0">
+              <a:schemeClr val="phClr">
+                <a:lumMod val="110000"/>
+                <a:satMod val="105000"/>
+                <a:tint val="67000"/>
+              </a:schemeClr>
+            </a:gs>
+            <a:gs pos="50000">
+              <a:schemeClr val="phClr">
+                <a:lumMod val="105000"/>
+                <a:satMod val="103000"/>
+                <a:tint val="73000"/>
+              </a:schemeClr>
+            </a:gs>
+            <a:gs pos="100000">
+              <a:schemeClr val="phClr">
+                <a:lumMod val="105000"/>
+                <a:satMod val="109000"/>
+                <a:tint val="81000"/>
+              </a:schemeClr>
+            </a:gs>
+          </a:gsLst>
+          <a:lin ang="5400000" scaled="0"/>
+        </a:gradFill>
+        <a:gradFill rotWithShape="1">
+          <a:gsLst>
+            <a:gs pos="0">
+              <a:schemeClr val="phClr">
+                <a:satMod val="103000"/>
+                <a:lumMod val="102000"/>
+                <a:tint val="94000"/>
+              </a:schemeClr>
+            </a:gs>
+            <a:gs pos="50000">
+              <a:schemeClr val="phClr">
+                <a:satMod val="110000"/>
+                <a:lumMod val="100000"/>
+                <a:shade val="100000"/>
+              </a:schemeClr>
+            </a:gs>
+            <a:gs pos="100000">
+              <a:schemeClr val="phClr">
+                <a:lumMod val="99000"/>
+                <a:satMod val="120000"/>
+                <a:shade val="78000"/>
+              </a:schemeClr>
+            </a:gs>
+          </a:gsLst>
+          <a:lin ang="5400000" scaled="0"/>
+        </a:gradFill>
+      </a:fillStyleLst>
+      <a:lnStyleLst>
+        <a:ln w="6350" cap="flat" cmpd="sng" algn="ctr">
+          <a:solidFill>
+            <a:schemeClr val="phClr"/>
+          </a:solidFill>
+          <a:prstDash val="solid"/>
+          <a:miter lim="800000"/>
+        </a:ln>
+        <a:ln w="12700" cap="flat" cmpd="sng" algn="ctr">
+          <a:solidFill>
+            <a:schemeClr val="phClr"/>
+          </a:solidFill>
+          <a:prstDash val="solid"/>
+          <a:miter lim="800000"/>
+        </a:ln>
+        <a:ln w="19050" cap="flat" cmpd="sng" algn="ctr">
+          <a:solidFill>
+            <a:schemeClr val="phClr"/>
+          </a:solidFill>
+          <a:prstDash val="solid"/>
+          <a:miter lim="800000"/>
+        </a:ln>
+      </a:lnStyleLst>
+      <a:effectStyleLst>
+        <a:effectStyle>
+          <a:effectLst/>
+        </a:effectStyle>
+        <a:effectStyle>
+          <a:effectLst/>
+        </a:effectStyle>
+        <a:effectStyle>
+          <a:effectLst>
+            <a:outerShdw blurRad="57150" dist="19050" dir="5400000" algn="ctr" rotWithShape="0">
+              <a:srgbClr val="000000">
+                <a:alpha val="63000"/>
+              </a:srgbClr>
+            </a:outerShdw>
+          </a:effectLst>
+        </a:effectStyle>
+      </a:effectStyleLst>
+      <a:bgFillStyleLst>
+        <a:solidFill>
+          <a:schemeClr val="phClr"/>
+        </a:solidFill>
+        <a:solidFill>
+          <a:schemeClr val="phClr">
+            <a:tint val="95000"/>
+            <a:satMod val="170000"/>
+          </a:schemeClr>
+        </a:solidFill>
+        <a:gradFill rotWithShape="1">
+          <a:gsLst>
+            <a:gs pos="0">
+              <a:schemeClr val="phClr">
+                <a:tint val="93000"/>
+                <a:satMod val="150000"/>
+                <a:shade val="98000"/>
+                <a:lumMod val="102000"/>
+              </a:schemeClr>
+            </a:gs>
+            <a:gs pos="50000">
+              <a:schemeClr val="phClr">
+                <a:tint val="98000"/>
+                <a:satMod val="130000"/>
+                <a:shade val="90000"/>
+                <a:lumMod val="103000"/>
+              </a:schemeClr>
+            </a:gs>
+            <a:gs pos="100000">
+              <a:schemeClr val="phClr">
+                <a:shade val="63000"/>
+                <a:satMod val="120000"/>
+              </a:schemeClr>
+            </a:gs>
+          </a:gsLst>
+          <a:lin ang="5400000" scaled="0"/>
+        </a:gradFill>
+      </a:bgFillStyleLst>
+    </a:fmtScheme>
+  </a:themeElements>
+  <a:objectDefaults/>
+  <a:extraClrSchemeLst/>
+  <a:extLst>
+    <a:ext uri="{05A4C25C-085E-4340-85A3-A5531E510DB2}">
+      <thm15:themeFamily xmlns:thm15="http://schemas.microsoft.com/office/thememl/2012/main" name="Office Theme" id="{62F939B6-93AF-4DB8-9C6B-D6C7DFDC589F}" vid="{4A3C46E8-61CC-4603-A589-7422A47A8E4A}"/>
+    </a:ext>
+  </a:extLst>
+</a:theme>
 </file>